--- a/Doc/vorschlag1.pptx
+++ b/Doc/vorschlag1.pptx
@@ -2,26 +2,32 @@
 <file path=ppt/presentation.xml><?xml version="1.0" encoding="utf-8"?>
 <p:presentation xmlns:a="http://schemas.openxmlformats.org/drawingml/2006/main" xmlns:r="http://schemas.openxmlformats.org/officeDocument/2006/relationships" xmlns:p="http://schemas.openxmlformats.org/presentationml/2006/main" saveSubsetFonts="1">
   <p:sldMasterIdLst>
-    <p:sldMasterId id="2147483648" r:id="rId1"/>
+    <p:sldMasterId id="2147483694" r:id="rId1"/>
   </p:sldMasterIdLst>
   <p:sldIdLst>
     <p:sldId id="256" r:id="rId2"/>
     <p:sldId id="257" r:id="rId3"/>
-    <p:sldId id="258" r:id="rId4"/>
-    <p:sldId id="259" r:id="rId5"/>
-    <p:sldId id="261" r:id="rId6"/>
-    <p:sldId id="265" r:id="rId7"/>
-    <p:sldId id="264" r:id="rId8"/>
-    <p:sldId id="262" r:id="rId9"/>
-    <p:sldId id="263" r:id="rId10"/>
+    <p:sldId id="271" r:id="rId4"/>
+    <p:sldId id="258" r:id="rId5"/>
+    <p:sldId id="269" r:id="rId6"/>
+    <p:sldId id="270" r:id="rId7"/>
+    <p:sldId id="259" r:id="rId8"/>
+    <p:sldId id="261" r:id="rId9"/>
+    <p:sldId id="265" r:id="rId10"/>
+    <p:sldId id="264" r:id="rId11"/>
+    <p:sldId id="266" r:id="rId12"/>
+    <p:sldId id="267" r:id="rId13"/>
+    <p:sldId id="262" r:id="rId14"/>
+    <p:sldId id="263" r:id="rId15"/>
+    <p:sldId id="268" r:id="rId16"/>
   </p:sldIdLst>
   <p:sldSz cx="12192000" cy="6858000"/>
   <p:notesSz cx="6858000" cy="9144000"/>
   <p:defaultTextStyle>
     <a:defPPr>
-      <a:defRPr lang="de-DE"/>
+      <a:defRPr lang="en-US"/>
     </a:defPPr>
-    <a:lvl1pPr marL="0" algn="l" defTabSz="914400" rtl="0" eaLnBrk="1" latinLnBrk="0" hangingPunct="1">
+    <a:lvl1pPr marL="0" algn="l" defTabSz="457200" rtl="0" eaLnBrk="1" latinLnBrk="0" hangingPunct="1">
       <a:defRPr sz="1800" kern="1200">
         <a:solidFill>
           <a:schemeClr val="tx1"/>
@@ -31,7 +37,7 @@
         <a:cs typeface="+mn-cs"/>
       </a:defRPr>
     </a:lvl1pPr>
-    <a:lvl2pPr marL="457200" algn="l" defTabSz="914400" rtl="0" eaLnBrk="1" latinLnBrk="0" hangingPunct="1">
+    <a:lvl2pPr marL="457200" algn="l" defTabSz="457200" rtl="0" eaLnBrk="1" latinLnBrk="0" hangingPunct="1">
       <a:defRPr sz="1800" kern="1200">
         <a:solidFill>
           <a:schemeClr val="tx1"/>
@@ -41,7 +47,7 @@
         <a:cs typeface="+mn-cs"/>
       </a:defRPr>
     </a:lvl2pPr>
-    <a:lvl3pPr marL="914400" algn="l" defTabSz="914400" rtl="0" eaLnBrk="1" latinLnBrk="0" hangingPunct="1">
+    <a:lvl3pPr marL="914400" algn="l" defTabSz="457200" rtl="0" eaLnBrk="1" latinLnBrk="0" hangingPunct="1">
       <a:defRPr sz="1800" kern="1200">
         <a:solidFill>
           <a:schemeClr val="tx1"/>
@@ -51,7 +57,7 @@
         <a:cs typeface="+mn-cs"/>
       </a:defRPr>
     </a:lvl3pPr>
-    <a:lvl4pPr marL="1371600" algn="l" defTabSz="914400" rtl="0" eaLnBrk="1" latinLnBrk="0" hangingPunct="1">
+    <a:lvl4pPr marL="1371600" algn="l" defTabSz="457200" rtl="0" eaLnBrk="1" latinLnBrk="0" hangingPunct="1">
       <a:defRPr sz="1800" kern="1200">
         <a:solidFill>
           <a:schemeClr val="tx1"/>
@@ -61,7 +67,7 @@
         <a:cs typeface="+mn-cs"/>
       </a:defRPr>
     </a:lvl4pPr>
-    <a:lvl5pPr marL="1828800" algn="l" defTabSz="914400" rtl="0" eaLnBrk="1" latinLnBrk="0" hangingPunct="1">
+    <a:lvl5pPr marL="1828800" algn="l" defTabSz="457200" rtl="0" eaLnBrk="1" latinLnBrk="0" hangingPunct="1">
       <a:defRPr sz="1800" kern="1200">
         <a:solidFill>
           <a:schemeClr val="tx1"/>
@@ -71,7 +77,7 @@
         <a:cs typeface="+mn-cs"/>
       </a:defRPr>
     </a:lvl5pPr>
-    <a:lvl6pPr marL="2286000" algn="l" defTabSz="914400" rtl="0" eaLnBrk="1" latinLnBrk="0" hangingPunct="1">
+    <a:lvl6pPr marL="2286000" algn="l" defTabSz="457200" rtl="0" eaLnBrk="1" latinLnBrk="0" hangingPunct="1">
       <a:defRPr sz="1800" kern="1200">
         <a:solidFill>
           <a:schemeClr val="tx1"/>
@@ -81,7 +87,7 @@
         <a:cs typeface="+mn-cs"/>
       </a:defRPr>
     </a:lvl6pPr>
-    <a:lvl7pPr marL="2743200" algn="l" defTabSz="914400" rtl="0" eaLnBrk="1" latinLnBrk="0" hangingPunct="1">
+    <a:lvl7pPr marL="2743200" algn="l" defTabSz="457200" rtl="0" eaLnBrk="1" latinLnBrk="0" hangingPunct="1">
       <a:defRPr sz="1800" kern="1200">
         <a:solidFill>
           <a:schemeClr val="tx1"/>
@@ -91,7 +97,7 @@
         <a:cs typeface="+mn-cs"/>
       </a:defRPr>
     </a:lvl7pPr>
-    <a:lvl8pPr marL="3200400" algn="l" defTabSz="914400" rtl="0" eaLnBrk="1" latinLnBrk="0" hangingPunct="1">
+    <a:lvl8pPr marL="3200400" algn="l" defTabSz="457200" rtl="0" eaLnBrk="1" latinLnBrk="0" hangingPunct="1">
       <a:defRPr sz="1800" kern="1200">
         <a:solidFill>
           <a:schemeClr val="tx1"/>
@@ -101,7 +107,7 @@
         <a:cs typeface="+mn-cs"/>
       </a:defRPr>
     </a:lvl8pPr>
-    <a:lvl9pPr marL="3657600" algn="l" defTabSz="914400" rtl="0" eaLnBrk="1" latinLnBrk="0" hangingPunct="1">
+    <a:lvl9pPr marL="3657600" algn="l" defTabSz="457200" rtl="0" eaLnBrk="1" latinLnBrk="0" hangingPunct="1">
       <a:defRPr sz="1800" kern="1200">
         <a:solidFill>
           <a:schemeClr val="tx1"/>
@@ -112,11 +118,16 @@
       </a:defRPr>
     </a:lvl9pPr>
   </p:defaultTextStyle>
+  <p:extLst>
+    <p:ext uri="{EFAFB233-063F-42B5-8137-9DF3F51BA10A}">
+      <p15:sldGuideLst xmlns:p15="http://schemas.microsoft.com/office/powerpoint/2012/main"/>
+    </p:ext>
+  </p:extLst>
 </p:presentation>
 </file>
 
 <file path=ppt/slideLayouts/slideLayout1.xml><?xml version="1.0" encoding="utf-8"?>
-<p:sldLayout xmlns:a="http://schemas.openxmlformats.org/drawingml/2006/main" xmlns:r="http://schemas.openxmlformats.org/officeDocument/2006/relationships" xmlns:p="http://schemas.openxmlformats.org/presentationml/2006/main" type="title" preserve="1">
+<p:sldLayout xmlns:a="http://schemas.openxmlformats.org/drawingml/2006/main" xmlns:r="http://schemas.openxmlformats.org/officeDocument/2006/relationships" xmlns:p="http://schemas.openxmlformats.org/presentationml/2006/main" showMasterSp="0" type="title" preserve="1">
   <p:cSld name="Titelfolie">
     <p:spTree>
       <p:nvGrpSpPr>
@@ -132,15 +143,562 @@
           <a:chExt cx="0" cy="0"/>
         </a:xfrm>
       </p:grpSpPr>
-      <p:sp>
-        <p:nvSpPr>
-          <p:cNvPr id="2" name="Titel 1">
-            <a:extLst>
-              <a:ext uri="{FF2B5EF4-FFF2-40B4-BE49-F238E27FC236}">
-                <a16:creationId xmlns:a16="http://schemas.microsoft.com/office/drawing/2014/main" id="{D7D2EC70-4613-5821-E440-33A578A5F31C}"/>
-              </a:ext>
-            </a:extLst>
-          </p:cNvPr>
+      <p:grpSp>
+        <p:nvGrpSpPr>
+          <p:cNvPr id="16" name="Group 15"/>
+          <p:cNvGrpSpPr/>
+          <p:nvPr/>
+        </p:nvGrpSpPr>
+        <p:grpSpPr>
+          <a:xfrm>
+            <a:off x="0" y="-8467"/>
+            <a:ext cx="12192000" cy="6866467"/>
+            <a:chOff x="0" y="-8467"/>
+            <a:chExt cx="12192000" cy="6866467"/>
+          </a:xfrm>
+        </p:grpSpPr>
+        <p:sp>
+          <p:nvSpPr>
+            <p:cNvPr id="15" name="Freeform 14"/>
+            <p:cNvSpPr/>
+            <p:nvPr/>
+          </p:nvSpPr>
+          <p:spPr>
+            <a:xfrm>
+              <a:off x="0" y="-7862"/>
+              <a:ext cx="863600" cy="5698067"/>
+            </a:xfrm>
+            <a:custGeom>
+              <a:avLst/>
+              <a:gdLst/>
+              <a:ahLst/>
+              <a:cxnLst/>
+              <a:rect l="l" t="t" r="r" b="b"/>
+              <a:pathLst>
+                <a:path w="863600" h="5698067">
+                  <a:moveTo>
+                    <a:pt x="0" y="8467"/>
+                  </a:moveTo>
+                  <a:lnTo>
+                    <a:pt x="863600" y="0"/>
+                  </a:lnTo>
+                  <a:lnTo>
+                    <a:pt x="863600" y="16934"/>
+                  </a:lnTo>
+                  <a:lnTo>
+                    <a:pt x="0" y="5698067"/>
+                  </a:lnTo>
+                  <a:lnTo>
+                    <a:pt x="0" y="8467"/>
+                  </a:lnTo>
+                  <a:close/>
+                </a:path>
+              </a:pathLst>
+            </a:custGeom>
+            <a:solidFill>
+              <a:schemeClr val="accent1">
+                <a:alpha val="70000"/>
+              </a:schemeClr>
+            </a:solidFill>
+            <a:ln>
+              <a:noFill/>
+            </a:ln>
+            <a:effectLst/>
+          </p:spPr>
+          <p:style>
+            <a:lnRef idx="1">
+              <a:schemeClr val="accent1"/>
+            </a:lnRef>
+            <a:fillRef idx="3">
+              <a:schemeClr val="accent1"/>
+            </a:fillRef>
+            <a:effectRef idx="2">
+              <a:schemeClr val="accent1"/>
+            </a:effectRef>
+            <a:fontRef idx="minor">
+              <a:schemeClr val="lt1"/>
+            </a:fontRef>
+          </p:style>
+        </p:sp>
+        <p:cxnSp>
+          <p:nvCxnSpPr>
+            <p:cNvPr id="19" name="Straight Connector 18"/>
+            <p:cNvCxnSpPr/>
+            <p:nvPr/>
+          </p:nvCxnSpPr>
+          <p:spPr>
+            <a:xfrm>
+              <a:off x="9371012" y="0"/>
+              <a:ext cx="1219200" cy="6858000"/>
+            </a:xfrm>
+            <a:prstGeom prst="line">
+              <a:avLst/>
+            </a:prstGeom>
+            <a:ln w="9525">
+              <a:solidFill>
+                <a:schemeClr val="accent1">
+                  <a:alpha val="70000"/>
+                </a:schemeClr>
+              </a:solidFill>
+            </a:ln>
+          </p:spPr>
+          <p:style>
+            <a:lnRef idx="2">
+              <a:schemeClr val="accent1"/>
+            </a:lnRef>
+            <a:fillRef idx="0">
+              <a:schemeClr val="accent1"/>
+            </a:fillRef>
+            <a:effectRef idx="1">
+              <a:schemeClr val="accent1"/>
+            </a:effectRef>
+            <a:fontRef idx="minor">
+              <a:schemeClr val="tx1"/>
+            </a:fontRef>
+          </p:style>
+        </p:cxnSp>
+        <p:cxnSp>
+          <p:nvCxnSpPr>
+            <p:cNvPr id="20" name="Straight Connector 19"/>
+            <p:cNvCxnSpPr/>
+            <p:nvPr/>
+          </p:nvCxnSpPr>
+          <p:spPr>
+            <a:xfrm flipH="1">
+              <a:off x="7425267" y="3681413"/>
+              <a:ext cx="4763558" cy="3176587"/>
+            </a:xfrm>
+            <a:prstGeom prst="line">
+              <a:avLst/>
+            </a:prstGeom>
+            <a:ln w="9525">
+              <a:solidFill>
+                <a:schemeClr val="accent1">
+                  <a:alpha val="70000"/>
+                </a:schemeClr>
+              </a:solidFill>
+            </a:ln>
+          </p:spPr>
+          <p:style>
+            <a:lnRef idx="2">
+              <a:schemeClr val="accent1"/>
+            </a:lnRef>
+            <a:fillRef idx="0">
+              <a:schemeClr val="accent1"/>
+            </a:fillRef>
+            <a:effectRef idx="1">
+              <a:schemeClr val="accent1"/>
+            </a:effectRef>
+            <a:fontRef idx="minor">
+              <a:schemeClr val="tx1"/>
+            </a:fontRef>
+          </p:style>
+        </p:cxnSp>
+        <p:sp>
+          <p:nvSpPr>
+            <p:cNvPr id="21" name="Rectangle 23"/>
+            <p:cNvSpPr/>
+            <p:nvPr/>
+          </p:nvSpPr>
+          <p:spPr>
+            <a:xfrm>
+              <a:off x="9181476" y="-8467"/>
+              <a:ext cx="3007349" cy="6866467"/>
+            </a:xfrm>
+            <a:custGeom>
+              <a:avLst/>
+              <a:gdLst/>
+              <a:ahLst/>
+              <a:cxnLst/>
+              <a:rect l="l" t="t" r="r" b="b"/>
+              <a:pathLst>
+                <a:path w="3007349" h="6866467">
+                  <a:moveTo>
+                    <a:pt x="2045532" y="0"/>
+                  </a:moveTo>
+                  <a:lnTo>
+                    <a:pt x="3007349" y="0"/>
+                  </a:lnTo>
+                  <a:lnTo>
+                    <a:pt x="3007349" y="6866467"/>
+                  </a:lnTo>
+                  <a:lnTo>
+                    <a:pt x="0" y="6866467"/>
+                  </a:lnTo>
+                  <a:lnTo>
+                    <a:pt x="2045532" y="0"/>
+                  </a:lnTo>
+                  <a:close/>
+                </a:path>
+              </a:pathLst>
+            </a:custGeom>
+            <a:solidFill>
+              <a:schemeClr val="accent1">
+                <a:alpha val="36000"/>
+              </a:schemeClr>
+            </a:solidFill>
+            <a:ln>
+              <a:noFill/>
+            </a:ln>
+            <a:effectLst/>
+          </p:spPr>
+          <p:style>
+            <a:lnRef idx="1">
+              <a:schemeClr val="accent1"/>
+            </a:lnRef>
+            <a:fillRef idx="3">
+              <a:schemeClr val="accent1"/>
+            </a:fillRef>
+            <a:effectRef idx="2">
+              <a:schemeClr val="accent1"/>
+            </a:effectRef>
+            <a:fontRef idx="minor">
+              <a:schemeClr val="lt1"/>
+            </a:fontRef>
+          </p:style>
+        </p:sp>
+        <p:sp>
+          <p:nvSpPr>
+            <p:cNvPr id="22" name="Rectangle 25"/>
+            <p:cNvSpPr/>
+            <p:nvPr/>
+          </p:nvSpPr>
+          <p:spPr>
+            <a:xfrm>
+              <a:off x="9603442" y="-8467"/>
+              <a:ext cx="2588558" cy="6866467"/>
+            </a:xfrm>
+            <a:custGeom>
+              <a:avLst/>
+              <a:gdLst/>
+              <a:ahLst/>
+              <a:cxnLst/>
+              <a:rect l="l" t="t" r="r" b="b"/>
+              <a:pathLst>
+                <a:path w="2573311" h="6866467">
+                  <a:moveTo>
+                    <a:pt x="0" y="0"/>
+                  </a:moveTo>
+                  <a:lnTo>
+                    <a:pt x="2573311" y="0"/>
+                  </a:lnTo>
+                  <a:lnTo>
+                    <a:pt x="2573311" y="6866467"/>
+                  </a:lnTo>
+                  <a:lnTo>
+                    <a:pt x="1202336" y="6866467"/>
+                  </a:lnTo>
+                  <a:lnTo>
+                    <a:pt x="0" y="0"/>
+                  </a:lnTo>
+                  <a:close/>
+                </a:path>
+              </a:pathLst>
+            </a:custGeom>
+            <a:solidFill>
+              <a:schemeClr val="accent1">
+                <a:alpha val="20000"/>
+              </a:schemeClr>
+            </a:solidFill>
+            <a:ln>
+              <a:noFill/>
+            </a:ln>
+            <a:effectLst/>
+          </p:spPr>
+          <p:style>
+            <a:lnRef idx="1">
+              <a:schemeClr val="accent1"/>
+            </a:lnRef>
+            <a:fillRef idx="3">
+              <a:schemeClr val="accent1"/>
+            </a:fillRef>
+            <a:effectRef idx="2">
+              <a:schemeClr val="accent1"/>
+            </a:effectRef>
+            <a:fontRef idx="minor">
+              <a:schemeClr val="lt1"/>
+            </a:fontRef>
+          </p:style>
+        </p:sp>
+        <p:sp>
+          <p:nvSpPr>
+            <p:cNvPr id="23" name="Isosceles Triangle 22"/>
+            <p:cNvSpPr/>
+            <p:nvPr/>
+          </p:nvSpPr>
+          <p:spPr>
+            <a:xfrm>
+              <a:off x="8932333" y="3048000"/>
+              <a:ext cx="3259667" cy="3810000"/>
+            </a:xfrm>
+            <a:prstGeom prst="triangle">
+              <a:avLst>
+                <a:gd name="adj" fmla="val 100000"/>
+              </a:avLst>
+            </a:prstGeom>
+            <a:solidFill>
+              <a:schemeClr val="accent1">
+                <a:lumMod val="75000"/>
+                <a:alpha val="66000"/>
+              </a:schemeClr>
+            </a:solidFill>
+            <a:ln>
+              <a:noFill/>
+            </a:ln>
+            <a:effectLst/>
+          </p:spPr>
+          <p:style>
+            <a:lnRef idx="1">
+              <a:schemeClr val="accent1"/>
+            </a:lnRef>
+            <a:fillRef idx="3">
+              <a:schemeClr val="accent1"/>
+            </a:fillRef>
+            <a:effectRef idx="2">
+              <a:schemeClr val="accent1"/>
+            </a:effectRef>
+            <a:fontRef idx="minor">
+              <a:schemeClr val="lt1"/>
+            </a:fontRef>
+          </p:style>
+        </p:sp>
+        <p:sp>
+          <p:nvSpPr>
+            <p:cNvPr id="24" name="Rectangle 27"/>
+            <p:cNvSpPr/>
+            <p:nvPr/>
+          </p:nvSpPr>
+          <p:spPr>
+            <a:xfrm>
+              <a:off x="9334500" y="-8467"/>
+              <a:ext cx="2854326" cy="6866467"/>
+            </a:xfrm>
+            <a:custGeom>
+              <a:avLst/>
+              <a:gdLst/>
+              <a:ahLst/>
+              <a:cxnLst/>
+              <a:rect l="l" t="t" r="r" b="b"/>
+              <a:pathLst>
+                <a:path w="2858013" h="6866467">
+                  <a:moveTo>
+                    <a:pt x="0" y="0"/>
+                  </a:moveTo>
+                  <a:lnTo>
+                    <a:pt x="2858013" y="0"/>
+                  </a:lnTo>
+                  <a:lnTo>
+                    <a:pt x="2858013" y="6866467"/>
+                  </a:lnTo>
+                  <a:lnTo>
+                    <a:pt x="2473942" y="6866467"/>
+                  </a:lnTo>
+                  <a:lnTo>
+                    <a:pt x="0" y="0"/>
+                  </a:lnTo>
+                  <a:close/>
+                </a:path>
+              </a:pathLst>
+            </a:custGeom>
+            <a:solidFill>
+              <a:schemeClr val="accent1">
+                <a:lumMod val="75000"/>
+                <a:alpha val="50000"/>
+              </a:schemeClr>
+            </a:solidFill>
+            <a:ln>
+              <a:noFill/>
+            </a:ln>
+            <a:effectLst/>
+          </p:spPr>
+          <p:style>
+            <a:lnRef idx="1">
+              <a:schemeClr val="accent1"/>
+            </a:lnRef>
+            <a:fillRef idx="3">
+              <a:schemeClr val="accent1"/>
+            </a:fillRef>
+            <a:effectRef idx="2">
+              <a:schemeClr val="accent1"/>
+            </a:effectRef>
+            <a:fontRef idx="minor">
+              <a:schemeClr val="lt1"/>
+            </a:fontRef>
+          </p:style>
+        </p:sp>
+        <p:sp>
+          <p:nvSpPr>
+            <p:cNvPr id="25" name="Rectangle 28"/>
+            <p:cNvSpPr/>
+            <p:nvPr/>
+          </p:nvSpPr>
+          <p:spPr>
+            <a:xfrm>
+              <a:off x="10898730" y="-8467"/>
+              <a:ext cx="1290094" cy="6866467"/>
+            </a:xfrm>
+            <a:custGeom>
+              <a:avLst/>
+              <a:gdLst/>
+              <a:ahLst/>
+              <a:cxnLst/>
+              <a:rect l="l" t="t" r="r" b="b"/>
+              <a:pathLst>
+                <a:path w="1290094" h="6858000">
+                  <a:moveTo>
+                    <a:pt x="1019735" y="0"/>
+                  </a:moveTo>
+                  <a:lnTo>
+                    <a:pt x="1290094" y="0"/>
+                  </a:lnTo>
+                  <a:lnTo>
+                    <a:pt x="1290094" y="6858000"/>
+                  </a:lnTo>
+                  <a:lnTo>
+                    <a:pt x="0" y="6858000"/>
+                  </a:lnTo>
+                  <a:lnTo>
+                    <a:pt x="1019735" y="0"/>
+                  </a:lnTo>
+                  <a:close/>
+                </a:path>
+              </a:pathLst>
+            </a:custGeom>
+            <a:solidFill>
+              <a:schemeClr val="accent2">
+                <a:alpha val="70000"/>
+              </a:schemeClr>
+            </a:solidFill>
+            <a:ln>
+              <a:noFill/>
+            </a:ln>
+            <a:effectLst/>
+          </p:spPr>
+          <p:style>
+            <a:lnRef idx="1">
+              <a:schemeClr val="accent1"/>
+            </a:lnRef>
+            <a:fillRef idx="3">
+              <a:schemeClr val="accent1"/>
+            </a:fillRef>
+            <a:effectRef idx="2">
+              <a:schemeClr val="accent1"/>
+            </a:effectRef>
+            <a:fontRef idx="minor">
+              <a:schemeClr val="lt1"/>
+            </a:fontRef>
+          </p:style>
+        </p:sp>
+        <p:sp>
+          <p:nvSpPr>
+            <p:cNvPr id="26" name="Rectangle 29"/>
+            <p:cNvSpPr/>
+            <p:nvPr/>
+          </p:nvSpPr>
+          <p:spPr>
+            <a:xfrm>
+              <a:off x="10938999" y="-8467"/>
+              <a:ext cx="1249825" cy="6866467"/>
+            </a:xfrm>
+            <a:custGeom>
+              <a:avLst/>
+              <a:gdLst/>
+              <a:ahLst/>
+              <a:cxnLst/>
+              <a:rect l="l" t="t" r="r" b="b"/>
+              <a:pathLst>
+                <a:path w="1249825" h="6858000">
+                  <a:moveTo>
+                    <a:pt x="0" y="0"/>
+                  </a:moveTo>
+                  <a:lnTo>
+                    <a:pt x="1249825" y="0"/>
+                  </a:lnTo>
+                  <a:lnTo>
+                    <a:pt x="1249825" y="6858000"/>
+                  </a:lnTo>
+                  <a:lnTo>
+                    <a:pt x="1109382" y="6858000"/>
+                  </a:lnTo>
+                  <a:lnTo>
+                    <a:pt x="0" y="0"/>
+                  </a:lnTo>
+                  <a:close/>
+                </a:path>
+              </a:pathLst>
+            </a:custGeom>
+            <a:solidFill>
+              <a:schemeClr val="accent2">
+                <a:lumMod val="75000"/>
+                <a:alpha val="80000"/>
+              </a:schemeClr>
+            </a:solidFill>
+            <a:ln>
+              <a:noFill/>
+            </a:ln>
+            <a:effectLst/>
+          </p:spPr>
+          <p:style>
+            <a:lnRef idx="1">
+              <a:schemeClr val="accent1"/>
+            </a:lnRef>
+            <a:fillRef idx="3">
+              <a:schemeClr val="accent1"/>
+            </a:fillRef>
+            <a:effectRef idx="2">
+              <a:schemeClr val="accent1"/>
+            </a:effectRef>
+            <a:fontRef idx="minor">
+              <a:schemeClr val="lt1"/>
+            </a:fontRef>
+          </p:style>
+        </p:sp>
+        <p:sp>
+          <p:nvSpPr>
+            <p:cNvPr id="27" name="Isosceles Triangle 26"/>
+            <p:cNvSpPr/>
+            <p:nvPr/>
+          </p:nvSpPr>
+          <p:spPr>
+            <a:xfrm>
+              <a:off x="10371666" y="3589867"/>
+              <a:ext cx="1817159" cy="3268133"/>
+            </a:xfrm>
+            <a:prstGeom prst="triangle">
+              <a:avLst>
+                <a:gd name="adj" fmla="val 100000"/>
+              </a:avLst>
+            </a:prstGeom>
+            <a:solidFill>
+              <a:schemeClr val="accent1">
+                <a:lumMod val="75000"/>
+                <a:alpha val="66000"/>
+              </a:schemeClr>
+            </a:solidFill>
+            <a:ln>
+              <a:noFill/>
+            </a:ln>
+            <a:effectLst/>
+          </p:spPr>
+          <p:style>
+            <a:lnRef idx="1">
+              <a:schemeClr val="accent1"/>
+            </a:lnRef>
+            <a:fillRef idx="3">
+              <a:schemeClr val="accent1"/>
+            </a:fillRef>
+            <a:effectRef idx="2">
+              <a:schemeClr val="accent1"/>
+            </a:effectRef>
+            <a:fontRef idx="minor">
+              <a:schemeClr val="lt1"/>
+            </a:fontRef>
+          </p:style>
+        </p:sp>
+      </p:grpSp>
+      <p:sp>
+        <p:nvSpPr>
+          <p:cNvPr id="2" name="Title 1"/>
           <p:cNvSpPr>
             <a:spLocks noGrp="1"/>
           </p:cNvSpPr>
@@ -150,15 +708,21 @@
         </p:nvSpPr>
         <p:spPr>
           <a:xfrm>
-            <a:off x="1524000" y="1122363"/>
-            <a:ext cx="9144000" cy="2387600"/>
+            <a:off x="1507067" y="2404534"/>
+            <a:ext cx="7766936" cy="1646302"/>
           </a:xfrm>
         </p:spPr>
         <p:txBody>
-          <a:bodyPr anchor="b"/>
+          <a:bodyPr anchor="b">
+            <a:noAutofit/>
+          </a:bodyPr>
           <a:lstStyle>
-            <a:lvl1pPr algn="ctr">
-              <a:defRPr sz="6000"/>
+            <a:lvl1pPr algn="r">
+              <a:defRPr sz="5400">
+                <a:solidFill>
+                  <a:schemeClr val="accent1"/>
+                </a:solidFill>
+              </a:defRPr>
             </a:lvl1pPr>
           </a:lstStyle>
           <a:p>
@@ -166,18 +730,13 @@
               <a:rPr lang="de-DE"/>
               <a:t>Mastertitelformat bearbeiten</a:t>
             </a:r>
-          </a:p>
-        </p:txBody>
-      </p:sp>
-      <p:sp>
-        <p:nvSpPr>
-          <p:cNvPr id="3" name="Untertitel 2">
-            <a:extLst>
-              <a:ext uri="{FF2B5EF4-FFF2-40B4-BE49-F238E27FC236}">
-                <a16:creationId xmlns:a16="http://schemas.microsoft.com/office/drawing/2014/main" id="{D6CD88B4-6FE7-B20B-1823-5F275680C737}"/>
-              </a:ext>
-            </a:extLst>
-          </p:cNvPr>
+            <a:endParaRPr lang="en-US" dirty="0"/>
+          </a:p>
+        </p:txBody>
+      </p:sp>
+      <p:sp>
+        <p:nvSpPr>
+          <p:cNvPr id="3" name="Subtitle 2"/>
           <p:cNvSpPr>
             <a:spLocks noGrp="1"/>
           </p:cNvSpPr>
@@ -187,48 +746,103 @@
         </p:nvSpPr>
         <p:spPr>
           <a:xfrm>
-            <a:off x="1524000" y="3602038"/>
-            <a:ext cx="9144000" cy="1655762"/>
+            <a:off x="1507067" y="4050833"/>
+            <a:ext cx="7766936" cy="1096899"/>
           </a:xfrm>
         </p:spPr>
         <p:txBody>
-          <a:bodyPr/>
+          <a:bodyPr anchor="t"/>
           <a:lstStyle>
-            <a:lvl1pPr marL="0" indent="0" algn="ctr">
-              <a:buNone/>
-              <a:defRPr sz="2400"/>
+            <a:lvl1pPr marL="0" indent="0" algn="r">
+              <a:buNone/>
+              <a:defRPr>
+                <a:solidFill>
+                  <a:schemeClr val="tx1">
+                    <a:lumMod val="50000"/>
+                    <a:lumOff val="50000"/>
+                  </a:schemeClr>
+                </a:solidFill>
+              </a:defRPr>
             </a:lvl1pPr>
             <a:lvl2pPr marL="457200" indent="0" algn="ctr">
               <a:buNone/>
-              <a:defRPr sz="2000"/>
+              <a:defRPr>
+                <a:solidFill>
+                  <a:schemeClr val="tx1">
+                    <a:tint val="75000"/>
+                  </a:schemeClr>
+                </a:solidFill>
+              </a:defRPr>
             </a:lvl2pPr>
             <a:lvl3pPr marL="914400" indent="0" algn="ctr">
               <a:buNone/>
-              <a:defRPr sz="1800"/>
+              <a:defRPr>
+                <a:solidFill>
+                  <a:schemeClr val="tx1">
+                    <a:tint val="75000"/>
+                  </a:schemeClr>
+                </a:solidFill>
+              </a:defRPr>
             </a:lvl3pPr>
             <a:lvl4pPr marL="1371600" indent="0" algn="ctr">
               <a:buNone/>
-              <a:defRPr sz="1600"/>
+              <a:defRPr>
+                <a:solidFill>
+                  <a:schemeClr val="tx1">
+                    <a:tint val="75000"/>
+                  </a:schemeClr>
+                </a:solidFill>
+              </a:defRPr>
             </a:lvl4pPr>
             <a:lvl5pPr marL="1828800" indent="0" algn="ctr">
               <a:buNone/>
-              <a:defRPr sz="1600"/>
+              <a:defRPr>
+                <a:solidFill>
+                  <a:schemeClr val="tx1">
+                    <a:tint val="75000"/>
+                  </a:schemeClr>
+                </a:solidFill>
+              </a:defRPr>
             </a:lvl5pPr>
             <a:lvl6pPr marL="2286000" indent="0" algn="ctr">
               <a:buNone/>
-              <a:defRPr sz="1600"/>
+              <a:defRPr>
+                <a:solidFill>
+                  <a:schemeClr val="tx1">
+                    <a:tint val="75000"/>
+                  </a:schemeClr>
+                </a:solidFill>
+              </a:defRPr>
             </a:lvl6pPr>
             <a:lvl7pPr marL="2743200" indent="0" algn="ctr">
               <a:buNone/>
-              <a:defRPr sz="1600"/>
+              <a:defRPr>
+                <a:solidFill>
+                  <a:schemeClr val="tx1">
+                    <a:tint val="75000"/>
+                  </a:schemeClr>
+                </a:solidFill>
+              </a:defRPr>
             </a:lvl7pPr>
             <a:lvl8pPr marL="3200400" indent="0" algn="ctr">
               <a:buNone/>
-              <a:defRPr sz="1600"/>
+              <a:defRPr>
+                <a:solidFill>
+                  <a:schemeClr val="tx1">
+                    <a:tint val="75000"/>
+                  </a:schemeClr>
+                </a:solidFill>
+              </a:defRPr>
             </a:lvl8pPr>
             <a:lvl9pPr marL="3657600" indent="0" algn="ctr">
               <a:buNone/>
-              <a:defRPr sz="1600"/>
+              <a:defRPr>
+                <a:solidFill>
+                  <a:schemeClr val="tx1">
+                    <a:tint val="75000"/>
+                  </a:schemeClr>
+                </a:solidFill>
+              </a:defRPr>
             </a:lvl9pPr>
           </a:lstStyle>
           <a:p>
@@ -236,18 +850,13 @@
               <a:rPr lang="de-DE"/>
               <a:t>Master-Untertitelformat bearbeiten</a:t>
             </a:r>
-          </a:p>
-        </p:txBody>
-      </p:sp>
-      <p:sp>
-        <p:nvSpPr>
-          <p:cNvPr id="4" name="Datumsplatzhalter 3">
-            <a:extLst>
-              <a:ext uri="{FF2B5EF4-FFF2-40B4-BE49-F238E27FC236}">
-                <a16:creationId xmlns:a16="http://schemas.microsoft.com/office/drawing/2014/main" id="{510A9375-7E34-E6C2-B2A1-2F81A7DF3A99}"/>
-              </a:ext>
-            </a:extLst>
-          </p:cNvPr>
+            <a:endParaRPr lang="en-US" dirty="0"/>
+          </a:p>
+        </p:txBody>
+      </p:sp>
+      <p:sp>
+        <p:nvSpPr>
+          <p:cNvPr id="4" name="Date Placeholder 3"/>
           <p:cNvSpPr>
             <a:spLocks noGrp="1"/>
           </p:cNvSpPr>
@@ -270,13 +879,7 @@
       </p:sp>
       <p:sp>
         <p:nvSpPr>
-          <p:cNvPr id="5" name="Fußzeilenplatzhalter 4">
-            <a:extLst>
-              <a:ext uri="{FF2B5EF4-FFF2-40B4-BE49-F238E27FC236}">
-                <a16:creationId xmlns:a16="http://schemas.microsoft.com/office/drawing/2014/main" id="{4107CE01-807E-6F6D-8F8D-CB440C5931DA}"/>
-              </a:ext>
-            </a:extLst>
-          </p:cNvPr>
+          <p:cNvPr id="5" name="Footer Placeholder 4"/>
           <p:cNvSpPr>
             <a:spLocks noGrp="1"/>
           </p:cNvSpPr>
@@ -295,13 +898,7 @@
       </p:sp>
       <p:sp>
         <p:nvSpPr>
-          <p:cNvPr id="6" name="Foliennummernplatzhalter 5">
-            <a:extLst>
-              <a:ext uri="{FF2B5EF4-FFF2-40B4-BE49-F238E27FC236}">
-                <a16:creationId xmlns:a16="http://schemas.microsoft.com/office/drawing/2014/main" id="{C095009E-04D5-5739-3D3F-A1DD23429B91}"/>
-              </a:ext>
-            </a:extLst>
-          </p:cNvPr>
+          <p:cNvPr id="6" name="Slide Number Placeholder 5"/>
           <p:cNvSpPr>
             <a:spLocks noGrp="1"/>
           </p:cNvSpPr>
@@ -325,7 +922,7 @@
     </p:spTree>
     <p:extLst>
       <p:ext uri="{BB962C8B-B14F-4D97-AF65-F5344CB8AC3E}">
-        <p14:creationId xmlns:p14="http://schemas.microsoft.com/office/powerpoint/2010/main" val="2722646100"/>
+        <p14:creationId xmlns:p14="http://schemas.microsoft.com/office/powerpoint/2010/main" val="101166483"/>
       </p:ext>
     </p:extLst>
   </p:cSld>
@@ -336,6 +933,1611 @@
 </file>
 
 <file path=ppt/slideLayouts/slideLayout10.xml><?xml version="1.0" encoding="utf-8"?>
+<p:sldLayout xmlns:a="http://schemas.openxmlformats.org/drawingml/2006/main" xmlns:r="http://schemas.openxmlformats.org/officeDocument/2006/relationships" xmlns:p="http://schemas.openxmlformats.org/presentationml/2006/main" preserve="1">
+  <p:cSld name="Titel und Beschriftung">
+    <p:spTree>
+      <p:nvGrpSpPr>
+        <p:cNvPr id="1" name=""/>
+        <p:cNvGrpSpPr/>
+        <p:nvPr/>
+      </p:nvGrpSpPr>
+      <p:grpSpPr>
+        <a:xfrm>
+          <a:off x="0" y="0"/>
+          <a:ext cx="0" cy="0"/>
+          <a:chOff x="0" y="0"/>
+          <a:chExt cx="0" cy="0"/>
+        </a:xfrm>
+      </p:grpSpPr>
+      <p:sp>
+        <p:nvSpPr>
+          <p:cNvPr id="2" name="Title 1"/>
+          <p:cNvSpPr>
+            <a:spLocks noGrp="1"/>
+          </p:cNvSpPr>
+          <p:nvPr>
+            <p:ph type="title"/>
+          </p:nvPr>
+        </p:nvSpPr>
+        <p:spPr>
+          <a:xfrm>
+            <a:off x="677335" y="609600"/>
+            <a:ext cx="8596668" cy="3403600"/>
+          </a:xfrm>
+        </p:spPr>
+        <p:txBody>
+          <a:bodyPr anchor="ctr">
+            <a:normAutofit/>
+          </a:bodyPr>
+          <a:lstStyle>
+            <a:lvl1pPr algn="l">
+              <a:defRPr sz="4400" b="0" cap="none"/>
+            </a:lvl1pPr>
+          </a:lstStyle>
+          <a:p>
+            <a:r>
+              <a:rPr lang="de-DE"/>
+              <a:t>Mastertitelformat bearbeiten</a:t>
+            </a:r>
+            <a:endParaRPr lang="en-US" dirty="0"/>
+          </a:p>
+        </p:txBody>
+      </p:sp>
+      <p:sp>
+        <p:nvSpPr>
+          <p:cNvPr id="3" name="Text Placeholder 2"/>
+          <p:cNvSpPr>
+            <a:spLocks noGrp="1"/>
+          </p:cNvSpPr>
+          <p:nvPr>
+            <p:ph type="body" idx="1"/>
+          </p:nvPr>
+        </p:nvSpPr>
+        <p:spPr>
+          <a:xfrm>
+            <a:off x="677335" y="4470400"/>
+            <a:ext cx="8596668" cy="1570962"/>
+          </a:xfrm>
+        </p:spPr>
+        <p:txBody>
+          <a:bodyPr anchor="ctr">
+            <a:normAutofit/>
+          </a:bodyPr>
+          <a:lstStyle>
+            <a:lvl1pPr marL="0" indent="0" algn="l">
+              <a:buNone/>
+              <a:defRPr sz="1800">
+                <a:solidFill>
+                  <a:schemeClr val="tx1">
+                    <a:lumMod val="75000"/>
+                    <a:lumOff val="25000"/>
+                  </a:schemeClr>
+                </a:solidFill>
+              </a:defRPr>
+            </a:lvl1pPr>
+            <a:lvl2pPr marL="457200" indent="0">
+              <a:buNone/>
+              <a:defRPr sz="1800">
+                <a:solidFill>
+                  <a:schemeClr val="tx1">
+                    <a:tint val="75000"/>
+                  </a:schemeClr>
+                </a:solidFill>
+              </a:defRPr>
+            </a:lvl2pPr>
+            <a:lvl3pPr marL="914400" indent="0">
+              <a:buNone/>
+              <a:defRPr sz="1600">
+                <a:solidFill>
+                  <a:schemeClr val="tx1">
+                    <a:tint val="75000"/>
+                  </a:schemeClr>
+                </a:solidFill>
+              </a:defRPr>
+            </a:lvl3pPr>
+            <a:lvl4pPr marL="1371600" indent="0">
+              <a:buNone/>
+              <a:defRPr sz="1400">
+                <a:solidFill>
+                  <a:schemeClr val="tx1">
+                    <a:tint val="75000"/>
+                  </a:schemeClr>
+                </a:solidFill>
+              </a:defRPr>
+            </a:lvl4pPr>
+            <a:lvl5pPr marL="1828800" indent="0">
+              <a:buNone/>
+              <a:defRPr sz="1400">
+                <a:solidFill>
+                  <a:schemeClr val="tx1">
+                    <a:tint val="75000"/>
+                  </a:schemeClr>
+                </a:solidFill>
+              </a:defRPr>
+            </a:lvl5pPr>
+            <a:lvl6pPr marL="2286000" indent="0">
+              <a:buNone/>
+              <a:defRPr sz="1400">
+                <a:solidFill>
+                  <a:schemeClr val="tx1">
+                    <a:tint val="75000"/>
+                  </a:schemeClr>
+                </a:solidFill>
+              </a:defRPr>
+            </a:lvl6pPr>
+            <a:lvl7pPr marL="2743200" indent="0">
+              <a:buNone/>
+              <a:defRPr sz="1400">
+                <a:solidFill>
+                  <a:schemeClr val="tx1">
+                    <a:tint val="75000"/>
+                  </a:schemeClr>
+                </a:solidFill>
+              </a:defRPr>
+            </a:lvl7pPr>
+            <a:lvl8pPr marL="3200400" indent="0">
+              <a:buNone/>
+              <a:defRPr sz="1400">
+                <a:solidFill>
+                  <a:schemeClr val="tx1">
+                    <a:tint val="75000"/>
+                  </a:schemeClr>
+                </a:solidFill>
+              </a:defRPr>
+            </a:lvl8pPr>
+            <a:lvl9pPr marL="3657600" indent="0">
+              <a:buNone/>
+              <a:defRPr sz="1400">
+                <a:solidFill>
+                  <a:schemeClr val="tx1">
+                    <a:tint val="75000"/>
+                  </a:schemeClr>
+                </a:solidFill>
+              </a:defRPr>
+            </a:lvl9pPr>
+          </a:lstStyle>
+          <a:p>
+            <a:pPr lvl="0"/>
+            <a:r>
+              <a:rPr lang="de-DE"/>
+              <a:t>Mastertextformat bearbeiten</a:t>
+            </a:r>
+          </a:p>
+        </p:txBody>
+      </p:sp>
+      <p:sp>
+        <p:nvSpPr>
+          <p:cNvPr id="4" name="Date Placeholder 3"/>
+          <p:cNvSpPr>
+            <a:spLocks noGrp="1"/>
+          </p:cNvSpPr>
+          <p:nvPr>
+            <p:ph type="dt" sz="half" idx="10"/>
+          </p:nvPr>
+        </p:nvSpPr>
+        <p:spPr/>
+        <p:txBody>
+          <a:bodyPr/>
+          <a:lstStyle/>
+          <a:p>
+            <a:fld id="{4193F80F-02C0-4327-B5BE-9ACF7DFE4B9B}" type="datetimeFigureOut">
+              <a:rPr lang="de-DE" smtClean="0"/>
+              <a:t>08.07.2026</a:t>
+            </a:fld>
+            <a:endParaRPr lang="de-DE"/>
+          </a:p>
+        </p:txBody>
+      </p:sp>
+      <p:sp>
+        <p:nvSpPr>
+          <p:cNvPr id="5" name="Footer Placeholder 4"/>
+          <p:cNvSpPr>
+            <a:spLocks noGrp="1"/>
+          </p:cNvSpPr>
+          <p:nvPr>
+            <p:ph type="ftr" sz="quarter" idx="11"/>
+          </p:nvPr>
+        </p:nvSpPr>
+        <p:spPr/>
+        <p:txBody>
+          <a:bodyPr/>
+          <a:lstStyle/>
+          <a:p>
+            <a:endParaRPr lang="de-DE"/>
+          </a:p>
+        </p:txBody>
+      </p:sp>
+      <p:sp>
+        <p:nvSpPr>
+          <p:cNvPr id="6" name="Slide Number Placeholder 5"/>
+          <p:cNvSpPr>
+            <a:spLocks noGrp="1"/>
+          </p:cNvSpPr>
+          <p:nvPr>
+            <p:ph type="sldNum" sz="quarter" idx="12"/>
+          </p:nvPr>
+        </p:nvSpPr>
+        <p:spPr/>
+        <p:txBody>
+          <a:bodyPr/>
+          <a:lstStyle/>
+          <a:p>
+            <a:fld id="{1E23243E-BFCE-4DFA-B66C-083958A49FEF}" type="slidenum">
+              <a:rPr lang="de-DE" smtClean="0"/>
+              <a:t>‹Nr.›</a:t>
+            </a:fld>
+            <a:endParaRPr lang="de-DE"/>
+          </a:p>
+        </p:txBody>
+      </p:sp>
+    </p:spTree>
+    <p:extLst>
+      <p:ext uri="{BB962C8B-B14F-4D97-AF65-F5344CB8AC3E}">
+        <p14:creationId xmlns:p14="http://schemas.microsoft.com/office/powerpoint/2010/main" val="983738986"/>
+      </p:ext>
+    </p:extLst>
+  </p:cSld>
+  <p:clrMapOvr>
+    <a:masterClrMapping/>
+  </p:clrMapOvr>
+</p:sldLayout>
+</file>
+
+<file path=ppt/slideLayouts/slideLayout11.xml><?xml version="1.0" encoding="utf-8"?>
+<p:sldLayout xmlns:a="http://schemas.openxmlformats.org/drawingml/2006/main" xmlns:r="http://schemas.openxmlformats.org/officeDocument/2006/relationships" xmlns:p="http://schemas.openxmlformats.org/presentationml/2006/main" preserve="1">
+  <p:cSld name="Zitat mit Beschriftung">
+    <p:spTree>
+      <p:nvGrpSpPr>
+        <p:cNvPr id="1" name=""/>
+        <p:cNvGrpSpPr/>
+        <p:nvPr/>
+      </p:nvGrpSpPr>
+      <p:grpSpPr>
+        <a:xfrm>
+          <a:off x="0" y="0"/>
+          <a:ext cx="0" cy="0"/>
+          <a:chOff x="0" y="0"/>
+          <a:chExt cx="0" cy="0"/>
+        </a:xfrm>
+      </p:grpSpPr>
+      <p:sp>
+        <p:nvSpPr>
+          <p:cNvPr id="2" name="Title 1"/>
+          <p:cNvSpPr>
+            <a:spLocks noGrp="1"/>
+          </p:cNvSpPr>
+          <p:nvPr>
+            <p:ph type="title"/>
+          </p:nvPr>
+        </p:nvSpPr>
+        <p:spPr>
+          <a:xfrm>
+            <a:off x="931334" y="609600"/>
+            <a:ext cx="8094134" cy="3022600"/>
+          </a:xfrm>
+        </p:spPr>
+        <p:txBody>
+          <a:bodyPr anchor="ctr">
+            <a:normAutofit/>
+          </a:bodyPr>
+          <a:lstStyle>
+            <a:lvl1pPr algn="l">
+              <a:defRPr sz="4400" b="0" cap="none"/>
+            </a:lvl1pPr>
+          </a:lstStyle>
+          <a:p>
+            <a:r>
+              <a:rPr lang="de-DE"/>
+              <a:t>Mastertitelformat bearbeiten</a:t>
+            </a:r>
+            <a:endParaRPr lang="en-US" dirty="0"/>
+          </a:p>
+        </p:txBody>
+      </p:sp>
+      <p:sp>
+        <p:nvSpPr>
+          <p:cNvPr id="23" name="Text Placeholder 9"/>
+          <p:cNvSpPr>
+            <a:spLocks noGrp="1"/>
+          </p:cNvSpPr>
+          <p:nvPr>
+            <p:ph type="body" sz="quarter" idx="13"/>
+          </p:nvPr>
+        </p:nvSpPr>
+        <p:spPr>
+          <a:xfrm>
+            <a:off x="1366139" y="3632200"/>
+            <a:ext cx="7224524" cy="381000"/>
+          </a:xfrm>
+        </p:spPr>
+        <p:txBody>
+          <a:bodyPr anchor="ctr">
+            <a:noAutofit/>
+          </a:bodyPr>
+          <a:lstStyle>
+            <a:lvl1pPr marL="0" indent="0">
+              <a:buFontTx/>
+              <a:buNone/>
+              <a:defRPr sz="1600">
+                <a:solidFill>
+                  <a:schemeClr val="tx1">
+                    <a:lumMod val="50000"/>
+                    <a:lumOff val="50000"/>
+                  </a:schemeClr>
+                </a:solidFill>
+              </a:defRPr>
+            </a:lvl1pPr>
+            <a:lvl2pPr marL="457200" indent="0">
+              <a:buFontTx/>
+              <a:buNone/>
+              <a:defRPr/>
+            </a:lvl2pPr>
+            <a:lvl3pPr marL="914400" indent="0">
+              <a:buFontTx/>
+              <a:buNone/>
+              <a:defRPr/>
+            </a:lvl3pPr>
+            <a:lvl4pPr marL="1371600" indent="0">
+              <a:buFontTx/>
+              <a:buNone/>
+              <a:defRPr/>
+            </a:lvl4pPr>
+            <a:lvl5pPr marL="1828800" indent="0">
+              <a:buFontTx/>
+              <a:buNone/>
+              <a:defRPr/>
+            </a:lvl5pPr>
+          </a:lstStyle>
+          <a:p>
+            <a:pPr lvl="0"/>
+            <a:r>
+              <a:rPr lang="de-DE"/>
+              <a:t>Mastertextformat bearbeiten</a:t>
+            </a:r>
+          </a:p>
+        </p:txBody>
+      </p:sp>
+      <p:sp>
+        <p:nvSpPr>
+          <p:cNvPr id="3" name="Text Placeholder 2"/>
+          <p:cNvSpPr>
+            <a:spLocks noGrp="1"/>
+          </p:cNvSpPr>
+          <p:nvPr>
+            <p:ph type="body" idx="1"/>
+          </p:nvPr>
+        </p:nvSpPr>
+        <p:spPr>
+          <a:xfrm>
+            <a:off x="677335" y="4470400"/>
+            <a:ext cx="8596668" cy="1570962"/>
+          </a:xfrm>
+        </p:spPr>
+        <p:txBody>
+          <a:bodyPr anchor="ctr">
+            <a:normAutofit/>
+          </a:bodyPr>
+          <a:lstStyle>
+            <a:lvl1pPr marL="0" indent="0" algn="l">
+              <a:buNone/>
+              <a:defRPr sz="1800">
+                <a:solidFill>
+                  <a:schemeClr val="tx1">
+                    <a:lumMod val="75000"/>
+                    <a:lumOff val="25000"/>
+                  </a:schemeClr>
+                </a:solidFill>
+              </a:defRPr>
+            </a:lvl1pPr>
+            <a:lvl2pPr marL="457200" indent="0">
+              <a:buNone/>
+              <a:defRPr sz="1800">
+                <a:solidFill>
+                  <a:schemeClr val="tx1">
+                    <a:tint val="75000"/>
+                  </a:schemeClr>
+                </a:solidFill>
+              </a:defRPr>
+            </a:lvl2pPr>
+            <a:lvl3pPr marL="914400" indent="0">
+              <a:buNone/>
+              <a:defRPr sz="1600">
+                <a:solidFill>
+                  <a:schemeClr val="tx1">
+                    <a:tint val="75000"/>
+                  </a:schemeClr>
+                </a:solidFill>
+              </a:defRPr>
+            </a:lvl3pPr>
+            <a:lvl4pPr marL="1371600" indent="0">
+              <a:buNone/>
+              <a:defRPr sz="1400">
+                <a:solidFill>
+                  <a:schemeClr val="tx1">
+                    <a:tint val="75000"/>
+                  </a:schemeClr>
+                </a:solidFill>
+              </a:defRPr>
+            </a:lvl4pPr>
+            <a:lvl5pPr marL="1828800" indent="0">
+              <a:buNone/>
+              <a:defRPr sz="1400">
+                <a:solidFill>
+                  <a:schemeClr val="tx1">
+                    <a:tint val="75000"/>
+                  </a:schemeClr>
+                </a:solidFill>
+              </a:defRPr>
+            </a:lvl5pPr>
+            <a:lvl6pPr marL="2286000" indent="0">
+              <a:buNone/>
+              <a:defRPr sz="1400">
+                <a:solidFill>
+                  <a:schemeClr val="tx1">
+                    <a:tint val="75000"/>
+                  </a:schemeClr>
+                </a:solidFill>
+              </a:defRPr>
+            </a:lvl6pPr>
+            <a:lvl7pPr marL="2743200" indent="0">
+              <a:buNone/>
+              <a:defRPr sz="1400">
+                <a:solidFill>
+                  <a:schemeClr val="tx1">
+                    <a:tint val="75000"/>
+                  </a:schemeClr>
+                </a:solidFill>
+              </a:defRPr>
+            </a:lvl7pPr>
+            <a:lvl8pPr marL="3200400" indent="0">
+              <a:buNone/>
+              <a:defRPr sz="1400">
+                <a:solidFill>
+                  <a:schemeClr val="tx1">
+                    <a:tint val="75000"/>
+                  </a:schemeClr>
+                </a:solidFill>
+              </a:defRPr>
+            </a:lvl8pPr>
+            <a:lvl9pPr marL="3657600" indent="0">
+              <a:buNone/>
+              <a:defRPr sz="1400">
+                <a:solidFill>
+                  <a:schemeClr val="tx1">
+                    <a:tint val="75000"/>
+                  </a:schemeClr>
+                </a:solidFill>
+              </a:defRPr>
+            </a:lvl9pPr>
+          </a:lstStyle>
+          <a:p>
+            <a:pPr lvl="0"/>
+            <a:r>
+              <a:rPr lang="de-DE"/>
+              <a:t>Mastertextformat bearbeiten</a:t>
+            </a:r>
+          </a:p>
+        </p:txBody>
+      </p:sp>
+      <p:sp>
+        <p:nvSpPr>
+          <p:cNvPr id="4" name="Date Placeholder 3"/>
+          <p:cNvSpPr>
+            <a:spLocks noGrp="1"/>
+          </p:cNvSpPr>
+          <p:nvPr>
+            <p:ph type="dt" sz="half" idx="10"/>
+          </p:nvPr>
+        </p:nvSpPr>
+        <p:spPr/>
+        <p:txBody>
+          <a:bodyPr/>
+          <a:lstStyle/>
+          <a:p>
+            <a:fld id="{4193F80F-02C0-4327-B5BE-9ACF7DFE4B9B}" type="datetimeFigureOut">
+              <a:rPr lang="de-DE" smtClean="0"/>
+              <a:t>08.07.2026</a:t>
+            </a:fld>
+            <a:endParaRPr lang="de-DE"/>
+          </a:p>
+        </p:txBody>
+      </p:sp>
+      <p:sp>
+        <p:nvSpPr>
+          <p:cNvPr id="5" name="Footer Placeholder 4"/>
+          <p:cNvSpPr>
+            <a:spLocks noGrp="1"/>
+          </p:cNvSpPr>
+          <p:nvPr>
+            <p:ph type="ftr" sz="quarter" idx="11"/>
+          </p:nvPr>
+        </p:nvSpPr>
+        <p:spPr/>
+        <p:txBody>
+          <a:bodyPr/>
+          <a:lstStyle/>
+          <a:p>
+            <a:endParaRPr lang="de-DE"/>
+          </a:p>
+        </p:txBody>
+      </p:sp>
+      <p:sp>
+        <p:nvSpPr>
+          <p:cNvPr id="6" name="Slide Number Placeholder 5"/>
+          <p:cNvSpPr>
+            <a:spLocks noGrp="1"/>
+          </p:cNvSpPr>
+          <p:nvPr>
+            <p:ph type="sldNum" sz="quarter" idx="12"/>
+          </p:nvPr>
+        </p:nvSpPr>
+        <p:spPr/>
+        <p:txBody>
+          <a:bodyPr/>
+          <a:lstStyle/>
+          <a:p>
+            <a:fld id="{1E23243E-BFCE-4DFA-B66C-083958A49FEF}" type="slidenum">
+              <a:rPr lang="de-DE" smtClean="0"/>
+              <a:t>‹Nr.›</a:t>
+            </a:fld>
+            <a:endParaRPr lang="de-DE"/>
+          </a:p>
+        </p:txBody>
+      </p:sp>
+      <p:sp>
+        <p:nvSpPr>
+          <p:cNvPr id="24" name="TextBox 23"/>
+          <p:cNvSpPr txBox="1"/>
+          <p:nvPr/>
+        </p:nvSpPr>
+        <p:spPr>
+          <a:xfrm>
+            <a:off x="541870" y="790378"/>
+            <a:ext cx="609600" cy="584776"/>
+          </a:xfrm>
+          <a:prstGeom prst="rect">
+            <a:avLst/>
+          </a:prstGeom>
+        </p:spPr>
+        <p:txBody>
+          <a:bodyPr vert="horz" lIns="91440" tIns="45720" rIns="91440" bIns="45720" rtlCol="0" anchor="ctr">
+            <a:noAutofit/>
+          </a:bodyPr>
+          <a:lstStyle/>
+          <a:p>
+            <a:pPr lvl="0"/>
+            <a:r>
+              <a:rPr lang="en-US" sz="8000" baseline="0" dirty="0">
+                <a:ln w="3175" cmpd="sng">
+                  <a:noFill/>
+                </a:ln>
+                <a:solidFill>
+                  <a:schemeClr val="accent1">
+                    <a:lumMod val="60000"/>
+                    <a:lumOff val="40000"/>
+                  </a:schemeClr>
+                </a:solidFill>
+                <a:effectLst/>
+                <a:latin typeface="Arial"/>
+              </a:rPr>
+              <a:t>“</a:t>
+            </a:r>
+          </a:p>
+        </p:txBody>
+      </p:sp>
+      <p:sp>
+        <p:nvSpPr>
+          <p:cNvPr id="25" name="TextBox 24"/>
+          <p:cNvSpPr txBox="1"/>
+          <p:nvPr/>
+        </p:nvSpPr>
+        <p:spPr>
+          <a:xfrm>
+            <a:off x="8893011" y="2886556"/>
+            <a:ext cx="609600" cy="584776"/>
+          </a:xfrm>
+          <a:prstGeom prst="rect">
+            <a:avLst/>
+          </a:prstGeom>
+        </p:spPr>
+        <p:txBody>
+          <a:bodyPr vert="horz" lIns="91440" tIns="45720" rIns="91440" bIns="45720" rtlCol="0" anchor="ctr">
+            <a:noAutofit/>
+          </a:bodyPr>
+          <a:lstStyle/>
+          <a:p>
+            <a:pPr lvl="0"/>
+            <a:r>
+              <a:rPr lang="en-US" sz="8000" baseline="0" dirty="0">
+                <a:ln w="3175" cmpd="sng">
+                  <a:noFill/>
+                </a:ln>
+                <a:solidFill>
+                  <a:schemeClr val="accent1">
+                    <a:lumMod val="60000"/>
+                    <a:lumOff val="40000"/>
+                  </a:schemeClr>
+                </a:solidFill>
+                <a:effectLst/>
+                <a:latin typeface="Arial"/>
+              </a:rPr>
+              <a:t>”</a:t>
+            </a:r>
+          </a:p>
+        </p:txBody>
+      </p:sp>
+    </p:spTree>
+    <p:extLst>
+      <p:ext uri="{BB962C8B-B14F-4D97-AF65-F5344CB8AC3E}">
+        <p14:creationId xmlns:p14="http://schemas.microsoft.com/office/powerpoint/2010/main" val="4092792982"/>
+      </p:ext>
+    </p:extLst>
+  </p:cSld>
+  <p:clrMapOvr>
+    <a:masterClrMapping/>
+  </p:clrMapOvr>
+</p:sldLayout>
+</file>
+
+<file path=ppt/slideLayouts/slideLayout12.xml><?xml version="1.0" encoding="utf-8"?>
+<p:sldLayout xmlns:a="http://schemas.openxmlformats.org/drawingml/2006/main" xmlns:r="http://schemas.openxmlformats.org/officeDocument/2006/relationships" xmlns:p="http://schemas.openxmlformats.org/presentationml/2006/main" preserve="1">
+  <p:cSld name="Namenskarte">
+    <p:spTree>
+      <p:nvGrpSpPr>
+        <p:cNvPr id="1" name=""/>
+        <p:cNvGrpSpPr/>
+        <p:nvPr/>
+      </p:nvGrpSpPr>
+      <p:grpSpPr>
+        <a:xfrm>
+          <a:off x="0" y="0"/>
+          <a:ext cx="0" cy="0"/>
+          <a:chOff x="0" y="0"/>
+          <a:chExt cx="0" cy="0"/>
+        </a:xfrm>
+      </p:grpSpPr>
+      <p:sp>
+        <p:nvSpPr>
+          <p:cNvPr id="2" name="Title 1"/>
+          <p:cNvSpPr>
+            <a:spLocks noGrp="1"/>
+          </p:cNvSpPr>
+          <p:nvPr>
+            <p:ph type="title"/>
+          </p:nvPr>
+        </p:nvSpPr>
+        <p:spPr>
+          <a:xfrm>
+            <a:off x="677335" y="1931988"/>
+            <a:ext cx="8596668" cy="2595460"/>
+          </a:xfrm>
+        </p:spPr>
+        <p:txBody>
+          <a:bodyPr anchor="b">
+            <a:normAutofit/>
+          </a:bodyPr>
+          <a:lstStyle>
+            <a:lvl1pPr algn="l">
+              <a:defRPr sz="4400" b="0" cap="none"/>
+            </a:lvl1pPr>
+          </a:lstStyle>
+          <a:p>
+            <a:r>
+              <a:rPr lang="de-DE"/>
+              <a:t>Mastertitelformat bearbeiten</a:t>
+            </a:r>
+            <a:endParaRPr lang="en-US" dirty="0"/>
+          </a:p>
+        </p:txBody>
+      </p:sp>
+      <p:sp>
+        <p:nvSpPr>
+          <p:cNvPr id="3" name="Text Placeholder 2"/>
+          <p:cNvSpPr>
+            <a:spLocks noGrp="1"/>
+          </p:cNvSpPr>
+          <p:nvPr>
+            <p:ph type="body" idx="1"/>
+          </p:nvPr>
+        </p:nvSpPr>
+        <p:spPr>
+          <a:xfrm>
+            <a:off x="677335" y="4527448"/>
+            <a:ext cx="8596668" cy="1513914"/>
+          </a:xfrm>
+        </p:spPr>
+        <p:txBody>
+          <a:bodyPr anchor="t">
+            <a:normAutofit/>
+          </a:bodyPr>
+          <a:lstStyle>
+            <a:lvl1pPr marL="0" indent="0" algn="l">
+              <a:buNone/>
+              <a:defRPr sz="1800">
+                <a:solidFill>
+                  <a:schemeClr val="tx1">
+                    <a:lumMod val="75000"/>
+                    <a:lumOff val="25000"/>
+                  </a:schemeClr>
+                </a:solidFill>
+              </a:defRPr>
+            </a:lvl1pPr>
+            <a:lvl2pPr marL="457200" indent="0">
+              <a:buNone/>
+              <a:defRPr sz="1800">
+                <a:solidFill>
+                  <a:schemeClr val="tx1">
+                    <a:tint val="75000"/>
+                  </a:schemeClr>
+                </a:solidFill>
+              </a:defRPr>
+            </a:lvl2pPr>
+            <a:lvl3pPr marL="914400" indent="0">
+              <a:buNone/>
+              <a:defRPr sz="1600">
+                <a:solidFill>
+                  <a:schemeClr val="tx1">
+                    <a:tint val="75000"/>
+                  </a:schemeClr>
+                </a:solidFill>
+              </a:defRPr>
+            </a:lvl3pPr>
+            <a:lvl4pPr marL="1371600" indent="0">
+              <a:buNone/>
+              <a:defRPr sz="1400">
+                <a:solidFill>
+                  <a:schemeClr val="tx1">
+                    <a:tint val="75000"/>
+                  </a:schemeClr>
+                </a:solidFill>
+              </a:defRPr>
+            </a:lvl4pPr>
+            <a:lvl5pPr marL="1828800" indent="0">
+              <a:buNone/>
+              <a:defRPr sz="1400">
+                <a:solidFill>
+                  <a:schemeClr val="tx1">
+                    <a:tint val="75000"/>
+                  </a:schemeClr>
+                </a:solidFill>
+              </a:defRPr>
+            </a:lvl5pPr>
+            <a:lvl6pPr marL="2286000" indent="0">
+              <a:buNone/>
+              <a:defRPr sz="1400">
+                <a:solidFill>
+                  <a:schemeClr val="tx1">
+                    <a:tint val="75000"/>
+                  </a:schemeClr>
+                </a:solidFill>
+              </a:defRPr>
+            </a:lvl6pPr>
+            <a:lvl7pPr marL="2743200" indent="0">
+              <a:buNone/>
+              <a:defRPr sz="1400">
+                <a:solidFill>
+                  <a:schemeClr val="tx1">
+                    <a:tint val="75000"/>
+                  </a:schemeClr>
+                </a:solidFill>
+              </a:defRPr>
+            </a:lvl7pPr>
+            <a:lvl8pPr marL="3200400" indent="0">
+              <a:buNone/>
+              <a:defRPr sz="1400">
+                <a:solidFill>
+                  <a:schemeClr val="tx1">
+                    <a:tint val="75000"/>
+                  </a:schemeClr>
+                </a:solidFill>
+              </a:defRPr>
+            </a:lvl8pPr>
+            <a:lvl9pPr marL="3657600" indent="0">
+              <a:buNone/>
+              <a:defRPr sz="1400">
+                <a:solidFill>
+                  <a:schemeClr val="tx1">
+                    <a:tint val="75000"/>
+                  </a:schemeClr>
+                </a:solidFill>
+              </a:defRPr>
+            </a:lvl9pPr>
+          </a:lstStyle>
+          <a:p>
+            <a:pPr lvl="0"/>
+            <a:r>
+              <a:rPr lang="de-DE"/>
+              <a:t>Mastertextformat bearbeiten</a:t>
+            </a:r>
+          </a:p>
+        </p:txBody>
+      </p:sp>
+      <p:sp>
+        <p:nvSpPr>
+          <p:cNvPr id="4" name="Date Placeholder 3"/>
+          <p:cNvSpPr>
+            <a:spLocks noGrp="1"/>
+          </p:cNvSpPr>
+          <p:nvPr>
+            <p:ph type="dt" sz="half" idx="10"/>
+          </p:nvPr>
+        </p:nvSpPr>
+        <p:spPr/>
+        <p:txBody>
+          <a:bodyPr/>
+          <a:lstStyle/>
+          <a:p>
+            <a:fld id="{4193F80F-02C0-4327-B5BE-9ACF7DFE4B9B}" type="datetimeFigureOut">
+              <a:rPr lang="de-DE" smtClean="0"/>
+              <a:t>08.07.2026</a:t>
+            </a:fld>
+            <a:endParaRPr lang="de-DE"/>
+          </a:p>
+        </p:txBody>
+      </p:sp>
+      <p:sp>
+        <p:nvSpPr>
+          <p:cNvPr id="5" name="Footer Placeholder 4"/>
+          <p:cNvSpPr>
+            <a:spLocks noGrp="1"/>
+          </p:cNvSpPr>
+          <p:nvPr>
+            <p:ph type="ftr" sz="quarter" idx="11"/>
+          </p:nvPr>
+        </p:nvSpPr>
+        <p:spPr/>
+        <p:txBody>
+          <a:bodyPr/>
+          <a:lstStyle/>
+          <a:p>
+            <a:endParaRPr lang="de-DE"/>
+          </a:p>
+        </p:txBody>
+      </p:sp>
+      <p:sp>
+        <p:nvSpPr>
+          <p:cNvPr id="6" name="Slide Number Placeholder 5"/>
+          <p:cNvSpPr>
+            <a:spLocks noGrp="1"/>
+          </p:cNvSpPr>
+          <p:nvPr>
+            <p:ph type="sldNum" sz="quarter" idx="12"/>
+          </p:nvPr>
+        </p:nvSpPr>
+        <p:spPr/>
+        <p:txBody>
+          <a:bodyPr/>
+          <a:lstStyle/>
+          <a:p>
+            <a:fld id="{1E23243E-BFCE-4DFA-B66C-083958A49FEF}" type="slidenum">
+              <a:rPr lang="de-DE" smtClean="0"/>
+              <a:t>‹Nr.›</a:t>
+            </a:fld>
+            <a:endParaRPr lang="de-DE"/>
+          </a:p>
+        </p:txBody>
+      </p:sp>
+    </p:spTree>
+    <p:extLst>
+      <p:ext uri="{BB962C8B-B14F-4D97-AF65-F5344CB8AC3E}">
+        <p14:creationId xmlns:p14="http://schemas.microsoft.com/office/powerpoint/2010/main" val="2403158671"/>
+      </p:ext>
+    </p:extLst>
+  </p:cSld>
+  <p:clrMapOvr>
+    <a:masterClrMapping/>
+  </p:clrMapOvr>
+</p:sldLayout>
+</file>
+
+<file path=ppt/slideLayouts/slideLayout13.xml><?xml version="1.0" encoding="utf-8"?>
+<p:sldLayout xmlns:a="http://schemas.openxmlformats.org/drawingml/2006/main" xmlns:r="http://schemas.openxmlformats.org/officeDocument/2006/relationships" xmlns:p="http://schemas.openxmlformats.org/presentationml/2006/main" preserve="1">
+  <p:cSld name="Namenskarte für Zitat">
+    <p:spTree>
+      <p:nvGrpSpPr>
+        <p:cNvPr id="1" name=""/>
+        <p:cNvGrpSpPr/>
+        <p:nvPr/>
+      </p:nvGrpSpPr>
+      <p:grpSpPr>
+        <a:xfrm>
+          <a:off x="0" y="0"/>
+          <a:ext cx="0" cy="0"/>
+          <a:chOff x="0" y="0"/>
+          <a:chExt cx="0" cy="0"/>
+        </a:xfrm>
+      </p:grpSpPr>
+      <p:sp>
+        <p:nvSpPr>
+          <p:cNvPr id="2" name="Title 1"/>
+          <p:cNvSpPr>
+            <a:spLocks noGrp="1"/>
+          </p:cNvSpPr>
+          <p:nvPr>
+            <p:ph type="title"/>
+          </p:nvPr>
+        </p:nvSpPr>
+        <p:spPr>
+          <a:xfrm>
+            <a:off x="931334" y="609600"/>
+            <a:ext cx="8094134" cy="3022600"/>
+          </a:xfrm>
+        </p:spPr>
+        <p:txBody>
+          <a:bodyPr anchor="ctr">
+            <a:normAutofit/>
+          </a:bodyPr>
+          <a:lstStyle>
+            <a:lvl1pPr algn="l">
+              <a:defRPr sz="4400" b="0" cap="none"/>
+            </a:lvl1pPr>
+          </a:lstStyle>
+          <a:p>
+            <a:r>
+              <a:rPr lang="de-DE"/>
+              <a:t>Mastertitelformat bearbeiten</a:t>
+            </a:r>
+            <a:endParaRPr lang="en-US" dirty="0"/>
+          </a:p>
+        </p:txBody>
+      </p:sp>
+      <p:sp>
+        <p:nvSpPr>
+          <p:cNvPr id="23" name="Text Placeholder 9"/>
+          <p:cNvSpPr>
+            <a:spLocks noGrp="1"/>
+          </p:cNvSpPr>
+          <p:nvPr>
+            <p:ph type="body" sz="quarter" idx="13"/>
+          </p:nvPr>
+        </p:nvSpPr>
+        <p:spPr>
+          <a:xfrm>
+            <a:off x="677332" y="4013200"/>
+            <a:ext cx="8596669" cy="514248"/>
+          </a:xfrm>
+        </p:spPr>
+        <p:txBody>
+          <a:bodyPr anchor="b">
+            <a:noAutofit/>
+          </a:bodyPr>
+          <a:lstStyle>
+            <a:lvl1pPr marL="0" indent="0">
+              <a:buFontTx/>
+              <a:buNone/>
+              <a:defRPr sz="2400">
+                <a:solidFill>
+                  <a:schemeClr val="tx1">
+                    <a:lumMod val="75000"/>
+                    <a:lumOff val="25000"/>
+                  </a:schemeClr>
+                </a:solidFill>
+              </a:defRPr>
+            </a:lvl1pPr>
+            <a:lvl2pPr marL="457200" indent="0">
+              <a:buFontTx/>
+              <a:buNone/>
+              <a:defRPr/>
+            </a:lvl2pPr>
+            <a:lvl3pPr marL="914400" indent="0">
+              <a:buFontTx/>
+              <a:buNone/>
+              <a:defRPr/>
+            </a:lvl3pPr>
+            <a:lvl4pPr marL="1371600" indent="0">
+              <a:buFontTx/>
+              <a:buNone/>
+              <a:defRPr/>
+            </a:lvl4pPr>
+            <a:lvl5pPr marL="1828800" indent="0">
+              <a:buFontTx/>
+              <a:buNone/>
+              <a:defRPr/>
+            </a:lvl5pPr>
+          </a:lstStyle>
+          <a:p>
+            <a:pPr lvl="0"/>
+            <a:r>
+              <a:rPr lang="de-DE"/>
+              <a:t>Mastertextformat bearbeiten</a:t>
+            </a:r>
+          </a:p>
+        </p:txBody>
+      </p:sp>
+      <p:sp>
+        <p:nvSpPr>
+          <p:cNvPr id="3" name="Text Placeholder 2"/>
+          <p:cNvSpPr>
+            <a:spLocks noGrp="1"/>
+          </p:cNvSpPr>
+          <p:nvPr>
+            <p:ph type="body" idx="1"/>
+          </p:nvPr>
+        </p:nvSpPr>
+        <p:spPr>
+          <a:xfrm>
+            <a:off x="677335" y="4527448"/>
+            <a:ext cx="8596668" cy="1513914"/>
+          </a:xfrm>
+        </p:spPr>
+        <p:txBody>
+          <a:bodyPr anchor="t">
+            <a:normAutofit/>
+          </a:bodyPr>
+          <a:lstStyle>
+            <a:lvl1pPr marL="0" indent="0" algn="l">
+              <a:buNone/>
+              <a:defRPr sz="1800">
+                <a:solidFill>
+                  <a:schemeClr val="tx1">
+                    <a:lumMod val="50000"/>
+                    <a:lumOff val="50000"/>
+                  </a:schemeClr>
+                </a:solidFill>
+              </a:defRPr>
+            </a:lvl1pPr>
+            <a:lvl2pPr marL="457200" indent="0">
+              <a:buNone/>
+              <a:defRPr sz="1800">
+                <a:solidFill>
+                  <a:schemeClr val="tx1">
+                    <a:tint val="75000"/>
+                  </a:schemeClr>
+                </a:solidFill>
+              </a:defRPr>
+            </a:lvl2pPr>
+            <a:lvl3pPr marL="914400" indent="0">
+              <a:buNone/>
+              <a:defRPr sz="1600">
+                <a:solidFill>
+                  <a:schemeClr val="tx1">
+                    <a:tint val="75000"/>
+                  </a:schemeClr>
+                </a:solidFill>
+              </a:defRPr>
+            </a:lvl3pPr>
+            <a:lvl4pPr marL="1371600" indent="0">
+              <a:buNone/>
+              <a:defRPr sz="1400">
+                <a:solidFill>
+                  <a:schemeClr val="tx1">
+                    <a:tint val="75000"/>
+                  </a:schemeClr>
+                </a:solidFill>
+              </a:defRPr>
+            </a:lvl4pPr>
+            <a:lvl5pPr marL="1828800" indent="0">
+              <a:buNone/>
+              <a:defRPr sz="1400">
+                <a:solidFill>
+                  <a:schemeClr val="tx1">
+                    <a:tint val="75000"/>
+                  </a:schemeClr>
+                </a:solidFill>
+              </a:defRPr>
+            </a:lvl5pPr>
+            <a:lvl6pPr marL="2286000" indent="0">
+              <a:buNone/>
+              <a:defRPr sz="1400">
+                <a:solidFill>
+                  <a:schemeClr val="tx1">
+                    <a:tint val="75000"/>
+                  </a:schemeClr>
+                </a:solidFill>
+              </a:defRPr>
+            </a:lvl6pPr>
+            <a:lvl7pPr marL="2743200" indent="0">
+              <a:buNone/>
+              <a:defRPr sz="1400">
+                <a:solidFill>
+                  <a:schemeClr val="tx1">
+                    <a:tint val="75000"/>
+                  </a:schemeClr>
+                </a:solidFill>
+              </a:defRPr>
+            </a:lvl7pPr>
+            <a:lvl8pPr marL="3200400" indent="0">
+              <a:buNone/>
+              <a:defRPr sz="1400">
+                <a:solidFill>
+                  <a:schemeClr val="tx1">
+                    <a:tint val="75000"/>
+                  </a:schemeClr>
+                </a:solidFill>
+              </a:defRPr>
+            </a:lvl8pPr>
+            <a:lvl9pPr marL="3657600" indent="0">
+              <a:buNone/>
+              <a:defRPr sz="1400">
+                <a:solidFill>
+                  <a:schemeClr val="tx1">
+                    <a:tint val="75000"/>
+                  </a:schemeClr>
+                </a:solidFill>
+              </a:defRPr>
+            </a:lvl9pPr>
+          </a:lstStyle>
+          <a:p>
+            <a:pPr lvl="0"/>
+            <a:r>
+              <a:rPr lang="de-DE"/>
+              <a:t>Mastertextformat bearbeiten</a:t>
+            </a:r>
+          </a:p>
+        </p:txBody>
+      </p:sp>
+      <p:sp>
+        <p:nvSpPr>
+          <p:cNvPr id="4" name="Date Placeholder 3"/>
+          <p:cNvSpPr>
+            <a:spLocks noGrp="1"/>
+          </p:cNvSpPr>
+          <p:nvPr>
+            <p:ph type="dt" sz="half" idx="10"/>
+          </p:nvPr>
+        </p:nvSpPr>
+        <p:spPr/>
+        <p:txBody>
+          <a:bodyPr/>
+          <a:lstStyle/>
+          <a:p>
+            <a:fld id="{4193F80F-02C0-4327-B5BE-9ACF7DFE4B9B}" type="datetimeFigureOut">
+              <a:rPr lang="de-DE" smtClean="0"/>
+              <a:t>08.07.2026</a:t>
+            </a:fld>
+            <a:endParaRPr lang="de-DE"/>
+          </a:p>
+        </p:txBody>
+      </p:sp>
+      <p:sp>
+        <p:nvSpPr>
+          <p:cNvPr id="5" name="Footer Placeholder 4"/>
+          <p:cNvSpPr>
+            <a:spLocks noGrp="1"/>
+          </p:cNvSpPr>
+          <p:nvPr>
+            <p:ph type="ftr" sz="quarter" idx="11"/>
+          </p:nvPr>
+        </p:nvSpPr>
+        <p:spPr/>
+        <p:txBody>
+          <a:bodyPr/>
+          <a:lstStyle/>
+          <a:p>
+            <a:endParaRPr lang="de-DE"/>
+          </a:p>
+        </p:txBody>
+      </p:sp>
+      <p:sp>
+        <p:nvSpPr>
+          <p:cNvPr id="6" name="Slide Number Placeholder 5"/>
+          <p:cNvSpPr>
+            <a:spLocks noGrp="1"/>
+          </p:cNvSpPr>
+          <p:nvPr>
+            <p:ph type="sldNum" sz="quarter" idx="12"/>
+          </p:nvPr>
+        </p:nvSpPr>
+        <p:spPr/>
+        <p:txBody>
+          <a:bodyPr/>
+          <a:lstStyle/>
+          <a:p>
+            <a:fld id="{1E23243E-BFCE-4DFA-B66C-083958A49FEF}" type="slidenum">
+              <a:rPr lang="de-DE" smtClean="0"/>
+              <a:t>‹Nr.›</a:t>
+            </a:fld>
+            <a:endParaRPr lang="de-DE"/>
+          </a:p>
+        </p:txBody>
+      </p:sp>
+      <p:sp>
+        <p:nvSpPr>
+          <p:cNvPr id="24" name="TextBox 23"/>
+          <p:cNvSpPr txBox="1"/>
+          <p:nvPr/>
+        </p:nvSpPr>
+        <p:spPr>
+          <a:xfrm>
+            <a:off x="541870" y="790378"/>
+            <a:ext cx="609600" cy="584776"/>
+          </a:xfrm>
+          <a:prstGeom prst="rect">
+            <a:avLst/>
+          </a:prstGeom>
+        </p:spPr>
+        <p:txBody>
+          <a:bodyPr vert="horz" lIns="91440" tIns="45720" rIns="91440" bIns="45720" rtlCol="0" anchor="ctr">
+            <a:noAutofit/>
+          </a:bodyPr>
+          <a:lstStyle/>
+          <a:p>
+            <a:pPr lvl="0"/>
+            <a:r>
+              <a:rPr lang="en-US" sz="8000" baseline="0" dirty="0">
+                <a:ln w="3175" cmpd="sng">
+                  <a:noFill/>
+                </a:ln>
+                <a:solidFill>
+                  <a:schemeClr val="accent1">
+                    <a:lumMod val="60000"/>
+                    <a:lumOff val="40000"/>
+                  </a:schemeClr>
+                </a:solidFill>
+                <a:effectLst/>
+                <a:latin typeface="Arial"/>
+              </a:rPr>
+              <a:t>“</a:t>
+            </a:r>
+          </a:p>
+        </p:txBody>
+      </p:sp>
+      <p:sp>
+        <p:nvSpPr>
+          <p:cNvPr id="25" name="TextBox 24"/>
+          <p:cNvSpPr txBox="1"/>
+          <p:nvPr/>
+        </p:nvSpPr>
+        <p:spPr>
+          <a:xfrm>
+            <a:off x="8893011" y="2886556"/>
+            <a:ext cx="609600" cy="584776"/>
+          </a:xfrm>
+          <a:prstGeom prst="rect">
+            <a:avLst/>
+          </a:prstGeom>
+        </p:spPr>
+        <p:txBody>
+          <a:bodyPr vert="horz" lIns="91440" tIns="45720" rIns="91440" bIns="45720" rtlCol="0" anchor="ctr">
+            <a:noAutofit/>
+          </a:bodyPr>
+          <a:lstStyle/>
+          <a:p>
+            <a:pPr lvl="0"/>
+            <a:r>
+              <a:rPr lang="en-US" sz="8000" baseline="0" dirty="0">
+                <a:ln w="3175" cmpd="sng">
+                  <a:noFill/>
+                </a:ln>
+                <a:solidFill>
+                  <a:schemeClr val="accent1">
+                    <a:lumMod val="60000"/>
+                    <a:lumOff val="40000"/>
+                  </a:schemeClr>
+                </a:solidFill>
+                <a:effectLst/>
+                <a:latin typeface="Arial"/>
+              </a:rPr>
+              <a:t>”</a:t>
+            </a:r>
+          </a:p>
+        </p:txBody>
+      </p:sp>
+    </p:spTree>
+    <p:extLst>
+      <p:ext uri="{BB962C8B-B14F-4D97-AF65-F5344CB8AC3E}">
+        <p14:creationId xmlns:p14="http://schemas.microsoft.com/office/powerpoint/2010/main" val="85214381"/>
+      </p:ext>
+    </p:extLst>
+  </p:cSld>
+  <p:clrMapOvr>
+    <a:masterClrMapping/>
+  </p:clrMapOvr>
+</p:sldLayout>
+</file>
+
+<file path=ppt/slideLayouts/slideLayout14.xml><?xml version="1.0" encoding="utf-8"?>
+<p:sldLayout xmlns:a="http://schemas.openxmlformats.org/drawingml/2006/main" xmlns:r="http://schemas.openxmlformats.org/officeDocument/2006/relationships" xmlns:p="http://schemas.openxmlformats.org/presentationml/2006/main" preserve="1">
+  <p:cSld name="Wahr oder Falsch">
+    <p:spTree>
+      <p:nvGrpSpPr>
+        <p:cNvPr id="1" name=""/>
+        <p:cNvGrpSpPr/>
+        <p:nvPr/>
+      </p:nvGrpSpPr>
+      <p:grpSpPr>
+        <a:xfrm>
+          <a:off x="0" y="0"/>
+          <a:ext cx="0" cy="0"/>
+          <a:chOff x="0" y="0"/>
+          <a:chExt cx="0" cy="0"/>
+        </a:xfrm>
+      </p:grpSpPr>
+      <p:sp>
+        <p:nvSpPr>
+          <p:cNvPr id="2" name="Title 1"/>
+          <p:cNvSpPr>
+            <a:spLocks noGrp="1"/>
+          </p:cNvSpPr>
+          <p:nvPr>
+            <p:ph type="title"/>
+          </p:nvPr>
+        </p:nvSpPr>
+        <p:spPr>
+          <a:xfrm>
+            <a:off x="685799" y="609600"/>
+            <a:ext cx="8588203" cy="3022600"/>
+          </a:xfrm>
+        </p:spPr>
+        <p:txBody>
+          <a:bodyPr anchor="ctr">
+            <a:normAutofit/>
+          </a:bodyPr>
+          <a:lstStyle>
+            <a:lvl1pPr algn="l">
+              <a:defRPr sz="4400" b="0" cap="none"/>
+            </a:lvl1pPr>
+          </a:lstStyle>
+          <a:p>
+            <a:r>
+              <a:rPr lang="de-DE"/>
+              <a:t>Mastertitelformat bearbeiten</a:t>
+            </a:r>
+            <a:endParaRPr lang="en-US" dirty="0"/>
+          </a:p>
+        </p:txBody>
+      </p:sp>
+      <p:sp>
+        <p:nvSpPr>
+          <p:cNvPr id="23" name="Text Placeholder 9"/>
+          <p:cNvSpPr>
+            <a:spLocks noGrp="1"/>
+          </p:cNvSpPr>
+          <p:nvPr>
+            <p:ph type="body" sz="quarter" idx="13"/>
+          </p:nvPr>
+        </p:nvSpPr>
+        <p:spPr>
+          <a:xfrm>
+            <a:off x="677332" y="4013200"/>
+            <a:ext cx="8596669" cy="514248"/>
+          </a:xfrm>
+        </p:spPr>
+        <p:txBody>
+          <a:bodyPr anchor="b">
+            <a:noAutofit/>
+          </a:bodyPr>
+          <a:lstStyle>
+            <a:lvl1pPr marL="0" indent="0">
+              <a:buFontTx/>
+              <a:buNone/>
+              <a:defRPr sz="2400">
+                <a:solidFill>
+                  <a:schemeClr val="accent1"/>
+                </a:solidFill>
+              </a:defRPr>
+            </a:lvl1pPr>
+            <a:lvl2pPr marL="457200" indent="0">
+              <a:buFontTx/>
+              <a:buNone/>
+              <a:defRPr/>
+            </a:lvl2pPr>
+            <a:lvl3pPr marL="914400" indent="0">
+              <a:buFontTx/>
+              <a:buNone/>
+              <a:defRPr/>
+            </a:lvl3pPr>
+            <a:lvl4pPr marL="1371600" indent="0">
+              <a:buFontTx/>
+              <a:buNone/>
+              <a:defRPr/>
+            </a:lvl4pPr>
+            <a:lvl5pPr marL="1828800" indent="0">
+              <a:buFontTx/>
+              <a:buNone/>
+              <a:defRPr/>
+            </a:lvl5pPr>
+          </a:lstStyle>
+          <a:p>
+            <a:pPr lvl="0"/>
+            <a:r>
+              <a:rPr lang="de-DE"/>
+              <a:t>Mastertextformat bearbeiten</a:t>
+            </a:r>
+          </a:p>
+        </p:txBody>
+      </p:sp>
+      <p:sp>
+        <p:nvSpPr>
+          <p:cNvPr id="3" name="Text Placeholder 2"/>
+          <p:cNvSpPr>
+            <a:spLocks noGrp="1"/>
+          </p:cNvSpPr>
+          <p:nvPr>
+            <p:ph type="body" idx="1"/>
+          </p:nvPr>
+        </p:nvSpPr>
+        <p:spPr>
+          <a:xfrm>
+            <a:off x="677335" y="4527448"/>
+            <a:ext cx="8596668" cy="1513914"/>
+          </a:xfrm>
+        </p:spPr>
+        <p:txBody>
+          <a:bodyPr anchor="t">
+            <a:normAutofit/>
+          </a:bodyPr>
+          <a:lstStyle>
+            <a:lvl1pPr marL="0" indent="0" algn="l">
+              <a:buNone/>
+              <a:defRPr sz="1800">
+                <a:solidFill>
+                  <a:schemeClr val="tx1">
+                    <a:lumMod val="50000"/>
+                    <a:lumOff val="50000"/>
+                  </a:schemeClr>
+                </a:solidFill>
+              </a:defRPr>
+            </a:lvl1pPr>
+            <a:lvl2pPr marL="457200" indent="0">
+              <a:buNone/>
+              <a:defRPr sz="1800">
+                <a:solidFill>
+                  <a:schemeClr val="tx1">
+                    <a:tint val="75000"/>
+                  </a:schemeClr>
+                </a:solidFill>
+              </a:defRPr>
+            </a:lvl2pPr>
+            <a:lvl3pPr marL="914400" indent="0">
+              <a:buNone/>
+              <a:defRPr sz="1600">
+                <a:solidFill>
+                  <a:schemeClr val="tx1">
+                    <a:tint val="75000"/>
+                  </a:schemeClr>
+                </a:solidFill>
+              </a:defRPr>
+            </a:lvl3pPr>
+            <a:lvl4pPr marL="1371600" indent="0">
+              <a:buNone/>
+              <a:defRPr sz="1400">
+                <a:solidFill>
+                  <a:schemeClr val="tx1">
+                    <a:tint val="75000"/>
+                  </a:schemeClr>
+                </a:solidFill>
+              </a:defRPr>
+            </a:lvl4pPr>
+            <a:lvl5pPr marL="1828800" indent="0">
+              <a:buNone/>
+              <a:defRPr sz="1400">
+                <a:solidFill>
+                  <a:schemeClr val="tx1">
+                    <a:tint val="75000"/>
+                  </a:schemeClr>
+                </a:solidFill>
+              </a:defRPr>
+            </a:lvl5pPr>
+            <a:lvl6pPr marL="2286000" indent="0">
+              <a:buNone/>
+              <a:defRPr sz="1400">
+                <a:solidFill>
+                  <a:schemeClr val="tx1">
+                    <a:tint val="75000"/>
+                  </a:schemeClr>
+                </a:solidFill>
+              </a:defRPr>
+            </a:lvl6pPr>
+            <a:lvl7pPr marL="2743200" indent="0">
+              <a:buNone/>
+              <a:defRPr sz="1400">
+                <a:solidFill>
+                  <a:schemeClr val="tx1">
+                    <a:tint val="75000"/>
+                  </a:schemeClr>
+                </a:solidFill>
+              </a:defRPr>
+            </a:lvl7pPr>
+            <a:lvl8pPr marL="3200400" indent="0">
+              <a:buNone/>
+              <a:defRPr sz="1400">
+                <a:solidFill>
+                  <a:schemeClr val="tx1">
+                    <a:tint val="75000"/>
+                  </a:schemeClr>
+                </a:solidFill>
+              </a:defRPr>
+            </a:lvl8pPr>
+            <a:lvl9pPr marL="3657600" indent="0">
+              <a:buNone/>
+              <a:defRPr sz="1400">
+                <a:solidFill>
+                  <a:schemeClr val="tx1">
+                    <a:tint val="75000"/>
+                  </a:schemeClr>
+                </a:solidFill>
+              </a:defRPr>
+            </a:lvl9pPr>
+          </a:lstStyle>
+          <a:p>
+            <a:pPr lvl="0"/>
+            <a:r>
+              <a:rPr lang="de-DE"/>
+              <a:t>Mastertextformat bearbeiten</a:t>
+            </a:r>
+          </a:p>
+        </p:txBody>
+      </p:sp>
+      <p:sp>
+        <p:nvSpPr>
+          <p:cNvPr id="4" name="Date Placeholder 3"/>
+          <p:cNvSpPr>
+            <a:spLocks noGrp="1"/>
+          </p:cNvSpPr>
+          <p:nvPr>
+            <p:ph type="dt" sz="half" idx="10"/>
+          </p:nvPr>
+        </p:nvSpPr>
+        <p:spPr/>
+        <p:txBody>
+          <a:bodyPr/>
+          <a:lstStyle/>
+          <a:p>
+            <a:fld id="{4193F80F-02C0-4327-B5BE-9ACF7DFE4B9B}" type="datetimeFigureOut">
+              <a:rPr lang="de-DE" smtClean="0"/>
+              <a:t>08.07.2026</a:t>
+            </a:fld>
+            <a:endParaRPr lang="de-DE"/>
+          </a:p>
+        </p:txBody>
+      </p:sp>
+      <p:sp>
+        <p:nvSpPr>
+          <p:cNvPr id="5" name="Footer Placeholder 4"/>
+          <p:cNvSpPr>
+            <a:spLocks noGrp="1"/>
+          </p:cNvSpPr>
+          <p:nvPr>
+            <p:ph type="ftr" sz="quarter" idx="11"/>
+          </p:nvPr>
+        </p:nvSpPr>
+        <p:spPr/>
+        <p:txBody>
+          <a:bodyPr/>
+          <a:lstStyle/>
+          <a:p>
+            <a:endParaRPr lang="de-DE"/>
+          </a:p>
+        </p:txBody>
+      </p:sp>
+      <p:sp>
+        <p:nvSpPr>
+          <p:cNvPr id="6" name="Slide Number Placeholder 5"/>
+          <p:cNvSpPr>
+            <a:spLocks noGrp="1"/>
+          </p:cNvSpPr>
+          <p:nvPr>
+            <p:ph type="sldNum" sz="quarter" idx="12"/>
+          </p:nvPr>
+        </p:nvSpPr>
+        <p:spPr/>
+        <p:txBody>
+          <a:bodyPr/>
+          <a:lstStyle/>
+          <a:p>
+            <a:fld id="{1E23243E-BFCE-4DFA-B66C-083958A49FEF}" type="slidenum">
+              <a:rPr lang="de-DE" smtClean="0"/>
+              <a:t>‹Nr.›</a:t>
+            </a:fld>
+            <a:endParaRPr lang="de-DE"/>
+          </a:p>
+        </p:txBody>
+      </p:sp>
+    </p:spTree>
+    <p:extLst>
+      <p:ext uri="{BB962C8B-B14F-4D97-AF65-F5344CB8AC3E}">
+        <p14:creationId xmlns:p14="http://schemas.microsoft.com/office/powerpoint/2010/main" val="3731086650"/>
+      </p:ext>
+    </p:extLst>
+  </p:cSld>
+  <p:clrMapOvr>
+    <a:masterClrMapping/>
+  </p:clrMapOvr>
+</p:sldLayout>
+</file>
+
+<file path=ppt/slideLayouts/slideLayout15.xml><?xml version="1.0" encoding="utf-8"?>
 <p:sldLayout xmlns:a="http://schemas.openxmlformats.org/drawingml/2006/main" xmlns:r="http://schemas.openxmlformats.org/officeDocument/2006/relationships" xmlns:p="http://schemas.openxmlformats.org/presentationml/2006/main" type="vertTx" preserve="1">
   <p:cSld name="Titel und vertikaler Text">
     <p:spTree>
@@ -354,13 +2556,7 @@
       </p:grpSpPr>
       <p:sp>
         <p:nvSpPr>
-          <p:cNvPr id="2" name="Titel 1">
-            <a:extLst>
-              <a:ext uri="{FF2B5EF4-FFF2-40B4-BE49-F238E27FC236}">
-                <a16:creationId xmlns:a16="http://schemas.microsoft.com/office/drawing/2014/main" id="{C77C794B-F5FA-5AC9-1F84-57E4DA8049A9}"/>
-              </a:ext>
-            </a:extLst>
-          </p:cNvPr>
+          <p:cNvPr id="2" name="Title 1"/>
           <p:cNvSpPr>
             <a:spLocks noGrp="1"/>
           </p:cNvSpPr>
@@ -377,18 +2573,13 @@
               <a:rPr lang="de-DE"/>
               <a:t>Mastertitelformat bearbeiten</a:t>
             </a:r>
-          </a:p>
-        </p:txBody>
-      </p:sp>
-      <p:sp>
-        <p:nvSpPr>
-          <p:cNvPr id="3" name="Vertikaler Textplatzhalter 2">
-            <a:extLst>
-              <a:ext uri="{FF2B5EF4-FFF2-40B4-BE49-F238E27FC236}">
-                <a16:creationId xmlns:a16="http://schemas.microsoft.com/office/drawing/2014/main" id="{FC1F1164-19B6-9EF9-516F-697D4EE81C40}"/>
-              </a:ext>
-            </a:extLst>
-          </p:cNvPr>
+            <a:endParaRPr lang="en-US" dirty="0"/>
+          </a:p>
+        </p:txBody>
+      </p:sp>
+      <p:sp>
+        <p:nvSpPr>
+          <p:cNvPr id="3" name="Vertical Text Placeholder 2"/>
           <p:cNvSpPr>
             <a:spLocks noGrp="1"/>
           </p:cNvSpPr>
@@ -434,18 +2625,13 @@
               <a:rPr lang="de-DE"/>
               <a:t>Fünfte Ebene</a:t>
             </a:r>
-          </a:p>
-        </p:txBody>
-      </p:sp>
-      <p:sp>
-        <p:nvSpPr>
-          <p:cNvPr id="4" name="Datumsplatzhalter 3">
-            <a:extLst>
-              <a:ext uri="{FF2B5EF4-FFF2-40B4-BE49-F238E27FC236}">
-                <a16:creationId xmlns:a16="http://schemas.microsoft.com/office/drawing/2014/main" id="{7D1810AD-9378-7923-4F44-89BD32068973}"/>
-              </a:ext>
-            </a:extLst>
-          </p:cNvPr>
+            <a:endParaRPr lang="en-US" dirty="0"/>
+          </a:p>
+        </p:txBody>
+      </p:sp>
+      <p:sp>
+        <p:nvSpPr>
+          <p:cNvPr id="4" name="Date Placeholder 3"/>
           <p:cNvSpPr>
             <a:spLocks noGrp="1"/>
           </p:cNvSpPr>
@@ -468,13 +2654,7 @@
       </p:sp>
       <p:sp>
         <p:nvSpPr>
-          <p:cNvPr id="5" name="Fußzeilenplatzhalter 4">
-            <a:extLst>
-              <a:ext uri="{FF2B5EF4-FFF2-40B4-BE49-F238E27FC236}">
-                <a16:creationId xmlns:a16="http://schemas.microsoft.com/office/drawing/2014/main" id="{DA862885-9F3D-B445-2C02-28A6A46CE2B9}"/>
-              </a:ext>
-            </a:extLst>
-          </p:cNvPr>
+          <p:cNvPr id="5" name="Footer Placeholder 4"/>
           <p:cNvSpPr>
             <a:spLocks noGrp="1"/>
           </p:cNvSpPr>
@@ -493,13 +2673,7 @@
       </p:sp>
       <p:sp>
         <p:nvSpPr>
-          <p:cNvPr id="6" name="Foliennummernplatzhalter 5">
-            <a:extLst>
-              <a:ext uri="{FF2B5EF4-FFF2-40B4-BE49-F238E27FC236}">
-                <a16:creationId xmlns:a16="http://schemas.microsoft.com/office/drawing/2014/main" id="{D05D7516-23C5-AA0B-1CC9-CE5A80892821}"/>
-              </a:ext>
-            </a:extLst>
-          </p:cNvPr>
+          <p:cNvPr id="6" name="Slide Number Placeholder 5"/>
           <p:cNvSpPr>
             <a:spLocks noGrp="1"/>
           </p:cNvSpPr>
@@ -523,7 +2697,7 @@
     </p:spTree>
     <p:extLst>
       <p:ext uri="{BB962C8B-B14F-4D97-AF65-F5344CB8AC3E}">
-        <p14:creationId xmlns:p14="http://schemas.microsoft.com/office/powerpoint/2010/main" val="3756677171"/>
+        <p14:creationId xmlns:p14="http://schemas.microsoft.com/office/powerpoint/2010/main" val="1795121036"/>
       </p:ext>
     </p:extLst>
   </p:cSld>
@@ -533,7 +2707,7 @@
 </p:sldLayout>
 </file>
 
-<file path=ppt/slideLayouts/slideLayout11.xml><?xml version="1.0" encoding="utf-8"?>
+<file path=ppt/slideLayouts/slideLayout16.xml><?xml version="1.0" encoding="utf-8"?>
 <p:sldLayout xmlns:a="http://schemas.openxmlformats.org/drawingml/2006/main" xmlns:r="http://schemas.openxmlformats.org/officeDocument/2006/relationships" xmlns:p="http://schemas.openxmlformats.org/presentationml/2006/main" type="vertTitleAndTx" preserve="1">
   <p:cSld name="Vertikaler Titel und Text">
     <p:spTree>
@@ -552,13 +2726,7 @@
       </p:grpSpPr>
       <p:sp>
         <p:nvSpPr>
-          <p:cNvPr id="2" name="Vertikaler Titel 1">
-            <a:extLst>
-              <a:ext uri="{FF2B5EF4-FFF2-40B4-BE49-F238E27FC236}">
-                <a16:creationId xmlns:a16="http://schemas.microsoft.com/office/drawing/2014/main" id="{30E3CFC4-A539-B682-13EE-2C9B26D9E08E}"/>
-              </a:ext>
-            </a:extLst>
-          </p:cNvPr>
+          <p:cNvPr id="2" name="Vertical Title 1"/>
           <p:cNvSpPr>
             <a:spLocks noGrp="1"/>
           </p:cNvSpPr>
@@ -568,30 +2736,25 @@
         </p:nvSpPr>
         <p:spPr>
           <a:xfrm>
-            <a:off x="8724900" y="365125"/>
-            <a:ext cx="2628900" cy="5811838"/>
+            <a:off x="7967673" y="609599"/>
+            <a:ext cx="1304743" cy="5251451"/>
           </a:xfrm>
         </p:spPr>
         <p:txBody>
-          <a:bodyPr vert="eaVert"/>
+          <a:bodyPr vert="eaVert" anchor="ctr"/>
           <a:lstStyle/>
           <a:p>
             <a:r>
               <a:rPr lang="de-DE"/>
               <a:t>Mastertitelformat bearbeiten</a:t>
             </a:r>
-          </a:p>
-        </p:txBody>
-      </p:sp>
-      <p:sp>
-        <p:nvSpPr>
-          <p:cNvPr id="3" name="Vertikaler Textplatzhalter 2">
-            <a:extLst>
-              <a:ext uri="{FF2B5EF4-FFF2-40B4-BE49-F238E27FC236}">
-                <a16:creationId xmlns:a16="http://schemas.microsoft.com/office/drawing/2014/main" id="{7A389CB1-51BB-F5D2-3FC0-BE4D7A69EA20}"/>
-              </a:ext>
-            </a:extLst>
-          </p:cNvPr>
+            <a:endParaRPr lang="en-US" dirty="0"/>
+          </a:p>
+        </p:txBody>
+      </p:sp>
+      <p:sp>
+        <p:nvSpPr>
+          <p:cNvPr id="3" name="Vertical Text Placeholder 2"/>
           <p:cNvSpPr>
             <a:spLocks noGrp="1"/>
           </p:cNvSpPr>
@@ -601,8 +2764,8 @@
         </p:nvSpPr>
         <p:spPr>
           <a:xfrm>
-            <a:off x="838200" y="365125"/>
-            <a:ext cx="7734300" cy="5811838"/>
+            <a:off x="677335" y="609600"/>
+            <a:ext cx="7060150" cy="5251450"/>
           </a:xfrm>
         </p:spPr>
         <p:txBody>
@@ -642,18 +2805,13 @@
               <a:rPr lang="de-DE"/>
               <a:t>Fünfte Ebene</a:t>
             </a:r>
-          </a:p>
-        </p:txBody>
-      </p:sp>
-      <p:sp>
-        <p:nvSpPr>
-          <p:cNvPr id="4" name="Datumsplatzhalter 3">
-            <a:extLst>
-              <a:ext uri="{FF2B5EF4-FFF2-40B4-BE49-F238E27FC236}">
-                <a16:creationId xmlns:a16="http://schemas.microsoft.com/office/drawing/2014/main" id="{0FA11DCC-C8A1-29CC-A219-06A8B09E47BE}"/>
-              </a:ext>
-            </a:extLst>
-          </p:cNvPr>
+            <a:endParaRPr lang="en-US" dirty="0"/>
+          </a:p>
+        </p:txBody>
+      </p:sp>
+      <p:sp>
+        <p:nvSpPr>
+          <p:cNvPr id="4" name="Date Placeholder 3"/>
           <p:cNvSpPr>
             <a:spLocks noGrp="1"/>
           </p:cNvSpPr>
@@ -676,13 +2834,7 @@
       </p:sp>
       <p:sp>
         <p:nvSpPr>
-          <p:cNvPr id="5" name="Fußzeilenplatzhalter 4">
-            <a:extLst>
-              <a:ext uri="{FF2B5EF4-FFF2-40B4-BE49-F238E27FC236}">
-                <a16:creationId xmlns:a16="http://schemas.microsoft.com/office/drawing/2014/main" id="{90660A5A-0A45-081F-0A75-227873DAAA0E}"/>
-              </a:ext>
-            </a:extLst>
-          </p:cNvPr>
+          <p:cNvPr id="5" name="Footer Placeholder 4"/>
           <p:cNvSpPr>
             <a:spLocks noGrp="1"/>
           </p:cNvSpPr>
@@ -701,13 +2853,7 @@
       </p:sp>
       <p:sp>
         <p:nvSpPr>
-          <p:cNvPr id="6" name="Foliennummernplatzhalter 5">
-            <a:extLst>
-              <a:ext uri="{FF2B5EF4-FFF2-40B4-BE49-F238E27FC236}">
-                <a16:creationId xmlns:a16="http://schemas.microsoft.com/office/drawing/2014/main" id="{36AD5959-CDE7-4325-C094-42C24DCD1BD4}"/>
-              </a:ext>
-            </a:extLst>
-          </p:cNvPr>
+          <p:cNvPr id="6" name="Slide Number Placeholder 5"/>
           <p:cNvSpPr>
             <a:spLocks noGrp="1"/>
           </p:cNvSpPr>
@@ -731,7 +2877,7 @@
     </p:spTree>
     <p:extLst>
       <p:ext uri="{BB962C8B-B14F-4D97-AF65-F5344CB8AC3E}">
-        <p14:creationId xmlns:p14="http://schemas.microsoft.com/office/powerpoint/2010/main" val="1020312798"/>
+        <p14:creationId xmlns:p14="http://schemas.microsoft.com/office/powerpoint/2010/main" val="1908360685"/>
       </p:ext>
     </p:extLst>
   </p:cSld>
@@ -760,13 +2906,7 @@
       </p:grpSpPr>
       <p:sp>
         <p:nvSpPr>
-          <p:cNvPr id="2" name="Titel 1">
-            <a:extLst>
-              <a:ext uri="{FF2B5EF4-FFF2-40B4-BE49-F238E27FC236}">
-                <a16:creationId xmlns:a16="http://schemas.microsoft.com/office/drawing/2014/main" id="{A2A8511F-8AEF-132A-EFDB-72E5694FF99D}"/>
-              </a:ext>
-            </a:extLst>
-          </p:cNvPr>
+          <p:cNvPr id="2" name="Title 1"/>
           <p:cNvSpPr>
             <a:spLocks noGrp="1"/>
           </p:cNvSpPr>
@@ -783,18 +2923,13 @@
               <a:rPr lang="de-DE"/>
               <a:t>Mastertitelformat bearbeiten</a:t>
             </a:r>
-          </a:p>
-        </p:txBody>
-      </p:sp>
-      <p:sp>
-        <p:nvSpPr>
-          <p:cNvPr id="3" name="Inhaltsplatzhalter 2">
-            <a:extLst>
-              <a:ext uri="{FF2B5EF4-FFF2-40B4-BE49-F238E27FC236}">
-                <a16:creationId xmlns:a16="http://schemas.microsoft.com/office/drawing/2014/main" id="{8CB345C6-5AD2-9F71-B9BC-8588B89A8904}"/>
-              </a:ext>
-            </a:extLst>
-          </p:cNvPr>
+            <a:endParaRPr lang="en-US" dirty="0"/>
+          </a:p>
+        </p:txBody>
+      </p:sp>
+      <p:sp>
+        <p:nvSpPr>
+          <p:cNvPr id="3" name="Content Placeholder 2"/>
           <p:cNvSpPr>
             <a:spLocks noGrp="1"/>
           </p:cNvSpPr>
@@ -840,18 +2975,13 @@
               <a:rPr lang="de-DE"/>
               <a:t>Fünfte Ebene</a:t>
             </a:r>
-          </a:p>
-        </p:txBody>
-      </p:sp>
-      <p:sp>
-        <p:nvSpPr>
-          <p:cNvPr id="4" name="Datumsplatzhalter 3">
-            <a:extLst>
-              <a:ext uri="{FF2B5EF4-FFF2-40B4-BE49-F238E27FC236}">
-                <a16:creationId xmlns:a16="http://schemas.microsoft.com/office/drawing/2014/main" id="{D957D3DE-3E0D-141E-F710-B10E83E5255E}"/>
-              </a:ext>
-            </a:extLst>
-          </p:cNvPr>
+            <a:endParaRPr lang="en-US" dirty="0"/>
+          </a:p>
+        </p:txBody>
+      </p:sp>
+      <p:sp>
+        <p:nvSpPr>
+          <p:cNvPr id="4" name="Date Placeholder 3"/>
           <p:cNvSpPr>
             <a:spLocks noGrp="1"/>
           </p:cNvSpPr>
@@ -874,13 +3004,7 @@
       </p:sp>
       <p:sp>
         <p:nvSpPr>
-          <p:cNvPr id="5" name="Fußzeilenplatzhalter 4">
-            <a:extLst>
-              <a:ext uri="{FF2B5EF4-FFF2-40B4-BE49-F238E27FC236}">
-                <a16:creationId xmlns:a16="http://schemas.microsoft.com/office/drawing/2014/main" id="{E5D2527C-F341-01C6-28F6-3D246ECFB452}"/>
-              </a:ext>
-            </a:extLst>
-          </p:cNvPr>
+          <p:cNvPr id="5" name="Footer Placeholder 4"/>
           <p:cNvSpPr>
             <a:spLocks noGrp="1"/>
           </p:cNvSpPr>
@@ -899,13 +3023,7 @@
       </p:sp>
       <p:sp>
         <p:nvSpPr>
-          <p:cNvPr id="6" name="Foliennummernplatzhalter 5">
-            <a:extLst>
-              <a:ext uri="{FF2B5EF4-FFF2-40B4-BE49-F238E27FC236}">
-                <a16:creationId xmlns:a16="http://schemas.microsoft.com/office/drawing/2014/main" id="{6640DB26-C00A-A1F1-D252-62FB1C5A18FF}"/>
-              </a:ext>
-            </a:extLst>
-          </p:cNvPr>
+          <p:cNvPr id="6" name="Slide Number Placeholder 5"/>
           <p:cNvSpPr>
             <a:spLocks noGrp="1"/>
           </p:cNvSpPr>
@@ -929,7 +3047,7 @@
     </p:spTree>
     <p:extLst>
       <p:ext uri="{BB962C8B-B14F-4D97-AF65-F5344CB8AC3E}">
-        <p14:creationId xmlns:p14="http://schemas.microsoft.com/office/powerpoint/2010/main" val="2814544100"/>
+        <p14:creationId xmlns:p14="http://schemas.microsoft.com/office/powerpoint/2010/main" val="3300231834"/>
       </p:ext>
     </p:extLst>
   </p:cSld>
@@ -958,13 +3076,7 @@
       </p:grpSpPr>
       <p:sp>
         <p:nvSpPr>
-          <p:cNvPr id="2" name="Titel 1">
-            <a:extLst>
-              <a:ext uri="{FF2B5EF4-FFF2-40B4-BE49-F238E27FC236}">
-                <a16:creationId xmlns:a16="http://schemas.microsoft.com/office/drawing/2014/main" id="{B022CCEA-9549-048A-C336-5B12C5EA685C}"/>
-              </a:ext>
-            </a:extLst>
-          </p:cNvPr>
+          <p:cNvPr id="2" name="Title 1"/>
           <p:cNvSpPr>
             <a:spLocks noGrp="1"/>
           </p:cNvSpPr>
@@ -974,15 +3086,15 @@
         </p:nvSpPr>
         <p:spPr>
           <a:xfrm>
-            <a:off x="831850" y="1709738"/>
-            <a:ext cx="10515600" cy="2852737"/>
+            <a:off x="677335" y="2700867"/>
+            <a:ext cx="8596668" cy="1826581"/>
           </a:xfrm>
         </p:spPr>
         <p:txBody>
           <a:bodyPr anchor="b"/>
           <a:lstStyle>
-            <a:lvl1pPr>
-              <a:defRPr sz="6000"/>
+            <a:lvl1pPr algn="l">
+              <a:defRPr sz="4000" b="0" cap="none"/>
             </a:lvl1pPr>
           </a:lstStyle>
           <a:p>
@@ -990,18 +3102,13 @@
               <a:rPr lang="de-DE"/>
               <a:t>Mastertitelformat bearbeiten</a:t>
             </a:r>
-          </a:p>
-        </p:txBody>
-      </p:sp>
-      <p:sp>
-        <p:nvSpPr>
-          <p:cNvPr id="3" name="Textplatzhalter 2">
-            <a:extLst>
-              <a:ext uri="{FF2B5EF4-FFF2-40B4-BE49-F238E27FC236}">
-                <a16:creationId xmlns:a16="http://schemas.microsoft.com/office/drawing/2014/main" id="{4D547E35-2E9F-0DAB-AA6D-B8DFB8FBA698}"/>
-              </a:ext>
-            </a:extLst>
-          </p:cNvPr>
+            <a:endParaRPr lang="en-US" dirty="0"/>
+          </a:p>
+        </p:txBody>
+      </p:sp>
+      <p:sp>
+        <p:nvSpPr>
+          <p:cNvPr id="3" name="Text Placeholder 2"/>
           <p:cNvSpPr>
             <a:spLocks noGrp="1"/>
           </p:cNvSpPr>
@@ -1011,99 +3118,100 @@
         </p:nvSpPr>
         <p:spPr>
           <a:xfrm>
-            <a:off x="831850" y="4589463"/>
-            <a:ext cx="10515600" cy="1500187"/>
+            <a:off x="677335" y="4527448"/>
+            <a:ext cx="8596668" cy="860400"/>
           </a:xfrm>
         </p:spPr>
         <p:txBody>
-          <a:bodyPr/>
+          <a:bodyPr anchor="t"/>
           <a:lstStyle>
-            <a:lvl1pPr marL="0" indent="0">
-              <a:buNone/>
-              <a:defRPr sz="2400">
+            <a:lvl1pPr marL="0" indent="0" algn="l">
+              <a:buNone/>
+              <a:defRPr sz="2000">
                 <a:solidFill>
                   <a:schemeClr val="tx1">
-                    <a:tint val="82000"/>
+                    <a:lumMod val="50000"/>
+                    <a:lumOff val="50000"/>
                   </a:schemeClr>
                 </a:solidFill>
               </a:defRPr>
             </a:lvl1pPr>
             <a:lvl2pPr marL="457200" indent="0">
               <a:buNone/>
-              <a:defRPr sz="2000">
+              <a:defRPr sz="1800">
                 <a:solidFill>
                   <a:schemeClr val="tx1">
-                    <a:tint val="82000"/>
+                    <a:tint val="75000"/>
                   </a:schemeClr>
                 </a:solidFill>
               </a:defRPr>
             </a:lvl2pPr>
             <a:lvl3pPr marL="914400" indent="0">
               <a:buNone/>
-              <a:defRPr sz="1800">
+              <a:defRPr sz="1600">
                 <a:solidFill>
                   <a:schemeClr val="tx1">
-                    <a:tint val="82000"/>
+                    <a:tint val="75000"/>
                   </a:schemeClr>
                 </a:solidFill>
               </a:defRPr>
             </a:lvl3pPr>
             <a:lvl4pPr marL="1371600" indent="0">
               <a:buNone/>
-              <a:defRPr sz="1600">
+              <a:defRPr sz="1400">
                 <a:solidFill>
                   <a:schemeClr val="tx1">
-                    <a:tint val="82000"/>
+                    <a:tint val="75000"/>
                   </a:schemeClr>
                 </a:solidFill>
               </a:defRPr>
             </a:lvl4pPr>
             <a:lvl5pPr marL="1828800" indent="0">
               <a:buNone/>
-              <a:defRPr sz="1600">
+              <a:defRPr sz="1400">
                 <a:solidFill>
                   <a:schemeClr val="tx1">
-                    <a:tint val="82000"/>
+                    <a:tint val="75000"/>
                   </a:schemeClr>
                 </a:solidFill>
               </a:defRPr>
             </a:lvl5pPr>
             <a:lvl6pPr marL="2286000" indent="0">
               <a:buNone/>
-              <a:defRPr sz="1600">
+              <a:defRPr sz="1400">
                 <a:solidFill>
                   <a:schemeClr val="tx1">
-                    <a:tint val="82000"/>
+                    <a:tint val="75000"/>
                   </a:schemeClr>
                 </a:solidFill>
               </a:defRPr>
             </a:lvl6pPr>
             <a:lvl7pPr marL="2743200" indent="0">
               <a:buNone/>
-              <a:defRPr sz="1600">
+              <a:defRPr sz="1400">
                 <a:solidFill>
                   <a:schemeClr val="tx1">
-                    <a:tint val="82000"/>
+                    <a:tint val="75000"/>
                   </a:schemeClr>
                 </a:solidFill>
               </a:defRPr>
             </a:lvl7pPr>
             <a:lvl8pPr marL="3200400" indent="0">
               <a:buNone/>
-              <a:defRPr sz="1600">
+              <a:defRPr sz="1400">
                 <a:solidFill>
                   <a:schemeClr val="tx1">
-                    <a:tint val="82000"/>
+                    <a:tint val="75000"/>
                   </a:schemeClr>
                 </a:solidFill>
               </a:defRPr>
             </a:lvl8pPr>
             <a:lvl9pPr marL="3657600" indent="0">
               <a:buNone/>
-              <a:defRPr sz="1600">
+              <a:defRPr sz="1400">
                 <a:solidFill>
                   <a:schemeClr val="tx1">
-                    <a:tint val="82000"/>
+                    <a:tint val="75000"/>
                   </a:schemeClr>
                 </a:solidFill>
               </a:defRPr>
@@ -1120,13 +3228,7 @@
       </p:sp>
       <p:sp>
         <p:nvSpPr>
-          <p:cNvPr id="4" name="Datumsplatzhalter 3">
-            <a:extLst>
-              <a:ext uri="{FF2B5EF4-FFF2-40B4-BE49-F238E27FC236}">
-                <a16:creationId xmlns:a16="http://schemas.microsoft.com/office/drawing/2014/main" id="{80ED4916-BE75-C392-64A8-0A85714B60EE}"/>
-              </a:ext>
-            </a:extLst>
-          </p:cNvPr>
+          <p:cNvPr id="4" name="Date Placeholder 3"/>
           <p:cNvSpPr>
             <a:spLocks noGrp="1"/>
           </p:cNvSpPr>
@@ -1149,13 +3251,7 @@
       </p:sp>
       <p:sp>
         <p:nvSpPr>
-          <p:cNvPr id="5" name="Fußzeilenplatzhalter 4">
-            <a:extLst>
-              <a:ext uri="{FF2B5EF4-FFF2-40B4-BE49-F238E27FC236}">
-                <a16:creationId xmlns:a16="http://schemas.microsoft.com/office/drawing/2014/main" id="{78B7D83A-F05A-4649-CC51-A22E2A3091BF}"/>
-              </a:ext>
-            </a:extLst>
-          </p:cNvPr>
+          <p:cNvPr id="5" name="Footer Placeholder 4"/>
           <p:cNvSpPr>
             <a:spLocks noGrp="1"/>
           </p:cNvSpPr>
@@ -1174,13 +3270,7 @@
       </p:sp>
       <p:sp>
         <p:nvSpPr>
-          <p:cNvPr id="6" name="Foliennummernplatzhalter 5">
-            <a:extLst>
-              <a:ext uri="{FF2B5EF4-FFF2-40B4-BE49-F238E27FC236}">
-                <a16:creationId xmlns:a16="http://schemas.microsoft.com/office/drawing/2014/main" id="{BA61B00F-8141-8537-68B7-65A877A79701}"/>
-              </a:ext>
-            </a:extLst>
-          </p:cNvPr>
+          <p:cNvPr id="6" name="Slide Number Placeholder 5"/>
           <p:cNvSpPr>
             <a:spLocks noGrp="1"/>
           </p:cNvSpPr>
@@ -1204,7 +3294,7 @@
     </p:spTree>
     <p:extLst>
       <p:ext uri="{BB962C8B-B14F-4D97-AF65-F5344CB8AC3E}">
-        <p14:creationId xmlns:p14="http://schemas.microsoft.com/office/powerpoint/2010/main" val="230413593"/>
+        <p14:creationId xmlns:p14="http://schemas.microsoft.com/office/powerpoint/2010/main" val="394244712"/>
       </p:ext>
     </p:extLst>
   </p:cSld>
@@ -1233,13 +3323,7 @@
       </p:grpSpPr>
       <p:sp>
         <p:nvSpPr>
-          <p:cNvPr id="2" name="Titel 1">
-            <a:extLst>
-              <a:ext uri="{FF2B5EF4-FFF2-40B4-BE49-F238E27FC236}">
-                <a16:creationId xmlns:a16="http://schemas.microsoft.com/office/drawing/2014/main" id="{B865F1D5-A9C3-AA43-A7CD-91B52365CE92}"/>
-              </a:ext>
-            </a:extLst>
-          </p:cNvPr>
+          <p:cNvPr id="2" name="Title 1"/>
           <p:cNvSpPr>
             <a:spLocks noGrp="1"/>
           </p:cNvSpPr>
@@ -1256,18 +3340,13 @@
               <a:rPr lang="de-DE"/>
               <a:t>Mastertitelformat bearbeiten</a:t>
             </a:r>
-          </a:p>
-        </p:txBody>
-      </p:sp>
-      <p:sp>
-        <p:nvSpPr>
-          <p:cNvPr id="3" name="Inhaltsplatzhalter 2">
-            <a:extLst>
-              <a:ext uri="{FF2B5EF4-FFF2-40B4-BE49-F238E27FC236}">
-                <a16:creationId xmlns:a16="http://schemas.microsoft.com/office/drawing/2014/main" id="{63EAB19F-D698-9115-2C83-8552EFEDFEBB}"/>
-              </a:ext>
-            </a:extLst>
-          </p:cNvPr>
+            <a:endParaRPr lang="en-US" dirty="0"/>
+          </a:p>
+        </p:txBody>
+      </p:sp>
+      <p:sp>
+        <p:nvSpPr>
+          <p:cNvPr id="3" name="Content Placeholder 2"/>
           <p:cNvSpPr>
             <a:spLocks noGrp="1"/>
           </p:cNvSpPr>
@@ -1277,8 +3356,8 @@
         </p:nvSpPr>
         <p:spPr>
           <a:xfrm>
-            <a:off x="838200" y="1825625"/>
-            <a:ext cx="5181600" cy="4351338"/>
+            <a:off x="677334" y="2160589"/>
+            <a:ext cx="4184035" cy="3880772"/>
           </a:xfrm>
         </p:spPr>
         <p:txBody>
@@ -1318,18 +3397,13 @@
               <a:rPr lang="de-DE"/>
               <a:t>Fünfte Ebene</a:t>
             </a:r>
-          </a:p>
-        </p:txBody>
-      </p:sp>
-      <p:sp>
-        <p:nvSpPr>
-          <p:cNvPr id="4" name="Inhaltsplatzhalter 3">
-            <a:extLst>
-              <a:ext uri="{FF2B5EF4-FFF2-40B4-BE49-F238E27FC236}">
-                <a16:creationId xmlns:a16="http://schemas.microsoft.com/office/drawing/2014/main" id="{75D70CC0-E318-2843-5A5D-5FBA3D57FB45}"/>
-              </a:ext>
-            </a:extLst>
-          </p:cNvPr>
+            <a:endParaRPr lang="en-US" dirty="0"/>
+          </a:p>
+        </p:txBody>
+      </p:sp>
+      <p:sp>
+        <p:nvSpPr>
+          <p:cNvPr id="4" name="Content Placeholder 3"/>
           <p:cNvSpPr>
             <a:spLocks noGrp="1"/>
           </p:cNvSpPr>
@@ -1339,8 +3413,8 @@
         </p:nvSpPr>
         <p:spPr>
           <a:xfrm>
-            <a:off x="6172200" y="1825625"/>
-            <a:ext cx="5181600" cy="4351338"/>
+            <a:off x="5089970" y="2160589"/>
+            <a:ext cx="4184034" cy="3880773"/>
           </a:xfrm>
         </p:spPr>
         <p:txBody>
@@ -1380,18 +3454,13 @@
               <a:rPr lang="de-DE"/>
               <a:t>Fünfte Ebene</a:t>
             </a:r>
-          </a:p>
-        </p:txBody>
-      </p:sp>
-      <p:sp>
-        <p:nvSpPr>
-          <p:cNvPr id="5" name="Datumsplatzhalter 4">
-            <a:extLst>
-              <a:ext uri="{FF2B5EF4-FFF2-40B4-BE49-F238E27FC236}">
-                <a16:creationId xmlns:a16="http://schemas.microsoft.com/office/drawing/2014/main" id="{5D9004AE-67F6-5216-C786-9A6E010EEE0B}"/>
-              </a:ext>
-            </a:extLst>
-          </p:cNvPr>
+            <a:endParaRPr lang="en-US" dirty="0"/>
+          </a:p>
+        </p:txBody>
+      </p:sp>
+      <p:sp>
+        <p:nvSpPr>
+          <p:cNvPr id="5" name="Date Placeholder 4"/>
           <p:cNvSpPr>
             <a:spLocks noGrp="1"/>
           </p:cNvSpPr>
@@ -1414,13 +3483,7 @@
       </p:sp>
       <p:sp>
         <p:nvSpPr>
-          <p:cNvPr id="6" name="Fußzeilenplatzhalter 5">
-            <a:extLst>
-              <a:ext uri="{FF2B5EF4-FFF2-40B4-BE49-F238E27FC236}">
-                <a16:creationId xmlns:a16="http://schemas.microsoft.com/office/drawing/2014/main" id="{FA783515-56E2-A3D4-9E6B-A59171B3FBCA}"/>
-              </a:ext>
-            </a:extLst>
-          </p:cNvPr>
+          <p:cNvPr id="6" name="Footer Placeholder 5"/>
           <p:cNvSpPr>
             <a:spLocks noGrp="1"/>
           </p:cNvSpPr>
@@ -1439,13 +3502,7 @@
       </p:sp>
       <p:sp>
         <p:nvSpPr>
-          <p:cNvPr id="7" name="Foliennummernplatzhalter 6">
-            <a:extLst>
-              <a:ext uri="{FF2B5EF4-FFF2-40B4-BE49-F238E27FC236}">
-                <a16:creationId xmlns:a16="http://schemas.microsoft.com/office/drawing/2014/main" id="{CD1E9F80-B6EA-50F2-BBD0-D5BD43CD5532}"/>
-              </a:ext>
-            </a:extLst>
-          </p:cNvPr>
+          <p:cNvPr id="7" name="Slide Number Placeholder 6"/>
           <p:cNvSpPr>
             <a:spLocks noGrp="1"/>
           </p:cNvSpPr>
@@ -1469,7 +3526,7 @@
     </p:spTree>
     <p:extLst>
       <p:ext uri="{BB962C8B-B14F-4D97-AF65-F5344CB8AC3E}">
-        <p14:creationId xmlns:p14="http://schemas.microsoft.com/office/powerpoint/2010/main" val="789022452"/>
+        <p14:creationId xmlns:p14="http://schemas.microsoft.com/office/powerpoint/2010/main" val="4260681592"/>
       </p:ext>
     </p:extLst>
   </p:cSld>
@@ -1498,65 +3555,55 @@
       </p:grpSpPr>
       <p:sp>
         <p:nvSpPr>
-          <p:cNvPr id="2" name="Titel 1">
-            <a:extLst>
-              <a:ext uri="{FF2B5EF4-FFF2-40B4-BE49-F238E27FC236}">
-                <a16:creationId xmlns:a16="http://schemas.microsoft.com/office/drawing/2014/main" id="{8A037277-7EB7-F695-1934-2E33C2DF208B}"/>
-              </a:ext>
-            </a:extLst>
-          </p:cNvPr>
+          <p:cNvPr id="2" name="Title 1"/>
           <p:cNvSpPr>
             <a:spLocks noGrp="1"/>
           </p:cNvSpPr>
           <p:nvPr>
             <p:ph type="title"/>
+          </p:nvPr>
+        </p:nvSpPr>
+        <p:spPr/>
+        <p:txBody>
+          <a:bodyPr/>
+          <a:lstStyle>
+            <a:lvl1pPr>
+              <a:defRPr/>
+            </a:lvl1pPr>
+          </a:lstStyle>
+          <a:p>
+            <a:r>
+              <a:rPr lang="de-DE"/>
+              <a:t>Mastertitelformat bearbeiten</a:t>
+            </a:r>
+            <a:endParaRPr lang="en-US" dirty="0"/>
+          </a:p>
+        </p:txBody>
+      </p:sp>
+      <p:sp>
+        <p:nvSpPr>
+          <p:cNvPr id="3" name="Text Placeholder 2"/>
+          <p:cNvSpPr>
+            <a:spLocks noGrp="1"/>
+          </p:cNvSpPr>
+          <p:nvPr>
+            <p:ph type="body" idx="1"/>
           </p:nvPr>
         </p:nvSpPr>
         <p:spPr>
           <a:xfrm>
-            <a:off x="839788" y="365125"/>
-            <a:ext cx="10515600" cy="1325563"/>
+            <a:off x="675745" y="2160983"/>
+            <a:ext cx="4185623" cy="576262"/>
           </a:xfrm>
         </p:spPr>
         <p:txBody>
-          <a:bodyPr/>
-          <a:lstStyle/>
-          <a:p>
-            <a:r>
-              <a:rPr lang="de-DE"/>
-              <a:t>Mastertitelformat bearbeiten</a:t>
-            </a:r>
-          </a:p>
-        </p:txBody>
-      </p:sp>
-      <p:sp>
-        <p:nvSpPr>
-          <p:cNvPr id="3" name="Textplatzhalter 2">
-            <a:extLst>
-              <a:ext uri="{FF2B5EF4-FFF2-40B4-BE49-F238E27FC236}">
-                <a16:creationId xmlns:a16="http://schemas.microsoft.com/office/drawing/2014/main" id="{956A844C-9A94-D4A5-FF94-A993E90D37F1}"/>
-              </a:ext>
-            </a:extLst>
-          </p:cNvPr>
-          <p:cNvSpPr>
-            <a:spLocks noGrp="1"/>
-          </p:cNvSpPr>
-          <p:nvPr>
-            <p:ph type="body" idx="1"/>
-          </p:nvPr>
-        </p:nvSpPr>
-        <p:spPr>
-          <a:xfrm>
-            <a:off x="839788" y="1681163"/>
-            <a:ext cx="5157787" cy="823912"/>
-          </a:xfrm>
-        </p:spPr>
-        <p:txBody>
-          <a:bodyPr anchor="b"/>
+          <a:bodyPr anchor="b">
+            <a:noAutofit/>
+          </a:bodyPr>
           <a:lstStyle>
             <a:lvl1pPr marL="0" indent="0">
               <a:buNone/>
-              <a:defRPr sz="2400" b="1"/>
+              <a:defRPr sz="2400" b="0"/>
             </a:lvl1pPr>
             <a:lvl2pPr marL="457200" indent="0">
               <a:buNone/>
@@ -1602,13 +3649,7 @@
       </p:sp>
       <p:sp>
         <p:nvSpPr>
-          <p:cNvPr id="4" name="Inhaltsplatzhalter 3">
-            <a:extLst>
-              <a:ext uri="{FF2B5EF4-FFF2-40B4-BE49-F238E27FC236}">
-                <a16:creationId xmlns:a16="http://schemas.microsoft.com/office/drawing/2014/main" id="{C6EDE3A6-EF42-B4BB-56FB-C3CA8E5FD355}"/>
-              </a:ext>
-            </a:extLst>
-          </p:cNvPr>
+          <p:cNvPr id="4" name="Content Placeholder 3"/>
           <p:cNvSpPr>
             <a:spLocks noGrp="1"/>
           </p:cNvSpPr>
@@ -1618,12 +3659,14 @@
         </p:nvSpPr>
         <p:spPr>
           <a:xfrm>
-            <a:off x="839788" y="2505075"/>
-            <a:ext cx="5157787" cy="3684588"/>
+            <a:off x="675745" y="2737245"/>
+            <a:ext cx="4185623" cy="3304117"/>
           </a:xfrm>
         </p:spPr>
         <p:txBody>
-          <a:bodyPr/>
+          <a:bodyPr>
+            <a:normAutofit/>
+          </a:bodyPr>
           <a:lstStyle/>
           <a:p>
             <a:pPr lvl="0"/>
@@ -1659,18 +3702,13 @@
               <a:rPr lang="de-DE"/>
               <a:t>Fünfte Ebene</a:t>
             </a:r>
-          </a:p>
-        </p:txBody>
-      </p:sp>
-      <p:sp>
-        <p:nvSpPr>
-          <p:cNvPr id="5" name="Textplatzhalter 4">
-            <a:extLst>
-              <a:ext uri="{FF2B5EF4-FFF2-40B4-BE49-F238E27FC236}">
-                <a16:creationId xmlns:a16="http://schemas.microsoft.com/office/drawing/2014/main" id="{D47104A4-98E3-3868-8331-636E69C03D88}"/>
-              </a:ext>
-            </a:extLst>
-          </p:cNvPr>
+            <a:endParaRPr lang="en-US" dirty="0"/>
+          </a:p>
+        </p:txBody>
+      </p:sp>
+      <p:sp>
+        <p:nvSpPr>
+          <p:cNvPr id="5" name="Text Placeholder 4"/>
           <p:cNvSpPr>
             <a:spLocks noGrp="1"/>
           </p:cNvSpPr>
@@ -1680,16 +3718,18 @@
         </p:nvSpPr>
         <p:spPr>
           <a:xfrm>
-            <a:off x="6172200" y="1681163"/>
-            <a:ext cx="5183188" cy="823912"/>
+            <a:off x="5088383" y="2160983"/>
+            <a:ext cx="4185618" cy="576262"/>
           </a:xfrm>
         </p:spPr>
         <p:txBody>
-          <a:bodyPr anchor="b"/>
+          <a:bodyPr anchor="b">
+            <a:noAutofit/>
+          </a:bodyPr>
           <a:lstStyle>
             <a:lvl1pPr marL="0" indent="0">
               <a:buNone/>
-              <a:defRPr sz="2400" b="1"/>
+              <a:defRPr sz="2400" b="0"/>
             </a:lvl1pPr>
             <a:lvl2pPr marL="457200" indent="0">
               <a:buNone/>
@@ -1735,13 +3775,7 @@
       </p:sp>
       <p:sp>
         <p:nvSpPr>
-          <p:cNvPr id="6" name="Inhaltsplatzhalter 5">
-            <a:extLst>
-              <a:ext uri="{FF2B5EF4-FFF2-40B4-BE49-F238E27FC236}">
-                <a16:creationId xmlns:a16="http://schemas.microsoft.com/office/drawing/2014/main" id="{993697EA-88EA-78AE-81CC-3D203ED4F530}"/>
-              </a:ext>
-            </a:extLst>
-          </p:cNvPr>
+          <p:cNvPr id="6" name="Content Placeholder 5"/>
           <p:cNvSpPr>
             <a:spLocks noGrp="1"/>
           </p:cNvSpPr>
@@ -1751,12 +3785,14 @@
         </p:nvSpPr>
         <p:spPr>
           <a:xfrm>
-            <a:off x="6172200" y="2505075"/>
-            <a:ext cx="5183188" cy="3684588"/>
+            <a:off x="5088384" y="2737245"/>
+            <a:ext cx="4185617" cy="3304117"/>
           </a:xfrm>
         </p:spPr>
         <p:txBody>
-          <a:bodyPr/>
+          <a:bodyPr>
+            <a:normAutofit/>
+          </a:bodyPr>
           <a:lstStyle/>
           <a:p>
             <a:pPr lvl="0"/>
@@ -1792,18 +3828,13 @@
               <a:rPr lang="de-DE"/>
               <a:t>Fünfte Ebene</a:t>
             </a:r>
-          </a:p>
-        </p:txBody>
-      </p:sp>
-      <p:sp>
-        <p:nvSpPr>
-          <p:cNvPr id="7" name="Datumsplatzhalter 6">
-            <a:extLst>
-              <a:ext uri="{FF2B5EF4-FFF2-40B4-BE49-F238E27FC236}">
-                <a16:creationId xmlns:a16="http://schemas.microsoft.com/office/drawing/2014/main" id="{786AE161-6576-39B7-10FE-F14BDB1558B3}"/>
-              </a:ext>
-            </a:extLst>
-          </p:cNvPr>
+            <a:endParaRPr lang="en-US" dirty="0"/>
+          </a:p>
+        </p:txBody>
+      </p:sp>
+      <p:sp>
+        <p:nvSpPr>
+          <p:cNvPr id="7" name="Date Placeholder 6"/>
           <p:cNvSpPr>
             <a:spLocks noGrp="1"/>
           </p:cNvSpPr>
@@ -1826,13 +3857,7 @@
       </p:sp>
       <p:sp>
         <p:nvSpPr>
-          <p:cNvPr id="8" name="Fußzeilenplatzhalter 7">
-            <a:extLst>
-              <a:ext uri="{FF2B5EF4-FFF2-40B4-BE49-F238E27FC236}">
-                <a16:creationId xmlns:a16="http://schemas.microsoft.com/office/drawing/2014/main" id="{E762F06B-F9F5-D7E8-C805-72AF26DB90C3}"/>
-              </a:ext>
-            </a:extLst>
-          </p:cNvPr>
+          <p:cNvPr id="8" name="Footer Placeholder 7"/>
           <p:cNvSpPr>
             <a:spLocks noGrp="1"/>
           </p:cNvSpPr>
@@ -1851,13 +3876,7 @@
       </p:sp>
       <p:sp>
         <p:nvSpPr>
-          <p:cNvPr id="9" name="Foliennummernplatzhalter 8">
-            <a:extLst>
-              <a:ext uri="{FF2B5EF4-FFF2-40B4-BE49-F238E27FC236}">
-                <a16:creationId xmlns:a16="http://schemas.microsoft.com/office/drawing/2014/main" id="{3FC9A399-8258-9149-587D-CD1A07820CA9}"/>
-              </a:ext>
-            </a:extLst>
-          </p:cNvPr>
+          <p:cNvPr id="9" name="Slide Number Placeholder 8"/>
           <p:cNvSpPr>
             <a:spLocks noGrp="1"/>
           </p:cNvSpPr>
@@ -1881,7 +3900,7 @@
     </p:spTree>
     <p:extLst>
       <p:ext uri="{BB962C8B-B14F-4D97-AF65-F5344CB8AC3E}">
-        <p14:creationId xmlns:p14="http://schemas.microsoft.com/office/powerpoint/2010/main" val="2853661516"/>
+        <p14:creationId xmlns:p14="http://schemas.microsoft.com/office/powerpoint/2010/main" val="3688188910"/>
       </p:ext>
     </p:extLst>
   </p:cSld>
@@ -1910,13 +3929,7 @@
       </p:grpSpPr>
       <p:sp>
         <p:nvSpPr>
-          <p:cNvPr id="2" name="Titel 1">
-            <a:extLst>
-              <a:ext uri="{FF2B5EF4-FFF2-40B4-BE49-F238E27FC236}">
-                <a16:creationId xmlns:a16="http://schemas.microsoft.com/office/drawing/2014/main" id="{D49CB4BF-062A-0DC0-C43A-E84C5410F068}"/>
-              </a:ext>
-            </a:extLst>
-          </p:cNvPr>
+          <p:cNvPr id="2" name="Title 1"/>
           <p:cNvSpPr>
             <a:spLocks noGrp="1"/>
           </p:cNvSpPr>
@@ -1924,7 +3937,12 @@
             <p:ph type="title"/>
           </p:nvPr>
         </p:nvSpPr>
-        <p:spPr/>
+        <p:spPr>
+          <a:xfrm>
+            <a:off x="677334" y="609600"/>
+            <a:ext cx="8596668" cy="1320800"/>
+          </a:xfrm>
+        </p:spPr>
         <p:txBody>
           <a:bodyPr/>
           <a:lstStyle/>
@@ -1933,18 +3951,13 @@
               <a:rPr lang="de-DE"/>
               <a:t>Mastertitelformat bearbeiten</a:t>
             </a:r>
-          </a:p>
-        </p:txBody>
-      </p:sp>
-      <p:sp>
-        <p:nvSpPr>
-          <p:cNvPr id="3" name="Datumsplatzhalter 2">
-            <a:extLst>
-              <a:ext uri="{FF2B5EF4-FFF2-40B4-BE49-F238E27FC236}">
-                <a16:creationId xmlns:a16="http://schemas.microsoft.com/office/drawing/2014/main" id="{4D06EF02-D8D4-5EFD-D7BE-7E1BBD56A4B8}"/>
-              </a:ext>
-            </a:extLst>
-          </p:cNvPr>
+            <a:endParaRPr lang="en-US" dirty="0"/>
+          </a:p>
+        </p:txBody>
+      </p:sp>
+      <p:sp>
+        <p:nvSpPr>
+          <p:cNvPr id="3" name="Date Placeholder 2"/>
           <p:cNvSpPr>
             <a:spLocks noGrp="1"/>
           </p:cNvSpPr>
@@ -1967,13 +3980,7 @@
       </p:sp>
       <p:sp>
         <p:nvSpPr>
-          <p:cNvPr id="4" name="Fußzeilenplatzhalter 3">
-            <a:extLst>
-              <a:ext uri="{FF2B5EF4-FFF2-40B4-BE49-F238E27FC236}">
-                <a16:creationId xmlns:a16="http://schemas.microsoft.com/office/drawing/2014/main" id="{18BF18BD-FDB3-F309-338C-BE4DAEDB2F86}"/>
-              </a:ext>
-            </a:extLst>
-          </p:cNvPr>
+          <p:cNvPr id="4" name="Footer Placeholder 3"/>
           <p:cNvSpPr>
             <a:spLocks noGrp="1"/>
           </p:cNvSpPr>
@@ -1992,13 +3999,7 @@
       </p:sp>
       <p:sp>
         <p:nvSpPr>
-          <p:cNvPr id="5" name="Foliennummernplatzhalter 4">
-            <a:extLst>
-              <a:ext uri="{FF2B5EF4-FFF2-40B4-BE49-F238E27FC236}">
-                <a16:creationId xmlns:a16="http://schemas.microsoft.com/office/drawing/2014/main" id="{287C1CD4-63C5-562F-B04A-3CA440BFABCE}"/>
-              </a:ext>
-            </a:extLst>
-          </p:cNvPr>
+          <p:cNvPr id="5" name="Slide Number Placeholder 4"/>
           <p:cNvSpPr>
             <a:spLocks noGrp="1"/>
           </p:cNvSpPr>
@@ -2022,7 +4023,7 @@
     </p:spTree>
     <p:extLst>
       <p:ext uri="{BB962C8B-B14F-4D97-AF65-F5344CB8AC3E}">
-        <p14:creationId xmlns:p14="http://schemas.microsoft.com/office/powerpoint/2010/main" val="3854725076"/>
+        <p14:creationId xmlns:p14="http://schemas.microsoft.com/office/powerpoint/2010/main" val="2725609758"/>
       </p:ext>
     </p:extLst>
   </p:cSld>
@@ -2051,13 +4052,7 @@
       </p:grpSpPr>
       <p:sp>
         <p:nvSpPr>
-          <p:cNvPr id="2" name="Datumsplatzhalter 1">
-            <a:extLst>
-              <a:ext uri="{FF2B5EF4-FFF2-40B4-BE49-F238E27FC236}">
-                <a16:creationId xmlns:a16="http://schemas.microsoft.com/office/drawing/2014/main" id="{5FC43E06-6384-7DA1-ADC6-3C76213B0964}"/>
-              </a:ext>
-            </a:extLst>
-          </p:cNvPr>
+          <p:cNvPr id="2" name="Date Placeholder 1"/>
           <p:cNvSpPr>
             <a:spLocks noGrp="1"/>
           </p:cNvSpPr>
@@ -2080,13 +4075,7 @@
       </p:sp>
       <p:sp>
         <p:nvSpPr>
-          <p:cNvPr id="3" name="Fußzeilenplatzhalter 2">
-            <a:extLst>
-              <a:ext uri="{FF2B5EF4-FFF2-40B4-BE49-F238E27FC236}">
-                <a16:creationId xmlns:a16="http://schemas.microsoft.com/office/drawing/2014/main" id="{BBFD25F3-2CE2-BB99-6109-982EA15C2D46}"/>
-              </a:ext>
-            </a:extLst>
-          </p:cNvPr>
+          <p:cNvPr id="3" name="Footer Placeholder 2"/>
           <p:cNvSpPr>
             <a:spLocks noGrp="1"/>
           </p:cNvSpPr>
@@ -2105,13 +4094,7 @@
       </p:sp>
       <p:sp>
         <p:nvSpPr>
-          <p:cNvPr id="4" name="Foliennummernplatzhalter 3">
-            <a:extLst>
-              <a:ext uri="{FF2B5EF4-FFF2-40B4-BE49-F238E27FC236}">
-                <a16:creationId xmlns:a16="http://schemas.microsoft.com/office/drawing/2014/main" id="{7F9E53E0-8B37-33CA-F155-368E6D1337A8}"/>
-              </a:ext>
-            </a:extLst>
-          </p:cNvPr>
+          <p:cNvPr id="4" name="Slide Number Placeholder 3"/>
           <p:cNvSpPr>
             <a:spLocks noGrp="1"/>
           </p:cNvSpPr>
@@ -2135,7 +4118,7 @@
     </p:spTree>
     <p:extLst>
       <p:ext uri="{BB962C8B-B14F-4D97-AF65-F5344CB8AC3E}">
-        <p14:creationId xmlns:p14="http://schemas.microsoft.com/office/powerpoint/2010/main" val="379529207"/>
+        <p14:creationId xmlns:p14="http://schemas.microsoft.com/office/powerpoint/2010/main" val="714266072"/>
       </p:ext>
     </p:extLst>
   </p:cSld>
@@ -2164,13 +4147,7 @@
       </p:grpSpPr>
       <p:sp>
         <p:nvSpPr>
-          <p:cNvPr id="2" name="Titel 1">
-            <a:extLst>
-              <a:ext uri="{FF2B5EF4-FFF2-40B4-BE49-F238E27FC236}">
-                <a16:creationId xmlns:a16="http://schemas.microsoft.com/office/drawing/2014/main" id="{84C44894-163B-75F7-C113-0250B64060AA}"/>
-              </a:ext>
-            </a:extLst>
-          </p:cNvPr>
+          <p:cNvPr id="2" name="Title 1"/>
           <p:cNvSpPr>
             <a:spLocks noGrp="1"/>
           </p:cNvSpPr>
@@ -2180,15 +4157,17 @@
         </p:nvSpPr>
         <p:spPr>
           <a:xfrm>
-            <a:off x="839788" y="457200"/>
-            <a:ext cx="3932237" cy="1600200"/>
+            <a:off x="677334" y="1498604"/>
+            <a:ext cx="3854528" cy="1278466"/>
           </a:xfrm>
         </p:spPr>
         <p:txBody>
-          <a:bodyPr anchor="b"/>
+          <a:bodyPr anchor="b">
+            <a:normAutofit/>
+          </a:bodyPr>
           <a:lstStyle>
             <a:lvl1pPr>
-              <a:defRPr sz="3200"/>
+              <a:defRPr sz="2000"/>
             </a:lvl1pPr>
           </a:lstStyle>
           <a:p>
@@ -2196,18 +4175,13 @@
               <a:rPr lang="de-DE"/>
               <a:t>Mastertitelformat bearbeiten</a:t>
             </a:r>
-          </a:p>
-        </p:txBody>
-      </p:sp>
-      <p:sp>
-        <p:nvSpPr>
-          <p:cNvPr id="3" name="Inhaltsplatzhalter 2">
-            <a:extLst>
-              <a:ext uri="{FF2B5EF4-FFF2-40B4-BE49-F238E27FC236}">
-                <a16:creationId xmlns:a16="http://schemas.microsoft.com/office/drawing/2014/main" id="{F8EBE53C-577C-3529-53A6-939F0CB9CB06}"/>
-              </a:ext>
-            </a:extLst>
-          </p:cNvPr>
+            <a:endParaRPr lang="en-US" dirty="0"/>
+          </a:p>
+        </p:txBody>
+      </p:sp>
+      <p:sp>
+        <p:nvSpPr>
+          <p:cNvPr id="3" name="Content Placeholder 2"/>
           <p:cNvSpPr>
             <a:spLocks noGrp="1"/>
           </p:cNvSpPr>
@@ -2217,41 +4191,15 @@
         </p:nvSpPr>
         <p:spPr>
           <a:xfrm>
-            <a:off x="5183188" y="987425"/>
-            <a:ext cx="6172200" cy="4873625"/>
+            <a:off x="4760461" y="514924"/>
+            <a:ext cx="4513541" cy="5526437"/>
           </a:xfrm>
         </p:spPr>
         <p:txBody>
-          <a:bodyPr/>
-          <a:lstStyle>
-            <a:lvl1pPr>
-              <a:defRPr sz="3200"/>
-            </a:lvl1pPr>
-            <a:lvl2pPr>
-              <a:defRPr sz="2800"/>
-            </a:lvl2pPr>
-            <a:lvl3pPr>
-              <a:defRPr sz="2400"/>
-            </a:lvl3pPr>
-            <a:lvl4pPr>
-              <a:defRPr sz="2000"/>
-            </a:lvl4pPr>
-            <a:lvl5pPr>
-              <a:defRPr sz="2000"/>
-            </a:lvl5pPr>
-            <a:lvl6pPr>
-              <a:defRPr sz="2000"/>
-            </a:lvl6pPr>
-            <a:lvl7pPr>
-              <a:defRPr sz="2000"/>
-            </a:lvl7pPr>
-            <a:lvl8pPr>
-              <a:defRPr sz="2000"/>
-            </a:lvl8pPr>
-            <a:lvl9pPr>
-              <a:defRPr sz="2000"/>
-            </a:lvl9pPr>
-          </a:lstStyle>
+          <a:bodyPr>
+            <a:normAutofit/>
+          </a:bodyPr>
+          <a:lstStyle/>
           <a:p>
             <a:pPr lvl="0"/>
             <a:r>
@@ -2286,18 +4234,13 @@
               <a:rPr lang="de-DE"/>
               <a:t>Fünfte Ebene</a:t>
             </a:r>
-          </a:p>
-        </p:txBody>
-      </p:sp>
-      <p:sp>
-        <p:nvSpPr>
-          <p:cNvPr id="4" name="Textplatzhalter 3">
-            <a:extLst>
-              <a:ext uri="{FF2B5EF4-FFF2-40B4-BE49-F238E27FC236}">
-                <a16:creationId xmlns:a16="http://schemas.microsoft.com/office/drawing/2014/main" id="{62C1F26E-71DD-3E62-162F-644C2E0D72CD}"/>
-              </a:ext>
-            </a:extLst>
-          </p:cNvPr>
+            <a:endParaRPr lang="en-US" dirty="0"/>
+          </a:p>
+        </p:txBody>
+      </p:sp>
+      <p:sp>
+        <p:nvSpPr>
+          <p:cNvPr id="4" name="Text Placeholder 3"/>
           <p:cNvSpPr>
             <a:spLocks noGrp="1"/>
           </p:cNvSpPr>
@@ -2307,46 +4250,48 @@
         </p:nvSpPr>
         <p:spPr>
           <a:xfrm>
-            <a:off x="839788" y="2057400"/>
-            <a:ext cx="3932237" cy="3811588"/>
+            <a:off x="677334" y="2777069"/>
+            <a:ext cx="3854528" cy="2584449"/>
           </a:xfrm>
         </p:spPr>
         <p:txBody>
-          <a:bodyPr/>
+          <a:bodyPr>
+            <a:normAutofit/>
+          </a:bodyPr>
           <a:lstStyle>
             <a:lvl1pPr marL="0" indent="0">
               <a:buNone/>
-              <a:defRPr sz="1600"/>
+              <a:defRPr sz="1400"/>
             </a:lvl1pPr>
-            <a:lvl2pPr marL="457200" indent="0">
+            <a:lvl2pPr marL="457063" indent="0">
               <a:buNone/>
               <a:defRPr sz="1400"/>
             </a:lvl2pPr>
-            <a:lvl3pPr marL="914400" indent="0">
+            <a:lvl3pPr marL="914126" indent="0">
               <a:buNone/>
               <a:defRPr sz="1200"/>
             </a:lvl3pPr>
-            <a:lvl4pPr marL="1371600" indent="0">
+            <a:lvl4pPr marL="1371189" indent="0">
               <a:buNone/>
               <a:defRPr sz="1000"/>
             </a:lvl4pPr>
-            <a:lvl5pPr marL="1828800" indent="0">
+            <a:lvl5pPr marL="1828251" indent="0">
               <a:buNone/>
               <a:defRPr sz="1000"/>
             </a:lvl5pPr>
-            <a:lvl6pPr marL="2286000" indent="0">
+            <a:lvl6pPr marL="2285314" indent="0">
               <a:buNone/>
               <a:defRPr sz="1000"/>
             </a:lvl6pPr>
-            <a:lvl7pPr marL="2743200" indent="0">
+            <a:lvl7pPr marL="2742377" indent="0">
               <a:buNone/>
               <a:defRPr sz="1000"/>
             </a:lvl7pPr>
-            <a:lvl8pPr marL="3200400" indent="0">
+            <a:lvl8pPr marL="3199440" indent="0">
               <a:buNone/>
               <a:defRPr sz="1000"/>
             </a:lvl8pPr>
-            <a:lvl9pPr marL="3657600" indent="0">
+            <a:lvl9pPr marL="3656503" indent="0">
               <a:buNone/>
               <a:defRPr sz="1000"/>
             </a:lvl9pPr>
@@ -2362,13 +4307,7 @@
       </p:sp>
       <p:sp>
         <p:nvSpPr>
-          <p:cNvPr id="5" name="Datumsplatzhalter 4">
-            <a:extLst>
-              <a:ext uri="{FF2B5EF4-FFF2-40B4-BE49-F238E27FC236}">
-                <a16:creationId xmlns:a16="http://schemas.microsoft.com/office/drawing/2014/main" id="{0BE33E40-7FCF-A67D-B8F8-49087EA5C7E8}"/>
-              </a:ext>
-            </a:extLst>
-          </p:cNvPr>
+          <p:cNvPr id="5" name="Date Placeholder 4"/>
           <p:cNvSpPr>
             <a:spLocks noGrp="1"/>
           </p:cNvSpPr>
@@ -2391,13 +4330,7 @@
       </p:sp>
       <p:sp>
         <p:nvSpPr>
-          <p:cNvPr id="6" name="Fußzeilenplatzhalter 5">
-            <a:extLst>
-              <a:ext uri="{FF2B5EF4-FFF2-40B4-BE49-F238E27FC236}">
-                <a16:creationId xmlns:a16="http://schemas.microsoft.com/office/drawing/2014/main" id="{8C45E56F-9049-8B6B-1236-B2D9C48DD5BB}"/>
-              </a:ext>
-            </a:extLst>
-          </p:cNvPr>
+          <p:cNvPr id="6" name="Footer Placeholder 5"/>
           <p:cNvSpPr>
             <a:spLocks noGrp="1"/>
           </p:cNvSpPr>
@@ -2416,13 +4349,7 @@
       </p:sp>
       <p:sp>
         <p:nvSpPr>
-          <p:cNvPr id="7" name="Foliennummernplatzhalter 6">
-            <a:extLst>
-              <a:ext uri="{FF2B5EF4-FFF2-40B4-BE49-F238E27FC236}">
-                <a16:creationId xmlns:a16="http://schemas.microsoft.com/office/drawing/2014/main" id="{7C0F70F6-A3E3-A517-8489-4788E0105E14}"/>
-              </a:ext>
-            </a:extLst>
-          </p:cNvPr>
+          <p:cNvPr id="7" name="Slide Number Placeholder 6"/>
           <p:cNvSpPr>
             <a:spLocks noGrp="1"/>
           </p:cNvSpPr>
@@ -2446,7 +4373,7 @@
     </p:spTree>
     <p:extLst>
       <p:ext uri="{BB962C8B-B14F-4D97-AF65-F5344CB8AC3E}">
-        <p14:creationId xmlns:p14="http://schemas.microsoft.com/office/powerpoint/2010/main" val="1153254633"/>
+        <p14:creationId xmlns:p14="http://schemas.microsoft.com/office/powerpoint/2010/main" val="2528878365"/>
       </p:ext>
     </p:extLst>
   </p:cSld>
@@ -2475,13 +4402,7 @@
       </p:grpSpPr>
       <p:sp>
         <p:nvSpPr>
-          <p:cNvPr id="2" name="Titel 1">
-            <a:extLst>
-              <a:ext uri="{FF2B5EF4-FFF2-40B4-BE49-F238E27FC236}">
-                <a16:creationId xmlns:a16="http://schemas.microsoft.com/office/drawing/2014/main" id="{B43CBCB1-9528-08D7-46F6-832C5D3BDDBF}"/>
-              </a:ext>
-            </a:extLst>
-          </p:cNvPr>
+          <p:cNvPr id="2" name="Title 1"/>
           <p:cNvSpPr>
             <a:spLocks noGrp="1"/>
           </p:cNvSpPr>
@@ -2491,15 +4412,17 @@
         </p:nvSpPr>
         <p:spPr>
           <a:xfrm>
-            <a:off x="839788" y="457200"/>
-            <a:ext cx="3932237" cy="1600200"/>
+            <a:off x="677334" y="4800600"/>
+            <a:ext cx="8596667" cy="566738"/>
           </a:xfrm>
         </p:spPr>
         <p:txBody>
-          <a:bodyPr anchor="b"/>
+          <a:bodyPr anchor="b">
+            <a:normAutofit/>
+          </a:bodyPr>
           <a:lstStyle>
-            <a:lvl1pPr>
-              <a:defRPr sz="3200"/>
+            <a:lvl1pPr algn="l">
+              <a:defRPr sz="2400" b="0"/>
             </a:lvl1pPr>
           </a:lstStyle>
           <a:p>
@@ -2507,20 +4430,15 @@
               <a:rPr lang="de-DE"/>
               <a:t>Mastertitelformat bearbeiten</a:t>
             </a:r>
-          </a:p>
-        </p:txBody>
-      </p:sp>
-      <p:sp>
-        <p:nvSpPr>
-          <p:cNvPr id="3" name="Bildplatzhalter 2">
-            <a:extLst>
-              <a:ext uri="{FF2B5EF4-FFF2-40B4-BE49-F238E27FC236}">
-                <a16:creationId xmlns:a16="http://schemas.microsoft.com/office/drawing/2014/main" id="{D9562805-BD72-928B-6164-0806039C158D}"/>
-              </a:ext>
-            </a:extLst>
-          </p:cNvPr>
-          <p:cNvSpPr>
-            <a:spLocks noGrp="1"/>
+            <a:endParaRPr lang="en-US" dirty="0"/>
+          </a:p>
+        </p:txBody>
+      </p:sp>
+      <p:sp>
+        <p:nvSpPr>
+          <p:cNvPr id="3" name="Picture Placeholder 2"/>
+          <p:cNvSpPr>
+            <a:spLocks noGrp="1" noChangeAspect="1"/>
           </p:cNvSpPr>
           <p:nvPr>
             <p:ph type="pic" idx="1"/>
@@ -2528,118 +4446,120 @@
         </p:nvSpPr>
         <p:spPr>
           <a:xfrm>
-            <a:off x="5183188" y="987425"/>
-            <a:ext cx="6172200" cy="4873625"/>
+            <a:off x="677334" y="609600"/>
+            <a:ext cx="8596668" cy="3845718"/>
           </a:xfrm>
         </p:spPr>
         <p:txBody>
-          <a:bodyPr/>
+          <a:bodyPr anchor="t">
+            <a:normAutofit/>
+          </a:bodyPr>
           <a:lstStyle>
-            <a:lvl1pPr marL="0" indent="0">
-              <a:buNone/>
-              <a:defRPr sz="3200"/>
-            </a:lvl1pPr>
-            <a:lvl2pPr marL="457200" indent="0">
-              <a:buNone/>
-              <a:defRPr sz="2800"/>
-            </a:lvl2pPr>
-            <a:lvl3pPr marL="914400" indent="0">
-              <a:buNone/>
-              <a:defRPr sz="2400"/>
-            </a:lvl3pPr>
-            <a:lvl4pPr marL="1371600" indent="0">
-              <a:buNone/>
-              <a:defRPr sz="2000"/>
-            </a:lvl4pPr>
-            <a:lvl5pPr marL="1828800" indent="0">
-              <a:buNone/>
-              <a:defRPr sz="2000"/>
-            </a:lvl5pPr>
-            <a:lvl6pPr marL="2286000" indent="0">
-              <a:buNone/>
-              <a:defRPr sz="2000"/>
-            </a:lvl6pPr>
-            <a:lvl7pPr marL="2743200" indent="0">
-              <a:buNone/>
-              <a:defRPr sz="2000"/>
-            </a:lvl7pPr>
-            <a:lvl8pPr marL="3200400" indent="0">
-              <a:buNone/>
-              <a:defRPr sz="2000"/>
-            </a:lvl8pPr>
-            <a:lvl9pPr marL="3657600" indent="0">
-              <a:buNone/>
-              <a:defRPr sz="2000"/>
-            </a:lvl9pPr>
-          </a:lstStyle>
-          <a:p>
-            <a:endParaRPr lang="de-DE"/>
-          </a:p>
-        </p:txBody>
-      </p:sp>
-      <p:sp>
-        <p:nvSpPr>
-          <p:cNvPr id="4" name="Textplatzhalter 3">
-            <a:extLst>
-              <a:ext uri="{FF2B5EF4-FFF2-40B4-BE49-F238E27FC236}">
-                <a16:creationId xmlns:a16="http://schemas.microsoft.com/office/drawing/2014/main" id="{2F722660-3708-1748-35DE-EB1929FA94AD}"/>
-              </a:ext>
-            </a:extLst>
-          </p:cNvPr>
-          <p:cNvSpPr>
-            <a:spLocks noGrp="1"/>
-          </p:cNvSpPr>
-          <p:nvPr>
-            <p:ph type="body" sz="half" idx="2"/>
-          </p:nvPr>
-        </p:nvSpPr>
-        <p:spPr>
-          <a:xfrm>
-            <a:off x="839788" y="2057400"/>
-            <a:ext cx="3932237" cy="3811588"/>
-          </a:xfrm>
-        </p:spPr>
-        <p:txBody>
-          <a:bodyPr/>
-          <a:lstStyle>
-            <a:lvl1pPr marL="0" indent="0">
+            <a:lvl1pPr marL="0" indent="0" algn="ctr">
               <a:buNone/>
               <a:defRPr sz="1600"/>
             </a:lvl1pPr>
             <a:lvl2pPr marL="457200" indent="0">
               <a:buNone/>
-              <a:defRPr sz="1400"/>
+              <a:defRPr sz="1600"/>
             </a:lvl2pPr>
             <a:lvl3pPr marL="914400" indent="0">
               <a:buNone/>
-              <a:defRPr sz="1200"/>
+              <a:defRPr sz="1600"/>
             </a:lvl3pPr>
             <a:lvl4pPr marL="1371600" indent="0">
               <a:buNone/>
-              <a:defRPr sz="1000"/>
+              <a:defRPr sz="1600"/>
             </a:lvl4pPr>
             <a:lvl5pPr marL="1828800" indent="0">
               <a:buNone/>
-              <a:defRPr sz="1000"/>
+              <a:defRPr sz="1600"/>
             </a:lvl5pPr>
             <a:lvl6pPr marL="2286000" indent="0">
               <a:buNone/>
-              <a:defRPr sz="1000"/>
+              <a:defRPr sz="1600"/>
             </a:lvl6pPr>
             <a:lvl7pPr marL="2743200" indent="0">
               <a:buNone/>
-              <a:defRPr sz="1000"/>
+              <a:defRPr sz="1600"/>
             </a:lvl7pPr>
             <a:lvl8pPr marL="3200400" indent="0">
               <a:buNone/>
-              <a:defRPr sz="1000"/>
+              <a:defRPr sz="1600"/>
             </a:lvl8pPr>
             <a:lvl9pPr marL="3657600" indent="0">
               <a:buNone/>
-              <a:defRPr sz="1000"/>
+              <a:defRPr sz="1600"/>
             </a:lvl9pPr>
           </a:lstStyle>
           <a:p>
+            <a:r>
+              <a:rPr lang="de-DE"/>
+              <a:t>Bild durch Klicken auf Symbol hinzufügen</a:t>
+            </a:r>
+            <a:endParaRPr lang="en-US" dirty="0"/>
+          </a:p>
+        </p:txBody>
+      </p:sp>
+      <p:sp>
+        <p:nvSpPr>
+          <p:cNvPr id="4" name="Text Placeholder 3"/>
+          <p:cNvSpPr>
+            <a:spLocks noGrp="1"/>
+          </p:cNvSpPr>
+          <p:nvPr>
+            <p:ph type="body" sz="half" idx="2"/>
+          </p:nvPr>
+        </p:nvSpPr>
+        <p:spPr>
+          <a:xfrm>
+            <a:off x="677334" y="5367338"/>
+            <a:ext cx="8596667" cy="674024"/>
+          </a:xfrm>
+        </p:spPr>
+        <p:txBody>
+          <a:bodyPr>
+            <a:normAutofit/>
+          </a:bodyPr>
+          <a:lstStyle>
+            <a:lvl1pPr marL="0" indent="0">
+              <a:buNone/>
+              <a:defRPr sz="1200"/>
+            </a:lvl1pPr>
+            <a:lvl2pPr marL="457200" indent="0">
+              <a:buNone/>
+              <a:defRPr sz="1200"/>
+            </a:lvl2pPr>
+            <a:lvl3pPr marL="914400" indent="0">
+              <a:buNone/>
+              <a:defRPr sz="1000"/>
+            </a:lvl3pPr>
+            <a:lvl4pPr marL="1371600" indent="0">
+              <a:buNone/>
+              <a:defRPr sz="900"/>
+            </a:lvl4pPr>
+            <a:lvl5pPr marL="1828800" indent="0">
+              <a:buNone/>
+              <a:defRPr sz="900"/>
+            </a:lvl5pPr>
+            <a:lvl6pPr marL="2286000" indent="0">
+              <a:buNone/>
+              <a:defRPr sz="900"/>
+            </a:lvl6pPr>
+            <a:lvl7pPr marL="2743200" indent="0">
+              <a:buNone/>
+              <a:defRPr sz="900"/>
+            </a:lvl7pPr>
+            <a:lvl8pPr marL="3200400" indent="0">
+              <a:buNone/>
+              <a:defRPr sz="900"/>
+            </a:lvl8pPr>
+            <a:lvl9pPr marL="3657600" indent="0">
+              <a:buNone/>
+              <a:defRPr sz="900"/>
+            </a:lvl9pPr>
+          </a:lstStyle>
+          <a:p>
             <a:pPr lvl="0"/>
             <a:r>
               <a:rPr lang="de-DE"/>
@@ -2650,13 +4570,49 @@
       </p:sp>
       <p:sp>
         <p:nvSpPr>
-          <p:cNvPr id="5" name="Datumsplatzhalter 4">
-            <a:extLst>
-              <a:ext uri="{FF2B5EF4-FFF2-40B4-BE49-F238E27FC236}">
-                <a16:creationId xmlns:a16="http://schemas.microsoft.com/office/drawing/2014/main" id="{EABEB59B-2947-220F-3A03-4DB5AA77C03D}"/>
-              </a:ext>
-            </a:extLst>
-          </p:cNvPr>
+          <p:cNvPr id="6" name="Footer Placeholder 5"/>
+          <p:cNvSpPr>
+            <a:spLocks noGrp="1"/>
+          </p:cNvSpPr>
+          <p:nvPr>
+            <p:ph type="ftr" sz="quarter" idx="11"/>
+          </p:nvPr>
+        </p:nvSpPr>
+        <p:spPr/>
+        <p:txBody>
+          <a:bodyPr/>
+          <a:lstStyle/>
+          <a:p>
+            <a:endParaRPr lang="de-DE"/>
+          </a:p>
+        </p:txBody>
+      </p:sp>
+      <p:sp>
+        <p:nvSpPr>
+          <p:cNvPr id="7" name="Slide Number Placeholder 6"/>
+          <p:cNvSpPr>
+            <a:spLocks noGrp="1"/>
+          </p:cNvSpPr>
+          <p:nvPr>
+            <p:ph type="sldNum" sz="quarter" idx="12"/>
+          </p:nvPr>
+        </p:nvSpPr>
+        <p:spPr/>
+        <p:txBody>
+          <a:bodyPr/>
+          <a:lstStyle/>
+          <a:p>
+            <a:fld id="{1E23243E-BFCE-4DFA-B66C-083958A49FEF}" type="slidenum">
+              <a:rPr lang="de-DE" smtClean="0"/>
+              <a:t>‹Nr.›</a:t>
+            </a:fld>
+            <a:endParaRPr lang="de-DE"/>
+          </a:p>
+        </p:txBody>
+      </p:sp>
+      <p:sp>
+        <p:nvSpPr>
+          <p:cNvPr id="5" name="Date Placeholder 4"/>
           <p:cNvSpPr>
             <a:spLocks noGrp="1"/>
           </p:cNvSpPr>
@@ -2677,64 +4633,10 @@
           </a:p>
         </p:txBody>
       </p:sp>
-      <p:sp>
-        <p:nvSpPr>
-          <p:cNvPr id="6" name="Fußzeilenplatzhalter 5">
-            <a:extLst>
-              <a:ext uri="{FF2B5EF4-FFF2-40B4-BE49-F238E27FC236}">
-                <a16:creationId xmlns:a16="http://schemas.microsoft.com/office/drawing/2014/main" id="{9C183BD1-B8B9-A2D6-B0BB-E019122BD6AB}"/>
-              </a:ext>
-            </a:extLst>
-          </p:cNvPr>
-          <p:cNvSpPr>
-            <a:spLocks noGrp="1"/>
-          </p:cNvSpPr>
-          <p:nvPr>
-            <p:ph type="ftr" sz="quarter" idx="11"/>
-          </p:nvPr>
-        </p:nvSpPr>
-        <p:spPr/>
-        <p:txBody>
-          <a:bodyPr/>
-          <a:lstStyle/>
-          <a:p>
-            <a:endParaRPr lang="de-DE"/>
-          </a:p>
-        </p:txBody>
-      </p:sp>
-      <p:sp>
-        <p:nvSpPr>
-          <p:cNvPr id="7" name="Foliennummernplatzhalter 6">
-            <a:extLst>
-              <a:ext uri="{FF2B5EF4-FFF2-40B4-BE49-F238E27FC236}">
-                <a16:creationId xmlns:a16="http://schemas.microsoft.com/office/drawing/2014/main" id="{010BA5B0-1A89-8E0A-50DD-29E51C98C3B3}"/>
-              </a:ext>
-            </a:extLst>
-          </p:cNvPr>
-          <p:cNvSpPr>
-            <a:spLocks noGrp="1"/>
-          </p:cNvSpPr>
-          <p:nvPr>
-            <p:ph type="sldNum" sz="quarter" idx="12"/>
-          </p:nvPr>
-        </p:nvSpPr>
-        <p:spPr/>
-        <p:txBody>
-          <a:bodyPr/>
-          <a:lstStyle/>
-          <a:p>
-            <a:fld id="{1E23243E-BFCE-4DFA-B66C-083958A49FEF}" type="slidenum">
-              <a:rPr lang="de-DE" smtClean="0"/>
-              <a:t>‹Nr.›</a:t>
-            </a:fld>
-            <a:endParaRPr lang="de-DE"/>
-          </a:p>
-        </p:txBody>
-      </p:sp>
     </p:spTree>
     <p:extLst>
       <p:ext uri="{BB962C8B-B14F-4D97-AF65-F5344CB8AC3E}">
-        <p14:creationId xmlns:p14="http://schemas.microsoft.com/office/powerpoint/2010/main" val="1243806959"/>
+        <p14:creationId xmlns:p14="http://schemas.microsoft.com/office/powerpoint/2010/main" val="1023001784"/>
       </p:ext>
     </p:extLst>
   </p:cSld>
@@ -2766,15 +4668,540 @@
           <a:chExt cx="0" cy="0"/>
         </a:xfrm>
       </p:grpSpPr>
-      <p:sp>
-        <p:nvSpPr>
-          <p:cNvPr id="2" name="Titelplatzhalter 1">
-            <a:extLst>
-              <a:ext uri="{FF2B5EF4-FFF2-40B4-BE49-F238E27FC236}">
-                <a16:creationId xmlns:a16="http://schemas.microsoft.com/office/drawing/2014/main" id="{88CF379E-34EA-7E57-B155-36FE37A822E3}"/>
-              </a:ext>
-            </a:extLst>
-          </p:cNvPr>
+      <p:grpSp>
+        <p:nvGrpSpPr>
+          <p:cNvPr id="44" name="Group 43"/>
+          <p:cNvGrpSpPr/>
+          <p:nvPr/>
+        </p:nvGrpSpPr>
+        <p:grpSpPr>
+          <a:xfrm>
+            <a:off x="0" y="-8467"/>
+            <a:ext cx="12192000" cy="6866467"/>
+            <a:chOff x="0" y="-8467"/>
+            <a:chExt cx="12192000" cy="6866467"/>
+          </a:xfrm>
+        </p:grpSpPr>
+        <p:cxnSp>
+          <p:nvCxnSpPr>
+            <p:cNvPr id="20" name="Straight Connector 19"/>
+            <p:cNvCxnSpPr/>
+            <p:nvPr/>
+          </p:nvCxnSpPr>
+          <p:spPr>
+            <a:xfrm>
+              <a:off x="9371012" y="0"/>
+              <a:ext cx="1219200" cy="6858000"/>
+            </a:xfrm>
+            <a:prstGeom prst="line">
+              <a:avLst/>
+            </a:prstGeom>
+            <a:ln w="9525">
+              <a:solidFill>
+                <a:schemeClr val="accent1">
+                  <a:alpha val="70000"/>
+                </a:schemeClr>
+              </a:solidFill>
+            </a:ln>
+          </p:spPr>
+          <p:style>
+            <a:lnRef idx="2">
+              <a:schemeClr val="accent1"/>
+            </a:lnRef>
+            <a:fillRef idx="0">
+              <a:schemeClr val="accent1"/>
+            </a:fillRef>
+            <a:effectRef idx="1">
+              <a:schemeClr val="accent1"/>
+            </a:effectRef>
+            <a:fontRef idx="minor">
+              <a:schemeClr val="tx1"/>
+            </a:fontRef>
+          </p:style>
+        </p:cxnSp>
+        <p:cxnSp>
+          <p:nvCxnSpPr>
+            <p:cNvPr id="21" name="Straight Connector 20"/>
+            <p:cNvCxnSpPr/>
+            <p:nvPr/>
+          </p:nvCxnSpPr>
+          <p:spPr>
+            <a:xfrm flipH="1">
+              <a:off x="7425267" y="3681413"/>
+              <a:ext cx="4763558" cy="3176587"/>
+            </a:xfrm>
+            <a:prstGeom prst="line">
+              <a:avLst/>
+            </a:prstGeom>
+            <a:ln w="9525">
+              <a:solidFill>
+                <a:schemeClr val="accent1">
+                  <a:alpha val="70000"/>
+                </a:schemeClr>
+              </a:solidFill>
+            </a:ln>
+          </p:spPr>
+          <p:style>
+            <a:lnRef idx="2">
+              <a:schemeClr val="accent1"/>
+            </a:lnRef>
+            <a:fillRef idx="0">
+              <a:schemeClr val="accent1"/>
+            </a:fillRef>
+            <a:effectRef idx="1">
+              <a:schemeClr val="accent1"/>
+            </a:effectRef>
+            <a:fontRef idx="minor">
+              <a:schemeClr val="tx1"/>
+            </a:fontRef>
+          </p:style>
+        </p:cxnSp>
+        <p:sp>
+          <p:nvSpPr>
+            <p:cNvPr id="22" name="Rectangle 23"/>
+            <p:cNvSpPr/>
+            <p:nvPr/>
+          </p:nvSpPr>
+          <p:spPr>
+            <a:xfrm>
+              <a:off x="9181476" y="-8467"/>
+              <a:ext cx="3007349" cy="6866467"/>
+            </a:xfrm>
+            <a:custGeom>
+              <a:avLst/>
+              <a:gdLst/>
+              <a:ahLst/>
+              <a:cxnLst/>
+              <a:rect l="l" t="t" r="r" b="b"/>
+              <a:pathLst>
+                <a:path w="3007349" h="6866467">
+                  <a:moveTo>
+                    <a:pt x="2045532" y="0"/>
+                  </a:moveTo>
+                  <a:lnTo>
+                    <a:pt x="3007349" y="0"/>
+                  </a:lnTo>
+                  <a:lnTo>
+                    <a:pt x="3007349" y="6866467"/>
+                  </a:lnTo>
+                  <a:lnTo>
+                    <a:pt x="0" y="6866467"/>
+                  </a:lnTo>
+                  <a:lnTo>
+                    <a:pt x="2045532" y="0"/>
+                  </a:lnTo>
+                  <a:close/>
+                </a:path>
+              </a:pathLst>
+            </a:custGeom>
+            <a:solidFill>
+              <a:schemeClr val="accent1">
+                <a:alpha val="36000"/>
+              </a:schemeClr>
+            </a:solidFill>
+            <a:ln>
+              <a:noFill/>
+            </a:ln>
+            <a:effectLst/>
+          </p:spPr>
+          <p:style>
+            <a:lnRef idx="1">
+              <a:schemeClr val="accent1"/>
+            </a:lnRef>
+            <a:fillRef idx="3">
+              <a:schemeClr val="accent1"/>
+            </a:fillRef>
+            <a:effectRef idx="2">
+              <a:schemeClr val="accent1"/>
+            </a:effectRef>
+            <a:fontRef idx="minor">
+              <a:schemeClr val="lt1"/>
+            </a:fontRef>
+          </p:style>
+        </p:sp>
+        <p:sp>
+          <p:nvSpPr>
+            <p:cNvPr id="23" name="Rectangle 25"/>
+            <p:cNvSpPr/>
+            <p:nvPr/>
+          </p:nvSpPr>
+          <p:spPr>
+            <a:xfrm>
+              <a:off x="9603442" y="-8467"/>
+              <a:ext cx="2588558" cy="6866467"/>
+            </a:xfrm>
+            <a:custGeom>
+              <a:avLst/>
+              <a:gdLst/>
+              <a:ahLst/>
+              <a:cxnLst/>
+              <a:rect l="l" t="t" r="r" b="b"/>
+              <a:pathLst>
+                <a:path w="2573311" h="6866467">
+                  <a:moveTo>
+                    <a:pt x="0" y="0"/>
+                  </a:moveTo>
+                  <a:lnTo>
+                    <a:pt x="2573311" y="0"/>
+                  </a:lnTo>
+                  <a:lnTo>
+                    <a:pt x="2573311" y="6866467"/>
+                  </a:lnTo>
+                  <a:lnTo>
+                    <a:pt x="1202336" y="6866467"/>
+                  </a:lnTo>
+                  <a:lnTo>
+                    <a:pt x="0" y="0"/>
+                  </a:lnTo>
+                  <a:close/>
+                </a:path>
+              </a:pathLst>
+            </a:custGeom>
+            <a:solidFill>
+              <a:schemeClr val="accent1">
+                <a:alpha val="20000"/>
+              </a:schemeClr>
+            </a:solidFill>
+            <a:ln>
+              <a:noFill/>
+            </a:ln>
+            <a:effectLst/>
+          </p:spPr>
+          <p:style>
+            <a:lnRef idx="1">
+              <a:schemeClr val="accent1"/>
+            </a:lnRef>
+            <a:fillRef idx="3">
+              <a:schemeClr val="accent1"/>
+            </a:fillRef>
+            <a:effectRef idx="2">
+              <a:schemeClr val="accent1"/>
+            </a:effectRef>
+            <a:fontRef idx="minor">
+              <a:schemeClr val="lt1"/>
+            </a:fontRef>
+          </p:style>
+        </p:sp>
+        <p:sp>
+          <p:nvSpPr>
+            <p:cNvPr id="24" name="Isosceles Triangle 23"/>
+            <p:cNvSpPr/>
+            <p:nvPr/>
+          </p:nvSpPr>
+          <p:spPr>
+            <a:xfrm>
+              <a:off x="8932333" y="3048000"/>
+              <a:ext cx="3259667" cy="3810000"/>
+            </a:xfrm>
+            <a:prstGeom prst="triangle">
+              <a:avLst>
+                <a:gd name="adj" fmla="val 100000"/>
+              </a:avLst>
+            </a:prstGeom>
+            <a:solidFill>
+              <a:schemeClr val="accent1">
+                <a:lumMod val="75000"/>
+                <a:alpha val="66000"/>
+              </a:schemeClr>
+            </a:solidFill>
+            <a:ln>
+              <a:noFill/>
+            </a:ln>
+            <a:effectLst/>
+          </p:spPr>
+          <p:style>
+            <a:lnRef idx="1">
+              <a:schemeClr val="accent1"/>
+            </a:lnRef>
+            <a:fillRef idx="3">
+              <a:schemeClr val="accent1"/>
+            </a:fillRef>
+            <a:effectRef idx="2">
+              <a:schemeClr val="accent1"/>
+            </a:effectRef>
+            <a:fontRef idx="minor">
+              <a:schemeClr val="lt1"/>
+            </a:fontRef>
+          </p:style>
+        </p:sp>
+        <p:sp>
+          <p:nvSpPr>
+            <p:cNvPr id="25" name="Rectangle 27"/>
+            <p:cNvSpPr/>
+            <p:nvPr/>
+          </p:nvSpPr>
+          <p:spPr>
+            <a:xfrm>
+              <a:off x="9334500" y="-8467"/>
+              <a:ext cx="2854326" cy="6866467"/>
+            </a:xfrm>
+            <a:custGeom>
+              <a:avLst/>
+              <a:gdLst/>
+              <a:ahLst/>
+              <a:cxnLst/>
+              <a:rect l="l" t="t" r="r" b="b"/>
+              <a:pathLst>
+                <a:path w="2858013" h="6866467">
+                  <a:moveTo>
+                    <a:pt x="0" y="0"/>
+                  </a:moveTo>
+                  <a:lnTo>
+                    <a:pt x="2858013" y="0"/>
+                  </a:lnTo>
+                  <a:lnTo>
+                    <a:pt x="2858013" y="6866467"/>
+                  </a:lnTo>
+                  <a:lnTo>
+                    <a:pt x="2473942" y="6866467"/>
+                  </a:lnTo>
+                  <a:lnTo>
+                    <a:pt x="0" y="0"/>
+                  </a:lnTo>
+                  <a:close/>
+                </a:path>
+              </a:pathLst>
+            </a:custGeom>
+            <a:solidFill>
+              <a:schemeClr val="accent1">
+                <a:lumMod val="75000"/>
+                <a:alpha val="50000"/>
+              </a:schemeClr>
+            </a:solidFill>
+            <a:ln>
+              <a:noFill/>
+            </a:ln>
+            <a:effectLst/>
+          </p:spPr>
+          <p:style>
+            <a:lnRef idx="1">
+              <a:schemeClr val="accent1"/>
+            </a:lnRef>
+            <a:fillRef idx="3">
+              <a:schemeClr val="accent1"/>
+            </a:fillRef>
+            <a:effectRef idx="2">
+              <a:schemeClr val="accent1"/>
+            </a:effectRef>
+            <a:fontRef idx="minor">
+              <a:schemeClr val="lt1"/>
+            </a:fontRef>
+          </p:style>
+        </p:sp>
+        <p:sp>
+          <p:nvSpPr>
+            <p:cNvPr id="26" name="Rectangle 28"/>
+            <p:cNvSpPr/>
+            <p:nvPr/>
+          </p:nvSpPr>
+          <p:spPr>
+            <a:xfrm>
+              <a:off x="10898730" y="-8467"/>
+              <a:ext cx="1290094" cy="6866467"/>
+            </a:xfrm>
+            <a:custGeom>
+              <a:avLst/>
+              <a:gdLst/>
+              <a:ahLst/>
+              <a:cxnLst/>
+              <a:rect l="l" t="t" r="r" b="b"/>
+              <a:pathLst>
+                <a:path w="1290094" h="6858000">
+                  <a:moveTo>
+                    <a:pt x="1019735" y="0"/>
+                  </a:moveTo>
+                  <a:lnTo>
+                    <a:pt x="1290094" y="0"/>
+                  </a:lnTo>
+                  <a:lnTo>
+                    <a:pt x="1290094" y="6858000"/>
+                  </a:lnTo>
+                  <a:lnTo>
+                    <a:pt x="0" y="6858000"/>
+                  </a:lnTo>
+                  <a:lnTo>
+                    <a:pt x="1019735" y="0"/>
+                  </a:lnTo>
+                  <a:close/>
+                </a:path>
+              </a:pathLst>
+            </a:custGeom>
+            <a:solidFill>
+              <a:schemeClr val="accent2">
+                <a:alpha val="70000"/>
+              </a:schemeClr>
+            </a:solidFill>
+            <a:ln>
+              <a:noFill/>
+            </a:ln>
+            <a:effectLst/>
+          </p:spPr>
+          <p:style>
+            <a:lnRef idx="1">
+              <a:schemeClr val="accent1"/>
+            </a:lnRef>
+            <a:fillRef idx="3">
+              <a:schemeClr val="accent1"/>
+            </a:fillRef>
+            <a:effectRef idx="2">
+              <a:schemeClr val="accent1"/>
+            </a:effectRef>
+            <a:fontRef idx="minor">
+              <a:schemeClr val="lt1"/>
+            </a:fontRef>
+          </p:style>
+        </p:sp>
+        <p:sp>
+          <p:nvSpPr>
+            <p:cNvPr id="27" name="Rectangle 29"/>
+            <p:cNvSpPr/>
+            <p:nvPr/>
+          </p:nvSpPr>
+          <p:spPr>
+            <a:xfrm>
+              <a:off x="10938999" y="-8467"/>
+              <a:ext cx="1249825" cy="6866467"/>
+            </a:xfrm>
+            <a:custGeom>
+              <a:avLst/>
+              <a:gdLst/>
+              <a:ahLst/>
+              <a:cxnLst/>
+              <a:rect l="l" t="t" r="r" b="b"/>
+              <a:pathLst>
+                <a:path w="1249825" h="6858000">
+                  <a:moveTo>
+                    <a:pt x="0" y="0"/>
+                  </a:moveTo>
+                  <a:lnTo>
+                    <a:pt x="1249825" y="0"/>
+                  </a:lnTo>
+                  <a:lnTo>
+                    <a:pt x="1249825" y="6858000"/>
+                  </a:lnTo>
+                  <a:lnTo>
+                    <a:pt x="1109382" y="6858000"/>
+                  </a:lnTo>
+                  <a:lnTo>
+                    <a:pt x="0" y="0"/>
+                  </a:lnTo>
+                  <a:close/>
+                </a:path>
+              </a:pathLst>
+            </a:custGeom>
+            <a:solidFill>
+              <a:schemeClr val="accent2">
+                <a:lumMod val="75000"/>
+                <a:alpha val="80000"/>
+              </a:schemeClr>
+            </a:solidFill>
+            <a:ln>
+              <a:noFill/>
+            </a:ln>
+            <a:effectLst/>
+          </p:spPr>
+          <p:style>
+            <a:lnRef idx="1">
+              <a:schemeClr val="accent1"/>
+            </a:lnRef>
+            <a:fillRef idx="3">
+              <a:schemeClr val="accent1"/>
+            </a:fillRef>
+            <a:effectRef idx="2">
+              <a:schemeClr val="accent1"/>
+            </a:effectRef>
+            <a:fontRef idx="minor">
+              <a:schemeClr val="lt1"/>
+            </a:fontRef>
+          </p:style>
+        </p:sp>
+        <p:sp>
+          <p:nvSpPr>
+            <p:cNvPr id="28" name="Isosceles Triangle 27"/>
+            <p:cNvSpPr/>
+            <p:nvPr/>
+          </p:nvSpPr>
+          <p:spPr>
+            <a:xfrm>
+              <a:off x="10371666" y="3589867"/>
+              <a:ext cx="1817159" cy="3268133"/>
+            </a:xfrm>
+            <a:prstGeom prst="triangle">
+              <a:avLst>
+                <a:gd name="adj" fmla="val 100000"/>
+              </a:avLst>
+            </a:prstGeom>
+            <a:solidFill>
+              <a:schemeClr val="accent1">
+                <a:lumMod val="75000"/>
+                <a:alpha val="66000"/>
+              </a:schemeClr>
+            </a:solidFill>
+            <a:ln>
+              <a:noFill/>
+            </a:ln>
+            <a:effectLst/>
+          </p:spPr>
+          <p:style>
+            <a:lnRef idx="1">
+              <a:schemeClr val="accent1"/>
+            </a:lnRef>
+            <a:fillRef idx="3">
+              <a:schemeClr val="accent1"/>
+            </a:fillRef>
+            <a:effectRef idx="2">
+              <a:schemeClr val="accent1"/>
+            </a:effectRef>
+            <a:fontRef idx="minor">
+              <a:schemeClr val="lt1"/>
+            </a:fontRef>
+          </p:style>
+        </p:sp>
+        <p:sp>
+          <p:nvSpPr>
+            <p:cNvPr id="19" name="Isosceles Triangle 18"/>
+            <p:cNvSpPr/>
+            <p:nvPr/>
+          </p:nvSpPr>
+          <p:spPr>
+            <a:xfrm>
+              <a:off x="0" y="4013200"/>
+              <a:ext cx="448733" cy="2844800"/>
+            </a:xfrm>
+            <a:prstGeom prst="triangle">
+              <a:avLst>
+                <a:gd name="adj" fmla="val 0"/>
+              </a:avLst>
+            </a:prstGeom>
+            <a:solidFill>
+              <a:schemeClr val="accent1">
+                <a:alpha val="70000"/>
+              </a:schemeClr>
+            </a:solidFill>
+            <a:ln>
+              <a:noFill/>
+            </a:ln>
+            <a:effectLst/>
+          </p:spPr>
+          <p:style>
+            <a:lnRef idx="1">
+              <a:schemeClr val="accent1"/>
+            </a:lnRef>
+            <a:fillRef idx="3">
+              <a:schemeClr val="accent1"/>
+            </a:fillRef>
+            <a:effectRef idx="2">
+              <a:schemeClr val="accent1"/>
+            </a:effectRef>
+            <a:fontRef idx="minor">
+              <a:schemeClr val="lt1"/>
+            </a:fontRef>
+          </p:style>
+        </p:sp>
+      </p:grpSp>
+      <p:sp>
+        <p:nvSpPr>
+          <p:cNvPr id="2" name="Title Placeholder 1"/>
           <p:cNvSpPr>
             <a:spLocks noGrp="1"/>
           </p:cNvSpPr>
@@ -2784,15 +5211,15 @@
         </p:nvSpPr>
         <p:spPr>
           <a:xfrm>
-            <a:off x="838200" y="365125"/>
-            <a:ext cx="10515600" cy="1325563"/>
+            <a:off x="677334" y="609600"/>
+            <a:ext cx="8596668" cy="1320800"/>
           </a:xfrm>
           <a:prstGeom prst="rect">
             <a:avLst/>
           </a:prstGeom>
         </p:spPr>
         <p:txBody>
-          <a:bodyPr vert="horz" lIns="91440" tIns="45720" rIns="91440" bIns="45720" rtlCol="0" anchor="ctr">
+          <a:bodyPr vert="horz" lIns="91440" tIns="45720" rIns="91440" bIns="45720" rtlCol="0" anchor="t">
             <a:normAutofit/>
           </a:bodyPr>
           <a:lstStyle/>
@@ -2801,18 +5228,13 @@
               <a:rPr lang="de-DE"/>
               <a:t>Mastertitelformat bearbeiten</a:t>
             </a:r>
-          </a:p>
-        </p:txBody>
-      </p:sp>
-      <p:sp>
-        <p:nvSpPr>
-          <p:cNvPr id="3" name="Textplatzhalter 2">
-            <a:extLst>
-              <a:ext uri="{FF2B5EF4-FFF2-40B4-BE49-F238E27FC236}">
-                <a16:creationId xmlns:a16="http://schemas.microsoft.com/office/drawing/2014/main" id="{37B0A9A9-AEB5-863A-4F2B-326B449DF8E6}"/>
-              </a:ext>
-            </a:extLst>
-          </p:cNvPr>
+            <a:endParaRPr lang="en-US" dirty="0"/>
+          </a:p>
+        </p:txBody>
+      </p:sp>
+      <p:sp>
+        <p:nvSpPr>
+          <p:cNvPr id="3" name="Text Placeholder 2"/>
           <p:cNvSpPr>
             <a:spLocks noGrp="1"/>
           </p:cNvSpPr>
@@ -2822,8 +5244,8 @@
         </p:nvSpPr>
         <p:spPr>
           <a:xfrm>
-            <a:off x="838200" y="1825625"/>
-            <a:ext cx="10515600" cy="4351338"/>
+            <a:off x="677334" y="2160589"/>
+            <a:ext cx="8596668" cy="3880773"/>
           </a:xfrm>
           <a:prstGeom prst="rect">
             <a:avLst/>
@@ -2868,18 +5290,13 @@
               <a:rPr lang="de-DE"/>
               <a:t>Fünfte Ebene</a:t>
             </a:r>
-          </a:p>
-        </p:txBody>
-      </p:sp>
-      <p:sp>
-        <p:nvSpPr>
-          <p:cNvPr id="4" name="Datumsplatzhalter 3">
-            <a:extLst>
-              <a:ext uri="{FF2B5EF4-FFF2-40B4-BE49-F238E27FC236}">
-                <a16:creationId xmlns:a16="http://schemas.microsoft.com/office/drawing/2014/main" id="{C0D9A03F-0E82-9EAF-A6C2-BE262393047F}"/>
-              </a:ext>
-            </a:extLst>
-          </p:cNvPr>
+            <a:endParaRPr lang="en-US" dirty="0"/>
+          </a:p>
+        </p:txBody>
+      </p:sp>
+      <p:sp>
+        <p:nvSpPr>
+          <p:cNvPr id="4" name="Date Placeholder 3"/>
           <p:cNvSpPr>
             <a:spLocks noGrp="1"/>
           </p:cNvSpPr>
@@ -2889,8 +5306,8 @@
         </p:nvSpPr>
         <p:spPr>
           <a:xfrm>
-            <a:off x="838200" y="6356350"/>
-            <a:ext cx="2743200" cy="365125"/>
+            <a:off x="7205133" y="6041362"/>
+            <a:ext cx="911939" cy="365125"/>
           </a:xfrm>
           <a:prstGeom prst="rect">
             <a:avLst/>
@@ -2899,11 +5316,11 @@
         <p:txBody>
           <a:bodyPr vert="horz" lIns="91440" tIns="45720" rIns="91440" bIns="45720" rtlCol="0" anchor="ctr"/>
           <a:lstStyle>
-            <a:lvl1pPr algn="l">
-              <a:defRPr sz="1200">
+            <a:lvl1pPr algn="r">
+              <a:defRPr sz="900">
                 <a:solidFill>
                   <a:schemeClr val="tx1">
-                    <a:tint val="82000"/>
+                    <a:tint val="75000"/>
                   </a:schemeClr>
                 </a:solidFill>
               </a:defRPr>
@@ -2920,13 +5337,7 @@
       </p:sp>
       <p:sp>
         <p:nvSpPr>
-          <p:cNvPr id="5" name="Fußzeilenplatzhalter 4">
-            <a:extLst>
-              <a:ext uri="{FF2B5EF4-FFF2-40B4-BE49-F238E27FC236}">
-                <a16:creationId xmlns:a16="http://schemas.microsoft.com/office/drawing/2014/main" id="{EFA51730-684E-B3F6-1383-1B805D82D135}"/>
-              </a:ext>
-            </a:extLst>
-          </p:cNvPr>
+          <p:cNvPr id="5" name="Footer Placeholder 4"/>
           <p:cNvSpPr>
             <a:spLocks noGrp="1"/>
           </p:cNvSpPr>
@@ -2936,8 +5347,8 @@
         </p:nvSpPr>
         <p:spPr>
           <a:xfrm>
-            <a:off x="4038600" y="6356350"/>
-            <a:ext cx="4114800" cy="365125"/>
+            <a:off x="677334" y="6041362"/>
+            <a:ext cx="6297612" cy="365125"/>
           </a:xfrm>
           <a:prstGeom prst="rect">
             <a:avLst/>
@@ -2946,11 +5357,11 @@
         <p:txBody>
           <a:bodyPr vert="horz" lIns="91440" tIns="45720" rIns="91440" bIns="45720" rtlCol="0" anchor="ctr"/>
           <a:lstStyle>
-            <a:lvl1pPr algn="ctr">
-              <a:defRPr sz="1200">
+            <a:lvl1pPr algn="l">
+              <a:defRPr sz="900">
                 <a:solidFill>
                   <a:schemeClr val="tx1">
-                    <a:tint val="82000"/>
+                    <a:tint val="75000"/>
                   </a:schemeClr>
                 </a:solidFill>
               </a:defRPr>
@@ -2963,13 +5374,7 @@
       </p:sp>
       <p:sp>
         <p:nvSpPr>
-          <p:cNvPr id="6" name="Foliennummernplatzhalter 5">
-            <a:extLst>
-              <a:ext uri="{FF2B5EF4-FFF2-40B4-BE49-F238E27FC236}">
-                <a16:creationId xmlns:a16="http://schemas.microsoft.com/office/drawing/2014/main" id="{F3A0E4F1-28B2-90A0-86D2-BA655E699E0E}"/>
-              </a:ext>
-            </a:extLst>
-          </p:cNvPr>
+          <p:cNvPr id="6" name="Slide Number Placeholder 5"/>
           <p:cNvSpPr>
             <a:spLocks noGrp="1"/>
           </p:cNvSpPr>
@@ -2979,8 +5384,8 @@
         </p:nvSpPr>
         <p:spPr>
           <a:xfrm>
-            <a:off x="8610600" y="6356350"/>
-            <a:ext cx="2743200" cy="365125"/>
+            <a:off x="8590663" y="6041362"/>
+            <a:ext cx="683339" cy="365125"/>
           </a:xfrm>
           <a:prstGeom prst="rect">
             <a:avLst/>
@@ -2990,11 +5395,9 @@
           <a:bodyPr vert="horz" lIns="91440" tIns="45720" rIns="91440" bIns="45720" rtlCol="0" anchor="ctr"/>
           <a:lstStyle>
             <a:lvl1pPr algn="r">
-              <a:defRPr sz="1200">
+              <a:defRPr sz="900">
                 <a:solidFill>
-                  <a:schemeClr val="tx1">
-                    <a:tint val="82000"/>
-                  </a:schemeClr>
+                  <a:schemeClr val="accent1"/>
                 </a:solidFill>
               </a:defRPr>
             </a:lvl1pPr>
@@ -3011,55 +5414,335 @@
     </p:spTree>
     <p:extLst>
       <p:ext uri="{BB962C8B-B14F-4D97-AF65-F5344CB8AC3E}">
-        <p14:creationId xmlns:p14="http://schemas.microsoft.com/office/powerpoint/2010/main" val="3041376561"/>
+        <p14:creationId xmlns:p14="http://schemas.microsoft.com/office/powerpoint/2010/main" val="618832731"/>
       </p:ext>
     </p:extLst>
   </p:cSld>
   <p:clrMap bg1="lt1" tx1="dk1" bg2="lt2" tx2="dk2" accent1="accent1" accent2="accent2" accent3="accent3" accent4="accent4" accent5="accent5" accent6="accent6" hlink="hlink" folHlink="folHlink"/>
   <p:sldLayoutIdLst>
-    <p:sldLayoutId id="2147483649" r:id="rId1"/>
-    <p:sldLayoutId id="2147483650" r:id="rId2"/>
-    <p:sldLayoutId id="2147483651" r:id="rId3"/>
-    <p:sldLayoutId id="2147483652" r:id="rId4"/>
-    <p:sldLayoutId id="2147483653" r:id="rId5"/>
-    <p:sldLayoutId id="2147483654" r:id="rId6"/>
-    <p:sldLayoutId id="2147483655" r:id="rId7"/>
-    <p:sldLayoutId id="2147483656" r:id="rId8"/>
-    <p:sldLayoutId id="2147483657" r:id="rId9"/>
-    <p:sldLayoutId id="2147483658" r:id="rId10"/>
-    <p:sldLayoutId id="2147483659" r:id="rId11"/>
+    <p:sldLayoutId id="2147483695" r:id="rId1"/>
+    <p:sldLayoutId id="2147483696" r:id="rId2"/>
+    <p:sldLayoutId id="2147483697" r:id="rId3"/>
+    <p:sldLayoutId id="2147483698" r:id="rId4"/>
+    <p:sldLayoutId id="2147483699" r:id="rId5"/>
+    <p:sldLayoutId id="2147483700" r:id="rId6"/>
+    <p:sldLayoutId id="2147483701" r:id="rId7"/>
+    <p:sldLayoutId id="2147483702" r:id="rId8"/>
+    <p:sldLayoutId id="2147483703" r:id="rId9"/>
+    <p:sldLayoutId id="2147483704" r:id="rId10"/>
+    <p:sldLayoutId id="2147483705" r:id="rId11"/>
+    <p:sldLayoutId id="2147483706" r:id="rId12"/>
+    <p:sldLayoutId id="2147483707" r:id="rId13"/>
+    <p:sldLayoutId id="2147483708" r:id="rId14"/>
+    <p:sldLayoutId id="2147483709" r:id="rId15"/>
+    <p:sldLayoutId id="2147483710" r:id="rId16"/>
   </p:sldLayoutIdLst>
   <p:txStyles>
     <p:titleStyle>
-      <a:lvl1pPr algn="l" defTabSz="914400" rtl="0" eaLnBrk="1" latinLnBrk="0" hangingPunct="1">
-        <a:lnSpc>
-          <a:spcPct val="90000"/>
-        </a:lnSpc>
+      <a:lvl1pPr algn="l" defTabSz="457200" rtl="0" eaLnBrk="1" latinLnBrk="0" hangingPunct="1">
         <a:spcBef>
           <a:spcPct val="0"/>
         </a:spcBef>
         <a:buNone/>
-        <a:defRPr sz="4400" kern="1200">
+        <a:defRPr sz="3600" kern="1200">
           <a:solidFill>
-            <a:schemeClr val="tx1"/>
+            <a:schemeClr val="accent1"/>
           </a:solidFill>
           <a:latin typeface="+mj-lt"/>
           <a:ea typeface="+mj-ea"/>
           <a:cs typeface="+mj-cs"/>
         </a:defRPr>
       </a:lvl1pPr>
+      <a:lvl2pPr eaLnBrk="1" hangingPunct="1">
+        <a:defRPr>
+          <a:solidFill>
+            <a:schemeClr val="tx2"/>
+          </a:solidFill>
+        </a:defRPr>
+      </a:lvl2pPr>
+      <a:lvl3pPr eaLnBrk="1" hangingPunct="1">
+        <a:defRPr>
+          <a:solidFill>
+            <a:schemeClr val="tx2"/>
+          </a:solidFill>
+        </a:defRPr>
+      </a:lvl3pPr>
+      <a:lvl4pPr eaLnBrk="1" hangingPunct="1">
+        <a:defRPr>
+          <a:solidFill>
+            <a:schemeClr val="tx2"/>
+          </a:solidFill>
+        </a:defRPr>
+      </a:lvl4pPr>
+      <a:lvl5pPr eaLnBrk="1" hangingPunct="1">
+        <a:defRPr>
+          <a:solidFill>
+            <a:schemeClr val="tx2"/>
+          </a:solidFill>
+        </a:defRPr>
+      </a:lvl5pPr>
+      <a:lvl6pPr eaLnBrk="1" hangingPunct="1">
+        <a:defRPr>
+          <a:solidFill>
+            <a:schemeClr val="tx2"/>
+          </a:solidFill>
+        </a:defRPr>
+      </a:lvl6pPr>
+      <a:lvl7pPr eaLnBrk="1" hangingPunct="1">
+        <a:defRPr>
+          <a:solidFill>
+            <a:schemeClr val="tx2"/>
+          </a:solidFill>
+        </a:defRPr>
+      </a:lvl7pPr>
+      <a:lvl8pPr eaLnBrk="1" hangingPunct="1">
+        <a:defRPr>
+          <a:solidFill>
+            <a:schemeClr val="tx2"/>
+          </a:solidFill>
+        </a:defRPr>
+      </a:lvl8pPr>
+      <a:lvl9pPr eaLnBrk="1" hangingPunct="1">
+        <a:defRPr>
+          <a:solidFill>
+            <a:schemeClr val="tx2"/>
+          </a:solidFill>
+        </a:defRPr>
+      </a:lvl9pPr>
     </p:titleStyle>
     <p:bodyStyle>
-      <a:lvl1pPr marL="228600" indent="-228600" algn="l" defTabSz="914400" rtl="0" eaLnBrk="1" latinLnBrk="0" hangingPunct="1">
-        <a:lnSpc>
-          <a:spcPct val="90000"/>
-        </a:lnSpc>
+      <a:lvl1pPr marL="342900" indent="-342900" algn="l" defTabSz="457200" rtl="0" eaLnBrk="1" latinLnBrk="0" hangingPunct="1">
         <a:spcBef>
           <a:spcPts val="1000"/>
         </a:spcBef>
-        <a:buFont typeface="Arial" panose="020B0604020202020204" pitchFamily="34" charset="0"/>
-        <a:buChar char="•"/>
-        <a:defRPr sz="2800" kern="1200">
+        <a:spcAft>
+          <a:spcPts val="0"/>
+        </a:spcAft>
+        <a:buClr>
+          <a:schemeClr val="accent1"/>
+        </a:buClr>
+        <a:buSzPct val="80000"/>
+        <a:buFont typeface="Wingdings 3" charset="2"/>
+        <a:buChar char=""/>
+        <a:defRPr sz="1800" kern="1200">
+          <a:solidFill>
+            <a:schemeClr val="tx1">
+              <a:lumMod val="75000"/>
+              <a:lumOff val="25000"/>
+            </a:schemeClr>
+          </a:solidFill>
+          <a:latin typeface="+mn-lt"/>
+          <a:ea typeface="+mn-ea"/>
+          <a:cs typeface="+mn-cs"/>
+        </a:defRPr>
+      </a:lvl1pPr>
+      <a:lvl2pPr marL="742950" indent="-285750" algn="l" defTabSz="457200" rtl="0" eaLnBrk="1" latinLnBrk="0" hangingPunct="1">
+        <a:spcBef>
+          <a:spcPts val="1000"/>
+        </a:spcBef>
+        <a:spcAft>
+          <a:spcPts val="0"/>
+        </a:spcAft>
+        <a:buClr>
+          <a:schemeClr val="accent1"/>
+        </a:buClr>
+        <a:buSzPct val="80000"/>
+        <a:buFont typeface="Wingdings 3" charset="2"/>
+        <a:buChar char=""/>
+        <a:defRPr sz="1600" kern="1200">
+          <a:solidFill>
+            <a:schemeClr val="tx1">
+              <a:lumMod val="75000"/>
+              <a:lumOff val="25000"/>
+            </a:schemeClr>
+          </a:solidFill>
+          <a:latin typeface="+mn-lt"/>
+          <a:ea typeface="+mn-ea"/>
+          <a:cs typeface="+mn-cs"/>
+        </a:defRPr>
+      </a:lvl2pPr>
+      <a:lvl3pPr marL="1143000" indent="-228600" algn="l" defTabSz="457200" rtl="0" eaLnBrk="1" latinLnBrk="0" hangingPunct="1">
+        <a:spcBef>
+          <a:spcPts val="1000"/>
+        </a:spcBef>
+        <a:spcAft>
+          <a:spcPts val="0"/>
+        </a:spcAft>
+        <a:buClr>
+          <a:schemeClr val="accent1"/>
+        </a:buClr>
+        <a:buSzPct val="80000"/>
+        <a:buFont typeface="Wingdings 3" charset="2"/>
+        <a:buChar char=""/>
+        <a:defRPr sz="1400" kern="1200">
+          <a:solidFill>
+            <a:schemeClr val="tx1">
+              <a:lumMod val="75000"/>
+              <a:lumOff val="25000"/>
+            </a:schemeClr>
+          </a:solidFill>
+          <a:latin typeface="+mn-lt"/>
+          <a:ea typeface="+mn-ea"/>
+          <a:cs typeface="+mn-cs"/>
+        </a:defRPr>
+      </a:lvl3pPr>
+      <a:lvl4pPr marL="1600200" indent="-228600" algn="l" defTabSz="457200" rtl="0" eaLnBrk="1" latinLnBrk="0" hangingPunct="1">
+        <a:spcBef>
+          <a:spcPts val="1000"/>
+        </a:spcBef>
+        <a:spcAft>
+          <a:spcPts val="0"/>
+        </a:spcAft>
+        <a:buClr>
+          <a:schemeClr val="accent1"/>
+        </a:buClr>
+        <a:buSzPct val="80000"/>
+        <a:buFont typeface="Wingdings 3" charset="2"/>
+        <a:buChar char=""/>
+        <a:defRPr sz="1200" kern="1200">
+          <a:solidFill>
+            <a:schemeClr val="tx1">
+              <a:lumMod val="75000"/>
+              <a:lumOff val="25000"/>
+            </a:schemeClr>
+          </a:solidFill>
+          <a:latin typeface="+mn-lt"/>
+          <a:ea typeface="+mn-ea"/>
+          <a:cs typeface="+mn-cs"/>
+        </a:defRPr>
+      </a:lvl4pPr>
+      <a:lvl5pPr marL="2057400" indent="-228600" algn="l" defTabSz="457200" rtl="0" eaLnBrk="1" latinLnBrk="0" hangingPunct="1">
+        <a:spcBef>
+          <a:spcPts val="1000"/>
+        </a:spcBef>
+        <a:spcAft>
+          <a:spcPts val="0"/>
+        </a:spcAft>
+        <a:buClr>
+          <a:schemeClr val="accent1"/>
+        </a:buClr>
+        <a:buSzPct val="80000"/>
+        <a:buFont typeface="Wingdings 3" charset="2"/>
+        <a:buChar char=""/>
+        <a:defRPr sz="1200" kern="1200">
+          <a:solidFill>
+            <a:schemeClr val="tx1">
+              <a:lumMod val="75000"/>
+              <a:lumOff val="25000"/>
+            </a:schemeClr>
+          </a:solidFill>
+          <a:latin typeface="+mn-lt"/>
+          <a:ea typeface="+mn-ea"/>
+          <a:cs typeface="+mn-cs"/>
+        </a:defRPr>
+      </a:lvl5pPr>
+      <a:lvl6pPr marL="2514600" indent="-228600" algn="l" defTabSz="457200" rtl="0" eaLnBrk="1" latinLnBrk="0" hangingPunct="1">
+        <a:spcBef>
+          <a:spcPts val="1000"/>
+        </a:spcBef>
+        <a:spcAft>
+          <a:spcPts val="0"/>
+        </a:spcAft>
+        <a:buClr>
+          <a:schemeClr val="accent1"/>
+        </a:buClr>
+        <a:buSzPct val="80000"/>
+        <a:buFont typeface="Wingdings 3" charset="2"/>
+        <a:buChar char=""/>
+        <a:defRPr sz="1200" kern="1200">
+          <a:solidFill>
+            <a:schemeClr val="tx1">
+              <a:lumMod val="75000"/>
+              <a:lumOff val="25000"/>
+            </a:schemeClr>
+          </a:solidFill>
+          <a:latin typeface="+mn-lt"/>
+          <a:ea typeface="+mn-ea"/>
+          <a:cs typeface="+mn-cs"/>
+        </a:defRPr>
+      </a:lvl6pPr>
+      <a:lvl7pPr marL="2971800" indent="-228600" algn="l" defTabSz="457200" rtl="0" eaLnBrk="1" latinLnBrk="0" hangingPunct="1">
+        <a:spcBef>
+          <a:spcPts val="1000"/>
+        </a:spcBef>
+        <a:spcAft>
+          <a:spcPts val="0"/>
+        </a:spcAft>
+        <a:buClr>
+          <a:schemeClr val="accent1"/>
+        </a:buClr>
+        <a:buSzPct val="80000"/>
+        <a:buFont typeface="Wingdings 3" charset="2"/>
+        <a:buChar char=""/>
+        <a:defRPr sz="1200" kern="1200">
+          <a:solidFill>
+            <a:schemeClr val="tx1">
+              <a:lumMod val="75000"/>
+              <a:lumOff val="25000"/>
+            </a:schemeClr>
+          </a:solidFill>
+          <a:latin typeface="+mn-lt"/>
+          <a:ea typeface="+mn-ea"/>
+          <a:cs typeface="+mn-cs"/>
+        </a:defRPr>
+      </a:lvl7pPr>
+      <a:lvl8pPr marL="3429000" indent="-228600" algn="l" defTabSz="457200" rtl="0" eaLnBrk="1" latinLnBrk="0" hangingPunct="1">
+        <a:spcBef>
+          <a:spcPts val="1000"/>
+        </a:spcBef>
+        <a:spcAft>
+          <a:spcPts val="0"/>
+        </a:spcAft>
+        <a:buClr>
+          <a:schemeClr val="accent1"/>
+        </a:buClr>
+        <a:buSzPct val="80000"/>
+        <a:buFont typeface="Wingdings 3" charset="2"/>
+        <a:buChar char=""/>
+        <a:defRPr sz="1200" kern="1200">
+          <a:solidFill>
+            <a:schemeClr val="tx1">
+              <a:lumMod val="75000"/>
+              <a:lumOff val="25000"/>
+            </a:schemeClr>
+          </a:solidFill>
+          <a:latin typeface="+mn-lt"/>
+          <a:ea typeface="+mn-ea"/>
+          <a:cs typeface="+mn-cs"/>
+        </a:defRPr>
+      </a:lvl8pPr>
+      <a:lvl9pPr marL="3886200" indent="-228600" algn="l" defTabSz="457200" rtl="0" eaLnBrk="1" latinLnBrk="0" hangingPunct="1">
+        <a:spcBef>
+          <a:spcPts val="1000"/>
+        </a:spcBef>
+        <a:spcAft>
+          <a:spcPts val="0"/>
+        </a:spcAft>
+        <a:buClr>
+          <a:schemeClr val="accent1"/>
+        </a:buClr>
+        <a:buSzPct val="80000"/>
+        <a:buFont typeface="Wingdings 3" charset="2"/>
+        <a:buChar char=""/>
+        <a:defRPr sz="1200" kern="1200">
+          <a:solidFill>
+            <a:schemeClr val="tx1">
+              <a:lumMod val="75000"/>
+              <a:lumOff val="25000"/>
+            </a:schemeClr>
+          </a:solidFill>
+          <a:latin typeface="+mn-lt"/>
+          <a:ea typeface="+mn-ea"/>
+          <a:cs typeface="+mn-cs"/>
+        </a:defRPr>
+      </a:lvl9pPr>
+    </p:bodyStyle>
+    <p:otherStyle>
+      <a:defPPr>
+        <a:defRPr lang="en-US"/>
+      </a:defPPr>
+      <a:lvl1pPr marL="0" algn="l" defTabSz="457200" rtl="0" eaLnBrk="1" latinLnBrk="0" hangingPunct="1">
+        <a:defRPr sz="1800" kern="1200">
           <a:solidFill>
             <a:schemeClr val="tx1"/>
           </a:solidFill>
@@ -3068,16 +5751,8 @@
           <a:cs typeface="+mn-cs"/>
         </a:defRPr>
       </a:lvl1pPr>
-      <a:lvl2pPr marL="685800" indent="-228600" algn="l" defTabSz="914400" rtl="0" eaLnBrk="1" latinLnBrk="0" hangingPunct="1">
-        <a:lnSpc>
-          <a:spcPct val="90000"/>
-        </a:lnSpc>
-        <a:spcBef>
-          <a:spcPts val="500"/>
-        </a:spcBef>
-        <a:buFont typeface="Arial" panose="020B0604020202020204" pitchFamily="34" charset="0"/>
-        <a:buChar char="•"/>
-        <a:defRPr sz="2400" kern="1200">
+      <a:lvl2pPr marL="457200" algn="l" defTabSz="457200" rtl="0" eaLnBrk="1" latinLnBrk="0" hangingPunct="1">
+        <a:defRPr sz="1800" kern="1200">
           <a:solidFill>
             <a:schemeClr val="tx1"/>
           </a:solidFill>
@@ -3086,16 +5761,8 @@
           <a:cs typeface="+mn-cs"/>
         </a:defRPr>
       </a:lvl2pPr>
-      <a:lvl3pPr marL="1143000" indent="-228600" algn="l" defTabSz="914400" rtl="0" eaLnBrk="1" latinLnBrk="0" hangingPunct="1">
-        <a:lnSpc>
-          <a:spcPct val="90000"/>
-        </a:lnSpc>
-        <a:spcBef>
-          <a:spcPts val="500"/>
-        </a:spcBef>
-        <a:buFont typeface="Arial" panose="020B0604020202020204" pitchFamily="34" charset="0"/>
-        <a:buChar char="•"/>
-        <a:defRPr sz="2000" kern="1200">
+      <a:lvl3pPr marL="914400" algn="l" defTabSz="457200" rtl="0" eaLnBrk="1" latinLnBrk="0" hangingPunct="1">
+        <a:defRPr sz="1800" kern="1200">
           <a:solidFill>
             <a:schemeClr val="tx1"/>
           </a:solidFill>
@@ -3104,15 +5771,7 @@
           <a:cs typeface="+mn-cs"/>
         </a:defRPr>
       </a:lvl3pPr>
-      <a:lvl4pPr marL="1600200" indent="-228600" algn="l" defTabSz="914400" rtl="0" eaLnBrk="1" latinLnBrk="0" hangingPunct="1">
-        <a:lnSpc>
-          <a:spcPct val="90000"/>
-        </a:lnSpc>
-        <a:spcBef>
-          <a:spcPts val="500"/>
-        </a:spcBef>
-        <a:buFont typeface="Arial" panose="020B0604020202020204" pitchFamily="34" charset="0"/>
-        <a:buChar char="•"/>
+      <a:lvl4pPr marL="1371600" algn="l" defTabSz="457200" rtl="0" eaLnBrk="1" latinLnBrk="0" hangingPunct="1">
         <a:defRPr sz="1800" kern="1200">
           <a:solidFill>
             <a:schemeClr val="tx1"/>
@@ -3122,15 +5781,7 @@
           <a:cs typeface="+mn-cs"/>
         </a:defRPr>
       </a:lvl4pPr>
-      <a:lvl5pPr marL="2057400" indent="-228600" algn="l" defTabSz="914400" rtl="0" eaLnBrk="1" latinLnBrk="0" hangingPunct="1">
-        <a:lnSpc>
-          <a:spcPct val="90000"/>
-        </a:lnSpc>
-        <a:spcBef>
-          <a:spcPts val="500"/>
-        </a:spcBef>
-        <a:buFont typeface="Arial" panose="020B0604020202020204" pitchFamily="34" charset="0"/>
-        <a:buChar char="•"/>
+      <a:lvl5pPr marL="1828800" algn="l" defTabSz="457200" rtl="0" eaLnBrk="1" latinLnBrk="0" hangingPunct="1">
         <a:defRPr sz="1800" kern="1200">
           <a:solidFill>
             <a:schemeClr val="tx1"/>
@@ -3140,15 +5791,7 @@
           <a:cs typeface="+mn-cs"/>
         </a:defRPr>
       </a:lvl5pPr>
-      <a:lvl6pPr marL="2514600" indent="-228600" algn="l" defTabSz="914400" rtl="0" eaLnBrk="1" latinLnBrk="0" hangingPunct="1">
-        <a:lnSpc>
-          <a:spcPct val="90000"/>
-        </a:lnSpc>
-        <a:spcBef>
-          <a:spcPts val="500"/>
-        </a:spcBef>
-        <a:buFont typeface="Arial" panose="020B0604020202020204" pitchFamily="34" charset="0"/>
-        <a:buChar char="•"/>
+      <a:lvl6pPr marL="2286000" algn="l" defTabSz="457200" rtl="0" eaLnBrk="1" latinLnBrk="0" hangingPunct="1">
         <a:defRPr sz="1800" kern="1200">
           <a:solidFill>
             <a:schemeClr val="tx1"/>
@@ -3158,15 +5801,7 @@
           <a:cs typeface="+mn-cs"/>
         </a:defRPr>
       </a:lvl6pPr>
-      <a:lvl7pPr marL="2971800" indent="-228600" algn="l" defTabSz="914400" rtl="0" eaLnBrk="1" latinLnBrk="0" hangingPunct="1">
-        <a:lnSpc>
-          <a:spcPct val="90000"/>
-        </a:lnSpc>
-        <a:spcBef>
-          <a:spcPts val="500"/>
-        </a:spcBef>
-        <a:buFont typeface="Arial" panose="020B0604020202020204" pitchFamily="34" charset="0"/>
-        <a:buChar char="•"/>
+      <a:lvl7pPr marL="2743200" algn="l" defTabSz="457200" rtl="0" eaLnBrk="1" latinLnBrk="0" hangingPunct="1">
         <a:defRPr sz="1800" kern="1200">
           <a:solidFill>
             <a:schemeClr val="tx1"/>
@@ -3176,15 +5811,7 @@
           <a:cs typeface="+mn-cs"/>
         </a:defRPr>
       </a:lvl7pPr>
-      <a:lvl8pPr marL="3429000" indent="-228600" algn="l" defTabSz="914400" rtl="0" eaLnBrk="1" latinLnBrk="0" hangingPunct="1">
-        <a:lnSpc>
-          <a:spcPct val="90000"/>
-        </a:lnSpc>
-        <a:spcBef>
-          <a:spcPts val="500"/>
-        </a:spcBef>
-        <a:buFont typeface="Arial" panose="020B0604020202020204" pitchFamily="34" charset="0"/>
-        <a:buChar char="•"/>
+      <a:lvl8pPr marL="3200400" algn="l" defTabSz="457200" rtl="0" eaLnBrk="1" latinLnBrk="0" hangingPunct="1">
         <a:defRPr sz="1800" kern="1200">
           <a:solidFill>
             <a:schemeClr val="tx1"/>
@@ -3194,110 +5821,7 @@
           <a:cs typeface="+mn-cs"/>
         </a:defRPr>
       </a:lvl8pPr>
-      <a:lvl9pPr marL="3886200" indent="-228600" algn="l" defTabSz="914400" rtl="0" eaLnBrk="1" latinLnBrk="0" hangingPunct="1">
-        <a:lnSpc>
-          <a:spcPct val="90000"/>
-        </a:lnSpc>
-        <a:spcBef>
-          <a:spcPts val="500"/>
-        </a:spcBef>
-        <a:buFont typeface="Arial" panose="020B0604020202020204" pitchFamily="34" charset="0"/>
-        <a:buChar char="•"/>
-        <a:defRPr sz="1800" kern="1200">
-          <a:solidFill>
-            <a:schemeClr val="tx1"/>
-          </a:solidFill>
-          <a:latin typeface="+mn-lt"/>
-          <a:ea typeface="+mn-ea"/>
-          <a:cs typeface="+mn-cs"/>
-        </a:defRPr>
-      </a:lvl9pPr>
-    </p:bodyStyle>
-    <p:otherStyle>
-      <a:defPPr>
-        <a:defRPr lang="de-DE"/>
-      </a:defPPr>
-      <a:lvl1pPr marL="0" algn="l" defTabSz="914400" rtl="0" eaLnBrk="1" latinLnBrk="0" hangingPunct="1">
-        <a:defRPr sz="1800" kern="1200">
-          <a:solidFill>
-            <a:schemeClr val="tx1"/>
-          </a:solidFill>
-          <a:latin typeface="+mn-lt"/>
-          <a:ea typeface="+mn-ea"/>
-          <a:cs typeface="+mn-cs"/>
-        </a:defRPr>
-      </a:lvl1pPr>
-      <a:lvl2pPr marL="457200" algn="l" defTabSz="914400" rtl="0" eaLnBrk="1" latinLnBrk="0" hangingPunct="1">
-        <a:defRPr sz="1800" kern="1200">
-          <a:solidFill>
-            <a:schemeClr val="tx1"/>
-          </a:solidFill>
-          <a:latin typeface="+mn-lt"/>
-          <a:ea typeface="+mn-ea"/>
-          <a:cs typeface="+mn-cs"/>
-        </a:defRPr>
-      </a:lvl2pPr>
-      <a:lvl3pPr marL="914400" algn="l" defTabSz="914400" rtl="0" eaLnBrk="1" latinLnBrk="0" hangingPunct="1">
-        <a:defRPr sz="1800" kern="1200">
-          <a:solidFill>
-            <a:schemeClr val="tx1"/>
-          </a:solidFill>
-          <a:latin typeface="+mn-lt"/>
-          <a:ea typeface="+mn-ea"/>
-          <a:cs typeface="+mn-cs"/>
-        </a:defRPr>
-      </a:lvl3pPr>
-      <a:lvl4pPr marL="1371600" algn="l" defTabSz="914400" rtl="0" eaLnBrk="1" latinLnBrk="0" hangingPunct="1">
-        <a:defRPr sz="1800" kern="1200">
-          <a:solidFill>
-            <a:schemeClr val="tx1"/>
-          </a:solidFill>
-          <a:latin typeface="+mn-lt"/>
-          <a:ea typeface="+mn-ea"/>
-          <a:cs typeface="+mn-cs"/>
-        </a:defRPr>
-      </a:lvl4pPr>
-      <a:lvl5pPr marL="1828800" algn="l" defTabSz="914400" rtl="0" eaLnBrk="1" latinLnBrk="0" hangingPunct="1">
-        <a:defRPr sz="1800" kern="1200">
-          <a:solidFill>
-            <a:schemeClr val="tx1"/>
-          </a:solidFill>
-          <a:latin typeface="+mn-lt"/>
-          <a:ea typeface="+mn-ea"/>
-          <a:cs typeface="+mn-cs"/>
-        </a:defRPr>
-      </a:lvl5pPr>
-      <a:lvl6pPr marL="2286000" algn="l" defTabSz="914400" rtl="0" eaLnBrk="1" latinLnBrk="0" hangingPunct="1">
-        <a:defRPr sz="1800" kern="1200">
-          <a:solidFill>
-            <a:schemeClr val="tx1"/>
-          </a:solidFill>
-          <a:latin typeface="+mn-lt"/>
-          <a:ea typeface="+mn-ea"/>
-          <a:cs typeface="+mn-cs"/>
-        </a:defRPr>
-      </a:lvl6pPr>
-      <a:lvl7pPr marL="2743200" algn="l" defTabSz="914400" rtl="0" eaLnBrk="1" latinLnBrk="0" hangingPunct="1">
-        <a:defRPr sz="1800" kern="1200">
-          <a:solidFill>
-            <a:schemeClr val="tx1"/>
-          </a:solidFill>
-          <a:latin typeface="+mn-lt"/>
-          <a:ea typeface="+mn-ea"/>
-          <a:cs typeface="+mn-cs"/>
-        </a:defRPr>
-      </a:lvl7pPr>
-      <a:lvl8pPr marL="3200400" algn="l" defTabSz="914400" rtl="0" eaLnBrk="1" latinLnBrk="0" hangingPunct="1">
-        <a:defRPr sz="1800" kern="1200">
-          <a:solidFill>
-            <a:schemeClr val="tx1"/>
-          </a:solidFill>
-          <a:latin typeface="+mn-lt"/>
-          <a:ea typeface="+mn-ea"/>
-          <a:cs typeface="+mn-cs"/>
-        </a:defRPr>
-      </a:lvl8pPr>
-      <a:lvl9pPr marL="3657600" algn="l" defTabSz="914400" rtl="0" eaLnBrk="1" latinLnBrk="0" hangingPunct="1">
+      <a:lvl9pPr marL="3657600" algn="l" defTabSz="457200" rtl="0" eaLnBrk="1" latinLnBrk="0" hangingPunct="1">
         <a:defRPr sz="1800" kern="1200">
           <a:solidFill>
             <a:schemeClr val="tx1"/>
@@ -3331,39 +5855,6 @@
       </p:grpSpPr>
       <p:sp>
         <p:nvSpPr>
-          <p:cNvPr id="2" name="Titel 1">
-            <a:extLst>
-              <a:ext uri="{FF2B5EF4-FFF2-40B4-BE49-F238E27FC236}">
-                <a16:creationId xmlns:a16="http://schemas.microsoft.com/office/drawing/2014/main" id="{5059E76A-60B1-EFB6-A261-D07C46D01BF9}"/>
-              </a:ext>
-            </a:extLst>
-          </p:cNvPr>
-          <p:cNvSpPr>
-            <a:spLocks noGrp="1"/>
-          </p:cNvSpPr>
-          <p:nvPr>
-            <p:ph type="ctrTitle"/>
-          </p:nvPr>
-        </p:nvSpPr>
-        <p:spPr>
-          <a:xfrm>
-            <a:off x="1241612" y="207963"/>
-            <a:ext cx="8749553" cy="1392237"/>
-          </a:xfrm>
-        </p:spPr>
-        <p:txBody>
-          <a:bodyPr/>
-          <a:lstStyle/>
-          <a:p>
-            <a:r>
-              <a:rPr lang="de-DE" b="1" dirty="0"/>
-              <a:t>Titel</a:t>
-            </a:r>
-          </a:p>
-        </p:txBody>
-      </p:sp>
-      <p:sp>
-        <p:nvSpPr>
           <p:cNvPr id="3" name="Untertitel 2">
             <a:extLst>
               <a:ext uri="{FF2B5EF4-FFF2-40B4-BE49-F238E27FC236}">
@@ -3380,69 +5871,65 @@
         </p:nvSpPr>
         <p:spPr>
           <a:xfrm>
-            <a:off x="1129553" y="1922929"/>
-            <a:ext cx="9538447" cy="3334871"/>
+            <a:off x="1129553" y="685801"/>
+            <a:ext cx="9538447" cy="4572000"/>
           </a:xfrm>
         </p:spPr>
         <p:txBody>
           <a:bodyPr>
-            <a:normAutofit lnSpcReduction="10000"/>
+            <a:normAutofit/>
           </a:bodyPr>
           <a:lstStyle/>
           <a:p>
-            <a:r>
-              <a:rPr lang="de-DE" b="1" dirty="0">
-                <a:effectLst/>
+            <a:pPr algn="l"/>
+            <a:r>
+              <a:rPr lang="de-DE" sz="2400" b="1" dirty="0">
+                <a:solidFill>
+                  <a:schemeClr val="tx1"/>
+                </a:solidFill>
               </a:rPr>
-              <a:t>Projekt: </a:t>
-            </a:r>
-            <a:r>
-              <a:rPr lang="de-DE" dirty="0">
-                <a:effectLst/>
+              <a:t>Projekt:</a:t>
+            </a:r>
+            <a:r>
+              <a:rPr lang="de-DE" sz="2400" dirty="0">
+                <a:solidFill>
+                  <a:schemeClr val="tx1"/>
+                </a:solidFill>
               </a:rPr>
-              <a:t>Familienkonto‑Datenbank</a:t>
-            </a:r>
-          </a:p>
-          <a:p>
+              <a:t> </a:t>
+            </a:r>
+          </a:p>
+          <a:p>
+            <a:pPr algn="l"/>
+            <a:endParaRPr lang="de-DE" sz="2400" dirty="0">
+              <a:solidFill>
+                <a:schemeClr val="tx1"/>
+              </a:solidFill>
+            </a:endParaRPr>
+          </a:p>
+          <a:p>
+            <a:pPr algn="ctr"/>
+            <a:r>
+              <a:rPr lang="de-DE" sz="4400" dirty="0">
+                <a:solidFill>
+                  <a:schemeClr val="tx1"/>
+                </a:solidFill>
+              </a:rPr>
+              <a:t>Budget Management System </a:t>
+            </a:r>
+          </a:p>
+          <a:p>
+            <a:pPr algn="l"/>
             <a:endParaRPr lang="de-DE" dirty="0"/>
           </a:p>
           <a:p>
-            <a:r>
-              <a:rPr lang="de-DE" b="1" dirty="0">
-                <a:effectLst/>
-              </a:rPr>
-              <a:t>Thema: </a:t>
-            </a:r>
-            <a:r>
-              <a:rPr lang="de-DE" dirty="0">
-                <a:effectLst/>
-              </a:rPr>
-              <a:t>Verwaltung von Benutzern, Konten &amp; Transaktionen</a:t>
-            </a:r>
-          </a:p>
-          <a:p>
-            <a:endParaRPr lang="de-DE" dirty="0"/>
-          </a:p>
-          <a:p>
-            <a:r>
-              <a:rPr lang="de-DE" b="1" dirty="0">
-                <a:effectLst/>
-              </a:rPr>
-              <a:t>Ziel: </a:t>
-            </a:r>
-            <a:r>
-              <a:rPr lang="de-DE" dirty="0">
-                <a:effectLst/>
-              </a:rPr>
-              <a:t>Vorstellung des Datenbankmodells und Projektablaufs</a:t>
-            </a:r>
-          </a:p>
-          <a:p>
+            <a:pPr algn="l"/>
             <a:endParaRPr lang="de-DE" dirty="0">
               <a:effectLst/>
             </a:endParaRPr>
           </a:p>
           <a:p>
+            <a:pPr algn="l"/>
             <a:r>
               <a:rPr lang="de-DE" b="1" dirty="0">
                 <a:effectLst/>
@@ -3453,19 +5940,34 @@
               <a:rPr lang="de-DE" dirty="0">
                 <a:effectLst/>
               </a:rPr>
-              <a:t> …….</a:t>
-            </a:r>
-          </a:p>
-          <a:p>
+              <a:t> </a:t>
+            </a:r>
+          </a:p>
+          <a:p>
+            <a:pPr algn="l"/>
+            <a:endParaRPr lang="de-DE" dirty="0">
+              <a:effectLst/>
+            </a:endParaRPr>
+          </a:p>
+          <a:p>
+            <a:pPr algn="l"/>
             <a:r>
               <a:rPr lang="de-DE" b="1" dirty="0"/>
-              <a:t>Datum:…..</a:t>
-            </a:r>
+              <a:t>Datum:</a:t>
+            </a:r>
+            <a:r>
+              <a:rPr lang="de-DE" dirty="0"/>
+              <a:t> 7.7.207</a:t>
+            </a:r>
+          </a:p>
+          <a:p>
+            <a:pPr algn="l"/>
             <a:endParaRPr lang="de-DE" b="1" dirty="0">
               <a:effectLst/>
             </a:endParaRPr>
           </a:p>
           <a:p>
+            <a:pPr algn="l"/>
             <a:endParaRPr lang="de-DE" dirty="0"/>
           </a:p>
           <a:p>
@@ -3477,6 +5979,680 @@
     <p:extLst>
       <p:ext uri="{BB962C8B-B14F-4D97-AF65-F5344CB8AC3E}">
         <p14:creationId xmlns:p14="http://schemas.microsoft.com/office/powerpoint/2010/main" val="1564510583"/>
+      </p:ext>
+    </p:extLst>
+  </p:cSld>
+  <p:clrMapOvr>
+    <a:masterClrMapping/>
+  </p:clrMapOvr>
+</p:sld>
+</file>
+
+<file path=ppt/slides/slide10.xml><?xml version="1.0" encoding="utf-8"?>
+<p:sld xmlns:a="http://schemas.openxmlformats.org/drawingml/2006/main" xmlns:r="http://schemas.openxmlformats.org/officeDocument/2006/relationships" xmlns:p="http://schemas.openxmlformats.org/presentationml/2006/main">
+  <p:cSld>
+    <p:spTree>
+      <p:nvGrpSpPr>
+        <p:cNvPr id="1" name=""/>
+        <p:cNvGrpSpPr/>
+        <p:nvPr/>
+      </p:nvGrpSpPr>
+      <p:grpSpPr>
+        <a:xfrm>
+          <a:off x="0" y="0"/>
+          <a:ext cx="0" cy="0"/>
+          <a:chOff x="0" y="0"/>
+          <a:chExt cx="0" cy="0"/>
+        </a:xfrm>
+      </p:grpSpPr>
+      <p:sp>
+        <p:nvSpPr>
+          <p:cNvPr id="2" name="Titel 1">
+            <a:extLst>
+              <a:ext uri="{FF2B5EF4-FFF2-40B4-BE49-F238E27FC236}">
+                <a16:creationId xmlns:a16="http://schemas.microsoft.com/office/drawing/2014/main" id="{78FECC5E-069A-6771-42BA-044FEBBD8932}"/>
+              </a:ext>
+            </a:extLst>
+          </p:cNvPr>
+          <p:cNvSpPr>
+            <a:spLocks noGrp="1"/>
+          </p:cNvSpPr>
+          <p:nvPr>
+            <p:ph type="title"/>
+          </p:nvPr>
+        </p:nvSpPr>
+        <p:spPr/>
+        <p:txBody>
+          <a:bodyPr/>
+          <a:lstStyle/>
+          <a:p>
+            <a:r>
+              <a:rPr lang="de-DE" b="1" dirty="0"/>
+              <a:t>ER‑Modell</a:t>
+            </a:r>
+            <a:endParaRPr lang="de-DE" dirty="0"/>
+          </a:p>
+        </p:txBody>
+      </p:sp>
+      <p:pic>
+        <p:nvPicPr>
+          <p:cNvPr id="4" name="Inhaltsplatzhalter 3" descr="budget_relmodell.png">
+            <a:extLst>
+              <a:ext uri="{FF2B5EF4-FFF2-40B4-BE49-F238E27FC236}">
+                <a16:creationId xmlns:a16="http://schemas.microsoft.com/office/drawing/2014/main" id="{F4474953-C720-7D09-99B8-E965AE0ABC57}"/>
+              </a:ext>
+            </a:extLst>
+          </p:cNvPr>
+          <p:cNvPicPr>
+            <a:picLocks noGrp="1" noChangeAspect="1"/>
+          </p:cNvPicPr>
+          <p:nvPr>
+            <p:ph idx="1"/>
+          </p:nvPr>
+        </p:nvPicPr>
+        <p:blipFill>
+          <a:blip r:embed="rId2"/>
+          <a:stretch>
+            <a:fillRect/>
+          </a:stretch>
+        </p:blipFill>
+        <p:spPr>
+          <a:xfrm>
+            <a:off x="2545977" y="1798265"/>
+            <a:ext cx="5806610" cy="4351338"/>
+          </a:xfrm>
+          <a:prstGeom prst="rect">
+            <a:avLst/>
+          </a:prstGeom>
+        </p:spPr>
+      </p:pic>
+    </p:spTree>
+    <p:extLst>
+      <p:ext uri="{BB962C8B-B14F-4D97-AF65-F5344CB8AC3E}">
+        <p14:creationId xmlns:p14="http://schemas.microsoft.com/office/powerpoint/2010/main" val="2449178151"/>
+      </p:ext>
+    </p:extLst>
+  </p:cSld>
+  <p:clrMapOvr>
+    <a:masterClrMapping/>
+  </p:clrMapOvr>
+</p:sld>
+</file>
+
+<file path=ppt/slides/slide11.xml><?xml version="1.0" encoding="utf-8"?>
+<p:sld xmlns:a="http://schemas.openxmlformats.org/drawingml/2006/main" xmlns:r="http://schemas.openxmlformats.org/officeDocument/2006/relationships" xmlns:p="http://schemas.openxmlformats.org/presentationml/2006/main">
+  <p:cSld>
+    <p:spTree>
+      <p:nvGrpSpPr>
+        <p:cNvPr id="1" name=""/>
+        <p:cNvGrpSpPr/>
+        <p:nvPr/>
+      </p:nvGrpSpPr>
+      <p:grpSpPr>
+        <a:xfrm>
+          <a:off x="0" y="0"/>
+          <a:ext cx="0" cy="0"/>
+          <a:chOff x="0" y="0"/>
+          <a:chExt cx="0" cy="0"/>
+        </a:xfrm>
+      </p:grpSpPr>
+      <p:sp>
+        <p:nvSpPr>
+          <p:cNvPr id="2" name="Titel 1">
+            <a:extLst>
+              <a:ext uri="{FF2B5EF4-FFF2-40B4-BE49-F238E27FC236}">
+                <a16:creationId xmlns:a16="http://schemas.microsoft.com/office/drawing/2014/main" id="{165DF19F-562A-A361-1038-8C9FBF6978E5}"/>
+              </a:ext>
+            </a:extLst>
+          </p:cNvPr>
+          <p:cNvSpPr>
+            <a:spLocks noGrp="1"/>
+          </p:cNvSpPr>
+          <p:nvPr>
+            <p:ph type="title"/>
+          </p:nvPr>
+        </p:nvSpPr>
+        <p:spPr/>
+        <p:txBody>
+          <a:bodyPr/>
+          <a:lstStyle/>
+          <a:p>
+            <a:r>
+              <a:rPr lang="de-DE" dirty="0"/>
+              <a:t>Implementierung</a:t>
+            </a:r>
+          </a:p>
+        </p:txBody>
+      </p:sp>
+      <p:sp>
+        <p:nvSpPr>
+          <p:cNvPr id="3" name="Inhaltsplatzhalter 2">
+            <a:extLst>
+              <a:ext uri="{FF2B5EF4-FFF2-40B4-BE49-F238E27FC236}">
+                <a16:creationId xmlns:a16="http://schemas.microsoft.com/office/drawing/2014/main" id="{DB9A63B4-B01B-FA71-C23A-92D3F9076437}"/>
+              </a:ext>
+            </a:extLst>
+          </p:cNvPr>
+          <p:cNvSpPr>
+            <a:spLocks noGrp="1"/>
+          </p:cNvSpPr>
+          <p:nvPr>
+            <p:ph idx="1"/>
+          </p:nvPr>
+        </p:nvSpPr>
+        <p:spPr/>
+        <p:txBody>
+          <a:bodyPr/>
+          <a:lstStyle/>
+          <a:p>
+            <a:r>
+              <a:rPr lang="de-DE" dirty="0"/>
+              <a:t>SQL-Tabellen erstellen </a:t>
+            </a:r>
+          </a:p>
+          <a:p>
+            <a:r>
+              <a:rPr lang="de-DE" dirty="0"/>
+              <a:t>Primärschlüssel definieren </a:t>
+            </a:r>
+          </a:p>
+          <a:p>
+            <a:r>
+              <a:rPr lang="de-DE" dirty="0"/>
+              <a:t>Fremdschlüssel definieren </a:t>
+            </a:r>
+          </a:p>
+          <a:p>
+            <a:r>
+              <a:rPr lang="de-DE" dirty="0"/>
+              <a:t>Datentypen festlegen </a:t>
+            </a:r>
+          </a:p>
+          <a:p>
+            <a:pPr marL="0" indent="0">
+              <a:buNone/>
+            </a:pPr>
+            <a:endParaRPr lang="de-DE" dirty="0"/>
+          </a:p>
+        </p:txBody>
+      </p:sp>
+    </p:spTree>
+    <p:extLst>
+      <p:ext uri="{BB962C8B-B14F-4D97-AF65-F5344CB8AC3E}">
+        <p14:creationId xmlns:p14="http://schemas.microsoft.com/office/powerpoint/2010/main" val="1748734018"/>
+      </p:ext>
+    </p:extLst>
+  </p:cSld>
+  <p:clrMapOvr>
+    <a:masterClrMapping/>
+  </p:clrMapOvr>
+</p:sld>
+</file>
+
+<file path=ppt/slides/slide12.xml><?xml version="1.0" encoding="utf-8"?>
+<p:sld xmlns:a="http://schemas.openxmlformats.org/drawingml/2006/main" xmlns:r="http://schemas.openxmlformats.org/officeDocument/2006/relationships" xmlns:p="http://schemas.openxmlformats.org/presentationml/2006/main">
+  <p:cSld>
+    <p:spTree>
+      <p:nvGrpSpPr>
+        <p:cNvPr id="1" name=""/>
+        <p:cNvGrpSpPr/>
+        <p:nvPr/>
+      </p:nvGrpSpPr>
+      <p:grpSpPr>
+        <a:xfrm>
+          <a:off x="0" y="0"/>
+          <a:ext cx="0" cy="0"/>
+          <a:chOff x="0" y="0"/>
+          <a:chExt cx="0" cy="0"/>
+        </a:xfrm>
+      </p:grpSpPr>
+      <p:sp>
+        <p:nvSpPr>
+          <p:cNvPr id="2" name="Titel 1">
+            <a:extLst>
+              <a:ext uri="{FF2B5EF4-FFF2-40B4-BE49-F238E27FC236}">
+                <a16:creationId xmlns:a16="http://schemas.microsoft.com/office/drawing/2014/main" id="{1A82A34D-23C2-69D9-B10E-607C2A7386F6}"/>
+              </a:ext>
+            </a:extLst>
+          </p:cNvPr>
+          <p:cNvSpPr>
+            <a:spLocks noGrp="1"/>
+          </p:cNvSpPr>
+          <p:nvPr>
+            <p:ph type="title"/>
+          </p:nvPr>
+        </p:nvSpPr>
+        <p:spPr/>
+        <p:txBody>
+          <a:bodyPr/>
+          <a:lstStyle/>
+          <a:p>
+            <a:r>
+              <a:rPr lang="de-DE" dirty="0"/>
+              <a:t>Tests und Ergebnisse</a:t>
+            </a:r>
+          </a:p>
+        </p:txBody>
+      </p:sp>
+      <p:sp>
+        <p:nvSpPr>
+          <p:cNvPr id="3" name="Inhaltsplatzhalter 2">
+            <a:extLst>
+              <a:ext uri="{FF2B5EF4-FFF2-40B4-BE49-F238E27FC236}">
+                <a16:creationId xmlns:a16="http://schemas.microsoft.com/office/drawing/2014/main" id="{E5844ADD-3D97-1943-5983-6A5B0BA8041A}"/>
+              </a:ext>
+            </a:extLst>
+          </p:cNvPr>
+          <p:cNvSpPr>
+            <a:spLocks noGrp="1"/>
+          </p:cNvSpPr>
+          <p:nvPr>
+            <p:ph idx="1"/>
+          </p:nvPr>
+        </p:nvSpPr>
+        <p:spPr/>
+        <p:txBody>
+          <a:bodyPr/>
+          <a:lstStyle/>
+          <a:p>
+            <a:r>
+              <a:rPr lang="de-DE" dirty="0"/>
+              <a:t>Testdaten einfügen </a:t>
+            </a:r>
+          </a:p>
+          <a:p>
+            <a:r>
+              <a:rPr lang="de-DE" dirty="0"/>
+              <a:t>Beziehungen prüfen </a:t>
+            </a:r>
+          </a:p>
+          <a:p>
+            <a:r>
+              <a:rPr lang="de-DE" dirty="0"/>
+              <a:t>SELECT- und JOIN-Abfragen ausführen </a:t>
+            </a:r>
+          </a:p>
+          <a:p>
+            <a:pPr marL="0" indent="0">
+              <a:buNone/>
+            </a:pPr>
+            <a:endParaRPr lang="de-DE" dirty="0"/>
+          </a:p>
+        </p:txBody>
+      </p:sp>
+    </p:spTree>
+    <p:extLst>
+      <p:ext uri="{BB962C8B-B14F-4D97-AF65-F5344CB8AC3E}">
+        <p14:creationId xmlns:p14="http://schemas.microsoft.com/office/powerpoint/2010/main" val="1547218654"/>
+      </p:ext>
+    </p:extLst>
+  </p:cSld>
+  <p:clrMapOvr>
+    <a:masterClrMapping/>
+  </p:clrMapOvr>
+</p:sld>
+</file>
+
+<file path=ppt/slides/slide13.xml><?xml version="1.0" encoding="utf-8"?>
+<p:sld xmlns:a="http://schemas.openxmlformats.org/drawingml/2006/main" xmlns:r="http://schemas.openxmlformats.org/officeDocument/2006/relationships" xmlns:p="http://schemas.openxmlformats.org/presentationml/2006/main">
+  <p:cSld>
+    <p:spTree>
+      <p:nvGrpSpPr>
+        <p:cNvPr id="1" name=""/>
+        <p:cNvGrpSpPr/>
+        <p:nvPr/>
+      </p:nvGrpSpPr>
+      <p:grpSpPr>
+        <a:xfrm>
+          <a:off x="0" y="0"/>
+          <a:ext cx="0" cy="0"/>
+          <a:chOff x="0" y="0"/>
+          <a:chExt cx="0" cy="0"/>
+        </a:xfrm>
+      </p:grpSpPr>
+      <p:sp>
+        <p:nvSpPr>
+          <p:cNvPr id="2" name="Titel 1">
+            <a:extLst>
+              <a:ext uri="{FF2B5EF4-FFF2-40B4-BE49-F238E27FC236}">
+                <a16:creationId xmlns:a16="http://schemas.microsoft.com/office/drawing/2014/main" id="{B2D26E3D-40C8-FE98-74EB-B2676785691A}"/>
+              </a:ext>
+            </a:extLst>
+          </p:cNvPr>
+          <p:cNvSpPr>
+            <a:spLocks noGrp="1"/>
+          </p:cNvSpPr>
+          <p:nvPr>
+            <p:ph type="title"/>
+          </p:nvPr>
+        </p:nvSpPr>
+        <p:spPr/>
+        <p:txBody>
+          <a:bodyPr/>
+          <a:lstStyle/>
+          <a:p>
+            <a:r>
+              <a:rPr lang="de-DE" b="1" dirty="0"/>
+              <a:t>Abschluss</a:t>
+            </a:r>
+          </a:p>
+        </p:txBody>
+      </p:sp>
+      <p:sp>
+        <p:nvSpPr>
+          <p:cNvPr id="3" name="Inhaltsplatzhalter 2">
+            <a:extLst>
+              <a:ext uri="{FF2B5EF4-FFF2-40B4-BE49-F238E27FC236}">
+                <a16:creationId xmlns:a16="http://schemas.microsoft.com/office/drawing/2014/main" id="{B750BB43-3080-C3B9-A427-C9711C4A4633}"/>
+              </a:ext>
+            </a:extLst>
+          </p:cNvPr>
+          <p:cNvSpPr>
+            <a:spLocks noGrp="1"/>
+          </p:cNvSpPr>
+          <p:nvPr>
+            <p:ph idx="1"/>
+          </p:nvPr>
+        </p:nvSpPr>
+        <p:spPr/>
+        <p:txBody>
+          <a:bodyPr/>
+          <a:lstStyle/>
+          <a:p>
+            <a:r>
+              <a:rPr lang="de-DE" b="1" dirty="0">
+                <a:effectLst/>
+              </a:rPr>
+              <a:t>Zeitvergleich:</a:t>
+            </a:r>
+            <a:r>
+              <a:rPr lang="de-DE" dirty="0">
+                <a:effectLst/>
+              </a:rPr>
+              <a:t> Planung weitgehend eingehalten</a:t>
+            </a:r>
+          </a:p>
+          <a:p>
+            <a:endParaRPr lang="de-DE" dirty="0"/>
+          </a:p>
+          <a:p>
+            <a:r>
+              <a:rPr lang="de-DE" b="1" dirty="0">
+                <a:effectLst/>
+              </a:rPr>
+              <a:t>Fazit:</a:t>
+            </a:r>
+            <a:r>
+              <a:rPr lang="de-DE" dirty="0">
+                <a:effectLst/>
+              </a:rPr>
+              <a:t> Funktionales, erweiterbares Datenbankmodell</a:t>
+            </a:r>
+          </a:p>
+          <a:p>
+            <a:endParaRPr lang="de-DE" dirty="0"/>
+          </a:p>
+          <a:p>
+            <a:r>
+              <a:rPr lang="de-DE" b="1" dirty="0">
+                <a:effectLst/>
+              </a:rPr>
+              <a:t>Ausblick:</a:t>
+            </a:r>
+            <a:r>
+              <a:rPr lang="de-DE" dirty="0">
+                <a:effectLst/>
+              </a:rPr>
+              <a:t> Budgetplanung, Statistiken, Web‑Frontend möglich</a:t>
+            </a:r>
+            <a:endParaRPr lang="de-DE" dirty="0"/>
+          </a:p>
+          <a:p>
+            <a:endParaRPr lang="de-DE" dirty="0"/>
+          </a:p>
+        </p:txBody>
+      </p:sp>
+    </p:spTree>
+    <p:extLst>
+      <p:ext uri="{BB962C8B-B14F-4D97-AF65-F5344CB8AC3E}">
+        <p14:creationId xmlns:p14="http://schemas.microsoft.com/office/powerpoint/2010/main" val="890010665"/>
+      </p:ext>
+    </p:extLst>
+  </p:cSld>
+  <p:clrMapOvr>
+    <a:masterClrMapping/>
+  </p:clrMapOvr>
+</p:sld>
+</file>
+
+<file path=ppt/slides/slide14.xml><?xml version="1.0" encoding="utf-8"?>
+<p:sld xmlns:a="http://schemas.openxmlformats.org/drawingml/2006/main" xmlns:r="http://schemas.openxmlformats.org/officeDocument/2006/relationships" xmlns:p="http://schemas.openxmlformats.org/presentationml/2006/main">
+  <p:cSld>
+    <p:spTree>
+      <p:nvGrpSpPr>
+        <p:cNvPr id="1" name=""/>
+        <p:cNvGrpSpPr/>
+        <p:nvPr/>
+      </p:nvGrpSpPr>
+      <p:grpSpPr>
+        <a:xfrm>
+          <a:off x="0" y="0"/>
+          <a:ext cx="0" cy="0"/>
+          <a:chOff x="0" y="0"/>
+          <a:chExt cx="0" cy="0"/>
+        </a:xfrm>
+      </p:grpSpPr>
+      <p:sp>
+        <p:nvSpPr>
+          <p:cNvPr id="2" name="Titel 1">
+            <a:extLst>
+              <a:ext uri="{FF2B5EF4-FFF2-40B4-BE49-F238E27FC236}">
+                <a16:creationId xmlns:a16="http://schemas.microsoft.com/office/drawing/2014/main" id="{E19FBAA6-92B9-0023-B7D7-7C8C65DE0BD5}"/>
+              </a:ext>
+            </a:extLst>
+          </p:cNvPr>
+          <p:cNvSpPr>
+            <a:spLocks noGrp="1"/>
+          </p:cNvSpPr>
+          <p:nvPr>
+            <p:ph type="title"/>
+          </p:nvPr>
+        </p:nvSpPr>
+        <p:spPr/>
+        <p:txBody>
+          <a:bodyPr/>
+          <a:lstStyle/>
+          <a:p>
+            <a:r>
+              <a:rPr lang="de-DE" dirty="0"/>
+              <a:t>Probleme und Lösungen</a:t>
+            </a:r>
+          </a:p>
+        </p:txBody>
+      </p:sp>
+      <p:sp>
+        <p:nvSpPr>
+          <p:cNvPr id="3" name="Inhaltsplatzhalter 2">
+            <a:extLst>
+              <a:ext uri="{FF2B5EF4-FFF2-40B4-BE49-F238E27FC236}">
+                <a16:creationId xmlns:a16="http://schemas.microsoft.com/office/drawing/2014/main" id="{43C5B058-8746-DEA7-5160-784453CF3890}"/>
+              </a:ext>
+            </a:extLst>
+          </p:cNvPr>
+          <p:cNvSpPr>
+            <a:spLocks noGrp="1"/>
+          </p:cNvSpPr>
+          <p:nvPr>
+            <p:ph idx="1"/>
+          </p:nvPr>
+        </p:nvSpPr>
+        <p:spPr/>
+        <p:txBody>
+          <a:bodyPr/>
+          <a:lstStyle/>
+          <a:p>
+            <a:r>
+              <a:rPr lang="de-DE" b="1" dirty="0"/>
+              <a:t>n:m-Beziehung:</a:t>
+            </a:r>
+            <a:br>
+              <a:rPr lang="de-DE" dirty="0"/>
+            </a:br>
+            <a:r>
+              <a:rPr lang="de-DE" dirty="0"/>
+              <a:t>Lösung: Zwischentabelle </a:t>
+            </a:r>
+            <a:r>
+              <a:rPr lang="de-DE" dirty="0" err="1"/>
+              <a:t>Benutzer_Konto</a:t>
+            </a:r>
+            <a:r>
+              <a:rPr lang="de-DE" dirty="0"/>
+              <a:t> erstellt </a:t>
+            </a:r>
+          </a:p>
+          <a:p>
+            <a:pPr marL="0" indent="0">
+              <a:buNone/>
+            </a:pPr>
+            <a:endParaRPr lang="de-DE" dirty="0"/>
+          </a:p>
+          <a:p>
+            <a:r>
+              <a:rPr lang="de-DE" b="1" dirty="0"/>
+              <a:t>Kategorisierung der Transaktionen:</a:t>
+            </a:r>
+            <a:br>
+              <a:rPr lang="de-DE" dirty="0"/>
+            </a:br>
+            <a:r>
+              <a:rPr lang="de-DE" dirty="0"/>
+              <a:t>Lösung: Tabelle Kategorie erstellt </a:t>
+            </a:r>
+          </a:p>
+          <a:p>
+            <a:pPr marL="0" indent="0">
+              <a:buNone/>
+            </a:pPr>
+            <a:endParaRPr lang="de-DE" dirty="0"/>
+          </a:p>
+          <a:p>
+            <a:r>
+              <a:rPr lang="de-DE" b="1" dirty="0"/>
+              <a:t>Unterscheidung der Transaktionsarten:</a:t>
+            </a:r>
+            <a:br>
+              <a:rPr lang="de-DE" dirty="0"/>
+            </a:br>
+            <a:r>
+              <a:rPr lang="de-DE" dirty="0"/>
+              <a:t>Lösung: Tabelle </a:t>
+            </a:r>
+            <a:r>
+              <a:rPr lang="de-DE" dirty="0" err="1"/>
+              <a:t>Art_Transfer</a:t>
+            </a:r>
+            <a:r>
+              <a:rPr lang="de-DE" dirty="0"/>
+              <a:t> für Einnahmen und Ausgaben erstellt </a:t>
+            </a:r>
+          </a:p>
+          <a:p>
+            <a:pPr marL="0" indent="0">
+              <a:buNone/>
+            </a:pPr>
+            <a:endParaRPr lang="de-DE" dirty="0"/>
+          </a:p>
+        </p:txBody>
+      </p:sp>
+    </p:spTree>
+    <p:extLst>
+      <p:ext uri="{BB962C8B-B14F-4D97-AF65-F5344CB8AC3E}">
+        <p14:creationId xmlns:p14="http://schemas.microsoft.com/office/powerpoint/2010/main" val="2486593255"/>
+      </p:ext>
+    </p:extLst>
+  </p:cSld>
+  <p:clrMapOvr>
+    <a:masterClrMapping/>
+  </p:clrMapOvr>
+</p:sld>
+</file>
+
+<file path=ppt/slides/slide15.xml><?xml version="1.0" encoding="utf-8"?>
+<p:sld xmlns:a="http://schemas.openxmlformats.org/drawingml/2006/main" xmlns:r="http://schemas.openxmlformats.org/officeDocument/2006/relationships" xmlns:p="http://schemas.openxmlformats.org/presentationml/2006/main">
+  <p:cSld>
+    <p:spTree>
+      <p:nvGrpSpPr>
+        <p:cNvPr id="1" name=""/>
+        <p:cNvGrpSpPr/>
+        <p:nvPr/>
+      </p:nvGrpSpPr>
+      <p:grpSpPr>
+        <a:xfrm>
+          <a:off x="0" y="0"/>
+          <a:ext cx="0" cy="0"/>
+          <a:chOff x="0" y="0"/>
+          <a:chExt cx="0" cy="0"/>
+        </a:xfrm>
+      </p:grpSpPr>
+      <p:sp>
+        <p:nvSpPr>
+          <p:cNvPr id="2" name="Titel 1">
+            <a:extLst>
+              <a:ext uri="{FF2B5EF4-FFF2-40B4-BE49-F238E27FC236}">
+                <a16:creationId xmlns:a16="http://schemas.microsoft.com/office/drawing/2014/main" id="{9F293015-09B0-48A3-8785-3013CECCEAAC}"/>
+              </a:ext>
+            </a:extLst>
+          </p:cNvPr>
+          <p:cNvSpPr>
+            <a:spLocks noGrp="1"/>
+          </p:cNvSpPr>
+          <p:nvPr>
+            <p:ph type="title"/>
+          </p:nvPr>
+        </p:nvSpPr>
+        <p:spPr>
+          <a:xfrm>
+            <a:off x="677334" y="609599"/>
+            <a:ext cx="8596668" cy="4631267"/>
+          </a:xfrm>
+        </p:spPr>
+        <p:txBody>
+          <a:bodyPr>
+            <a:normAutofit fontScale="90000"/>
+          </a:bodyPr>
+          <a:lstStyle/>
+          <a:p>
+            <a:pPr algn="ctr"/>
+            <a:r>
+              <a:rPr lang="de-DE" sz="8000" dirty="0"/>
+              <a:t>Vielen Dank </a:t>
+            </a:r>
+            <a:br>
+              <a:rPr lang="de-DE" sz="8000" dirty="0"/>
+            </a:br>
+            <a:r>
+              <a:rPr lang="de-DE" sz="8000" dirty="0"/>
+              <a:t>für </a:t>
+            </a:r>
+            <a:br>
+              <a:rPr lang="de-DE" sz="8000" dirty="0"/>
+            </a:br>
+            <a:r>
+              <a:rPr lang="de-DE" sz="8000" dirty="0"/>
+              <a:t>ihre Aufmerksam</a:t>
+            </a:r>
+            <a:br>
+              <a:rPr lang="de-DE" sz="8000" dirty="0"/>
+            </a:br>
+            <a:endParaRPr lang="de-DE" sz="8000" dirty="0"/>
+          </a:p>
+        </p:txBody>
+      </p:sp>
+    </p:spTree>
+    <p:extLst>
+      <p:ext uri="{BB962C8B-B14F-4D97-AF65-F5344CB8AC3E}">
+        <p14:creationId xmlns:p14="http://schemas.microsoft.com/office/powerpoint/2010/main" val="1088854612"/>
       </p:ext>
     </p:extLst>
   </p:cSld>
@@ -3640,7 +6816,7 @@
           <p:cNvPr id="2" name="Titel 1">
             <a:extLst>
               <a:ext uri="{FF2B5EF4-FFF2-40B4-BE49-F238E27FC236}">
-                <a16:creationId xmlns:a16="http://schemas.microsoft.com/office/drawing/2014/main" id="{F2F18BBD-8D69-C787-46F2-5A1D1E10EB23}"/>
+                <a16:creationId xmlns:a16="http://schemas.microsoft.com/office/drawing/2014/main" id="{E2B48DB6-8909-DD5C-34D6-66B2C2DC22D2}"/>
               </a:ext>
             </a:extLst>
           </p:cNvPr>
@@ -3656,10 +6832,7 @@
           <a:bodyPr/>
           <a:lstStyle/>
           <a:p>
-            <a:r>
-              <a:rPr lang="de-DE" b="1" dirty="0"/>
-              <a:t>Planung</a:t>
-            </a:r>
+            <a:endParaRPr lang="de-DE"/>
           </a:p>
         </p:txBody>
       </p:sp>
@@ -3668,7 +6841,7 @@
           <p:cNvPr id="3" name="Inhaltsplatzhalter 2">
             <a:extLst>
               <a:ext uri="{FF2B5EF4-FFF2-40B4-BE49-F238E27FC236}">
-                <a16:creationId xmlns:a16="http://schemas.microsoft.com/office/drawing/2014/main" id="{B0814214-B52D-23E3-1928-75B92DE10A13}"/>
+                <a16:creationId xmlns:a16="http://schemas.microsoft.com/office/drawing/2014/main" id="{B460BE15-D6CF-DB2B-6712-4C319FDBC06B}"/>
               </a:ext>
             </a:extLst>
           </p:cNvPr>
@@ -3685,54 +6858,38 @@
           <a:lstStyle/>
           <a:p>
             <a:r>
-              <a:rPr lang="de-DE" b="1" dirty="0">
-                <a:effectLst/>
-              </a:rPr>
-              <a:t>Zeitplanung:</a:t>
-            </a:r>
-            <a:r>
-              <a:rPr lang="de-DE" dirty="0">
-                <a:effectLst/>
-              </a:rPr>
-              <a:t> Analyse, Entwurf, Implementierung, Tests, Dokumentation</a:t>
-            </a:r>
-          </a:p>
-          <a:p>
-            <a:endParaRPr lang="de-DE" dirty="0"/>
-          </a:p>
-          <a:p>
-            <a:r>
-              <a:rPr lang="de-DE" b="1" dirty="0">
-                <a:effectLst/>
-              </a:rPr>
-              <a:t>IST‑Analyse:</a:t>
-            </a:r>
-            <a:r>
-              <a:rPr lang="de-DE" dirty="0">
-                <a:effectLst/>
-              </a:rPr>
-              <a:t> Keine vorhandene Struktur, manuelle Verwaltung</a:t>
-            </a:r>
-          </a:p>
-          <a:p>
-            <a:endParaRPr lang="de-DE" dirty="0"/>
-          </a:p>
-          <a:p>
-            <a:r>
-              <a:rPr lang="de-DE" b="1" dirty="0">
-                <a:effectLst/>
-              </a:rPr>
-              <a:t>SOLL‑Konzept:</a:t>
-            </a:r>
-            <a:r>
-              <a:rPr lang="de-DE" dirty="0">
-                <a:effectLst/>
-              </a:rPr>
-              <a:t> Klare Entitäten &amp; Beziehungen, Erweiterbarkeit</a:t>
-            </a:r>
-            <a:endParaRPr lang="de-DE" dirty="0"/>
-          </a:p>
-          <a:p>
+              <a:rPr lang="de-DE" dirty="0"/>
+              <a:t>Entwicklung einer relationalen Datenbank zur Verwaltung persönlicher Finanzen </a:t>
+            </a:r>
+          </a:p>
+          <a:p>
+            <a:r>
+              <a:rPr lang="de-DE" dirty="0"/>
+              <a:t>Speicherung von Benutzern, Konten und Transaktionen </a:t>
+            </a:r>
+          </a:p>
+          <a:p>
+            <a:r>
+              <a:rPr lang="de-DE" dirty="0"/>
+              <a:t>Strukturierte Verwaltung von Einnahmen und Ausgaben </a:t>
+            </a:r>
+          </a:p>
+          <a:p>
+            <a:r>
+              <a:rPr lang="de-DE" dirty="0"/>
+              <a:t>Analyse der Finanzdaten mit SQL (SELECT und JOIN) </a:t>
+            </a:r>
+          </a:p>
+          <a:p>
+            <a:r>
+              <a:rPr lang="de-DE" dirty="0"/>
+              <a:t>Verwendung von Primär- und Fremdschlüsseln zur Sicherstellung der Datenbeziehungen </a:t>
+            </a:r>
+          </a:p>
+          <a:p>
+            <a:pPr marL="0" indent="0">
+              <a:buNone/>
+            </a:pPr>
             <a:endParaRPr lang="de-DE" dirty="0"/>
           </a:p>
         </p:txBody>
@@ -3740,7 +6897,7 @@
     </p:spTree>
     <p:extLst>
       <p:ext uri="{BB962C8B-B14F-4D97-AF65-F5344CB8AC3E}">
-        <p14:creationId xmlns:p14="http://schemas.microsoft.com/office/powerpoint/2010/main" val="2125346960"/>
+        <p14:creationId xmlns:p14="http://schemas.microsoft.com/office/powerpoint/2010/main" val="1741195404"/>
       </p:ext>
     </p:extLst>
   </p:cSld>
@@ -3772,7 +6929,7 @@
           <p:cNvPr id="2" name="Titel 1">
             <a:extLst>
               <a:ext uri="{FF2B5EF4-FFF2-40B4-BE49-F238E27FC236}">
-                <a16:creationId xmlns:a16="http://schemas.microsoft.com/office/drawing/2014/main" id="{BE989C0A-1945-2090-7D94-42215BF21496}"/>
+                <a16:creationId xmlns:a16="http://schemas.microsoft.com/office/drawing/2014/main" id="{F2F18BBD-8D69-C787-46F2-5A1D1E10EB23}"/>
               </a:ext>
             </a:extLst>
           </p:cNvPr>
@@ -3790,7 +6947,7 @@
           <a:p>
             <a:r>
               <a:rPr lang="de-DE" b="1" dirty="0"/>
-              <a:t>ER‑Modell</a:t>
+              <a:t>Planung</a:t>
             </a:r>
           </a:p>
         </p:txBody>
@@ -3800,7 +6957,7 @@
           <p:cNvPr id="3" name="Inhaltsplatzhalter 2">
             <a:extLst>
               <a:ext uri="{FF2B5EF4-FFF2-40B4-BE49-F238E27FC236}">
-                <a16:creationId xmlns:a16="http://schemas.microsoft.com/office/drawing/2014/main" id="{FBF8C531-79F1-DF5A-B384-94A2967A2DD4}"/>
+                <a16:creationId xmlns:a16="http://schemas.microsoft.com/office/drawing/2014/main" id="{B0814214-B52D-23E3-1928-75B92DE10A13}"/>
               </a:ext>
             </a:extLst>
           </p:cNvPr>
@@ -3813,25 +6970,23 @@
         </p:nvSpPr>
         <p:spPr/>
         <p:txBody>
-          <a:bodyPr>
-            <a:normAutofit lnSpcReduction="10000"/>
-          </a:bodyPr>
-          <a:lstStyle/>
-          <a:p>
-            <a:pPr marL="0" indent="0">
-              <a:buNone/>
-            </a:pPr>
+          <a:bodyPr/>
+          <a:lstStyle/>
+          <a:p>
+            <a:r>
+              <a:rPr lang="de-DE" b="1" dirty="0">
+                <a:effectLst/>
+              </a:rPr>
+              <a:t>Zeitplanung:</a:t>
+            </a:r>
             <a:r>
               <a:rPr lang="de-DE" dirty="0">
                 <a:effectLst/>
               </a:rPr>
-              <a:t>Kurze Erklärung der wichtigsten Tabellen:</a:t>
-            </a:r>
-          </a:p>
-          <a:p>
-            <a:pPr marL="0" indent="0">
-              <a:buNone/>
-            </a:pPr>
+              <a:t> Analyse, Entwurf, Implementierung, Tests, Dokumentation</a:t>
+            </a:r>
+          </a:p>
+          <a:p>
             <a:endParaRPr lang="de-DE" dirty="0"/>
           </a:p>
           <a:p>
@@ -3839,14 +6994,16 @@
               <a:rPr lang="de-DE" b="1" dirty="0">
                 <a:effectLst/>
               </a:rPr>
-              <a:t>Familie</a:t>
+              <a:t>IST‑Analyse:</a:t>
             </a:r>
             <a:r>
               <a:rPr lang="de-DE" dirty="0">
                 <a:effectLst/>
               </a:rPr>
-              <a:t> – Gruppiert Benutzer</a:t>
-            </a:r>
+              <a:t> Keine vorhandene Struktur, manuelle Verwaltung</a:t>
+            </a:r>
+          </a:p>
+          <a:p>
             <a:endParaRPr lang="de-DE" dirty="0"/>
           </a:p>
           <a:p>
@@ -3854,88 +7011,13 @@
               <a:rPr lang="de-DE" b="1" dirty="0">
                 <a:effectLst/>
               </a:rPr>
-              <a:t>Benutzer</a:t>
+              <a:t>SOLL‑Konzept:</a:t>
             </a:r>
             <a:r>
               <a:rPr lang="de-DE" dirty="0">
                 <a:effectLst/>
               </a:rPr>
-              <a:t> – Personen</a:t>
-            </a:r>
-            <a:endParaRPr lang="de-DE" dirty="0"/>
-          </a:p>
-          <a:p>
-            <a:r>
-              <a:rPr lang="de-DE" b="1" dirty="0">
-                <a:effectLst/>
-              </a:rPr>
-              <a:t>Konto</a:t>
-            </a:r>
-            <a:r>
-              <a:rPr lang="de-DE" dirty="0">
-                <a:effectLst/>
-              </a:rPr>
-              <a:t> – Finanzkonten</a:t>
-            </a:r>
-            <a:endParaRPr lang="de-DE" dirty="0"/>
-          </a:p>
-          <a:p>
-            <a:r>
-              <a:rPr lang="de-DE" b="1" dirty="0" err="1">
-                <a:effectLst/>
-              </a:rPr>
-              <a:t>Ben_Konto</a:t>
-            </a:r>
-            <a:r>
-              <a:rPr lang="de-DE" dirty="0">
-                <a:effectLst/>
-              </a:rPr>
-              <a:t> – Zuordnung Benutzer ↔ Konto</a:t>
-            </a:r>
-            <a:endParaRPr lang="de-DE" dirty="0"/>
-          </a:p>
-          <a:p>
-            <a:r>
-              <a:rPr lang="de-DE" b="1" dirty="0">
-                <a:effectLst/>
-              </a:rPr>
-              <a:t>Transaktion</a:t>
-            </a:r>
-            <a:r>
-              <a:rPr lang="de-DE" dirty="0">
-                <a:effectLst/>
-              </a:rPr>
-              <a:t> – Buchungen</a:t>
-            </a:r>
-            <a:endParaRPr lang="de-DE" dirty="0"/>
-          </a:p>
-          <a:p>
-            <a:r>
-              <a:rPr lang="de-DE" b="1" dirty="0" err="1">
-                <a:effectLst/>
-              </a:rPr>
-              <a:t>Art_transf</a:t>
-            </a:r>
-            <a:r>
-              <a:rPr lang="de-DE" dirty="0">
-                <a:effectLst/>
-              </a:rPr>
-              <a:t> – Art der Transaktion</a:t>
-            </a:r>
-            <a:endParaRPr lang="de-DE" dirty="0"/>
-          </a:p>
-          <a:p>
-            <a:r>
-              <a:rPr lang="de-DE" b="1" dirty="0">
-                <a:effectLst/>
-              </a:rPr>
-              <a:t>Kategorie</a:t>
-            </a:r>
-            <a:r>
-              <a:rPr lang="de-DE" dirty="0">
-                <a:effectLst/>
-              </a:rPr>
-              <a:t> – Klassifizierung</a:t>
+              <a:t> Klare Entitäten &amp; Beziehungen, Erweiterbarkeit</a:t>
             </a:r>
             <a:endParaRPr lang="de-DE" dirty="0"/>
           </a:p>
@@ -3947,7 +7029,7 @@
     </p:spTree>
     <p:extLst>
       <p:ext uri="{BB962C8B-B14F-4D97-AF65-F5344CB8AC3E}">
-        <p14:creationId xmlns:p14="http://schemas.microsoft.com/office/powerpoint/2010/main" val="2816887371"/>
+        <p14:creationId xmlns:p14="http://schemas.microsoft.com/office/powerpoint/2010/main" val="2125346960"/>
       </p:ext>
     </p:extLst>
   </p:cSld>
@@ -3979,7 +7061,7 @@
           <p:cNvPr id="2" name="Titel 1">
             <a:extLst>
               <a:ext uri="{FF2B5EF4-FFF2-40B4-BE49-F238E27FC236}">
-                <a16:creationId xmlns:a16="http://schemas.microsoft.com/office/drawing/2014/main" id="{13AC4C25-FC74-FE40-57A0-4724C5E3B74D}"/>
+                <a16:creationId xmlns:a16="http://schemas.microsoft.com/office/drawing/2014/main" id="{766786E4-CF86-291D-30B7-9F92F5AB771C}"/>
               </a:ext>
             </a:extLst>
           </p:cNvPr>
@@ -3997,106 +7079,462 @@
           <a:p>
             <a:r>
               <a:rPr lang="de-DE" b="1" dirty="0"/>
-              <a:t>Durchführung</a:t>
-            </a:r>
-          </a:p>
-        </p:txBody>
-      </p:sp>
-      <p:sp>
-        <p:nvSpPr>
-          <p:cNvPr id="3" name="Inhaltsplatzhalter 2">
+              <a:t>Zeitplanung</a:t>
+            </a:r>
+            <a:endParaRPr lang="de-DE" dirty="0"/>
+          </a:p>
+        </p:txBody>
+      </p:sp>
+      <p:graphicFrame>
+        <p:nvGraphicFramePr>
+          <p:cNvPr id="4" name="Inhaltsplatzhalter 3">
             <a:extLst>
               <a:ext uri="{FF2B5EF4-FFF2-40B4-BE49-F238E27FC236}">
-                <a16:creationId xmlns:a16="http://schemas.microsoft.com/office/drawing/2014/main" id="{51573440-ACF1-3751-ED6A-FCD5D159FFDA}"/>
+                <a16:creationId xmlns:a16="http://schemas.microsoft.com/office/drawing/2014/main" id="{328C0590-E3E6-98DC-DB97-44D759321130}"/>
               </a:ext>
             </a:extLst>
           </p:cNvPr>
-          <p:cNvSpPr>
-            <a:spLocks noGrp="1"/>
-          </p:cNvSpPr>
+          <p:cNvGraphicFramePr>
+            <a:graphicFrameLocks noGrp="1"/>
+          </p:cNvGraphicFramePr>
           <p:nvPr>
             <p:ph idx="1"/>
           </p:nvPr>
-        </p:nvSpPr>
-        <p:spPr/>
-        <p:txBody>
-          <a:bodyPr/>
-          <a:lstStyle/>
-          <a:p>
-            <a:r>
-              <a:rPr lang="de-DE" b="1" dirty="0">
-                <a:effectLst/>
-              </a:rPr>
-              <a:t>Entwurf:</a:t>
-            </a:r>
-            <a:r>
-              <a:rPr lang="de-DE" dirty="0">
-                <a:effectLst/>
-              </a:rPr>
-              <a:t> Erstellung des ER‑Modells</a:t>
-            </a:r>
-          </a:p>
-          <a:p>
-            <a:endParaRPr lang="de-DE" dirty="0"/>
-          </a:p>
-          <a:p>
-            <a:r>
-              <a:rPr lang="de-DE" b="1" dirty="0">
-                <a:effectLst/>
-              </a:rPr>
-              <a:t>Implementierung:</a:t>
-            </a:r>
-            <a:r>
-              <a:rPr lang="de-DE" dirty="0">
-                <a:effectLst/>
-              </a:rPr>
-              <a:t> SQL‑Tabellen, Fremdschlüssel, Datentypen</a:t>
-            </a:r>
-          </a:p>
-          <a:p>
-            <a:endParaRPr lang="de-DE" dirty="0"/>
-          </a:p>
-          <a:p>
-            <a:r>
-              <a:rPr lang="de-DE" b="1" dirty="0">
-                <a:effectLst/>
-              </a:rPr>
-              <a:t>Tests:</a:t>
-            </a:r>
-            <a:r>
-              <a:rPr lang="de-DE" dirty="0">
-                <a:effectLst/>
-              </a:rPr>
-              <a:t> Einfügen von Testdaten, Prüfung der Beziehungen</a:t>
-            </a:r>
-          </a:p>
-          <a:p>
-            <a:endParaRPr lang="de-DE" dirty="0"/>
-          </a:p>
-          <a:p>
-            <a:r>
-              <a:rPr lang="de-DE" b="1" dirty="0">
-                <a:effectLst/>
-              </a:rPr>
-              <a:t>Probleme &amp; Lösungen:</a:t>
-            </a:r>
-            <a:r>
-              <a:rPr lang="de-DE" dirty="0">
-                <a:effectLst/>
-              </a:rPr>
-              <a:t> n:m‑Beziehungen, Kategorisierung, Transaktionsarten</a:t>
-            </a:r>
-            <a:endParaRPr lang="de-DE" dirty="0"/>
-          </a:p>
-          <a:p>
-            <a:endParaRPr lang="de-DE" dirty="0"/>
-          </a:p>
-        </p:txBody>
-      </p:sp>
+        </p:nvGraphicFramePr>
+        <p:xfrm>
+          <a:off x="677863" y="2318226"/>
+          <a:ext cx="8596312" cy="3566160"/>
+        </p:xfrm>
+        <a:graphic>
+          <a:graphicData uri="http://schemas.openxmlformats.org/drawingml/2006/table">
+            <a:tbl>
+              <a:tblPr/>
+              <a:tblGrid>
+                <a:gridCol w="4298156">
+                  <a:extLst>
+                    <a:ext uri="{9D8B030D-6E8A-4147-A177-3AD203B41FA5}">
+                      <a16:colId xmlns:a16="http://schemas.microsoft.com/office/drawing/2014/main" val="2698197428"/>
+                    </a:ext>
+                  </a:extLst>
+                </a:gridCol>
+                <a:gridCol w="4298156">
+                  <a:extLst>
+                    <a:ext uri="{9D8B030D-6E8A-4147-A177-3AD203B41FA5}">
+                      <a16:colId xmlns:a16="http://schemas.microsoft.com/office/drawing/2014/main" val="1935526243"/>
+                    </a:ext>
+                  </a:extLst>
+                </a:gridCol>
+              </a:tblGrid>
+              <a:tr h="0">
+                <a:tc>
+                  <a:txBody>
+                    <a:bodyPr/>
+                    <a:lstStyle/>
+                    <a:p>
+                      <a:pPr>
+                        <a:buNone/>
+                      </a:pPr>
+                      <a:r>
+                        <a:rPr lang="de-DE" dirty="0"/>
+                        <a:t>Phase</a:t>
+                      </a:r>
+                    </a:p>
+                  </a:txBody>
+                  <a:tcPr anchor="ctr">
+                    <a:lnL>
+                      <a:noFill/>
+                    </a:lnL>
+                    <a:lnR>
+                      <a:noFill/>
+                    </a:lnR>
+                    <a:lnT>
+                      <a:noFill/>
+                    </a:lnT>
+                    <a:lnB>
+                      <a:noFill/>
+                    </a:lnB>
+                    <a:noFill/>
+                  </a:tcPr>
+                </a:tc>
+                <a:tc>
+                  <a:txBody>
+                    <a:bodyPr/>
+                    <a:lstStyle/>
+                    <a:p>
+                      <a:pPr>
+                        <a:buNone/>
+                      </a:pPr>
+                      <a:r>
+                        <a:rPr lang="de-DE"/>
+                        <a:t>Beschreibung</a:t>
+                      </a:r>
+                    </a:p>
+                  </a:txBody>
+                  <a:tcPr anchor="ctr">
+                    <a:lnL>
+                      <a:noFill/>
+                    </a:lnL>
+                    <a:lnR>
+                      <a:noFill/>
+                    </a:lnR>
+                    <a:lnT>
+                      <a:noFill/>
+                    </a:lnT>
+                    <a:lnB>
+                      <a:noFill/>
+                    </a:lnB>
+                    <a:noFill/>
+                  </a:tcPr>
+                </a:tc>
+                <a:extLst>
+                  <a:ext uri="{0D108BD9-81ED-4DB2-BD59-A6C34878D82A}">
+                    <a16:rowId xmlns:a16="http://schemas.microsoft.com/office/drawing/2014/main" val="320961775"/>
+                  </a:ext>
+                </a:extLst>
+              </a:tr>
+              <a:tr h="0">
+                <a:tc>
+                  <a:txBody>
+                    <a:bodyPr/>
+                    <a:lstStyle/>
+                    <a:p>
+                      <a:pPr>
+                        <a:buNone/>
+                      </a:pPr>
+                      <a:r>
+                        <a:rPr lang="de-DE"/>
+                        <a:t>Analyse</a:t>
+                      </a:r>
+                    </a:p>
+                  </a:txBody>
+                  <a:tcPr anchor="ctr">
+                    <a:lnL>
+                      <a:noFill/>
+                    </a:lnL>
+                    <a:lnR>
+                      <a:noFill/>
+                    </a:lnR>
+                    <a:lnT>
+                      <a:noFill/>
+                    </a:lnT>
+                    <a:lnB>
+                      <a:noFill/>
+                    </a:lnB>
+                    <a:noFill/>
+                  </a:tcPr>
+                </a:tc>
+                <a:tc>
+                  <a:txBody>
+                    <a:bodyPr/>
+                    <a:lstStyle/>
+                    <a:p>
+                      <a:pPr>
+                        <a:buNone/>
+                      </a:pPr>
+                      <a:r>
+                        <a:rPr lang="de-DE"/>
+                        <a:t>Anforderungen sammeln und Projektziel definieren</a:t>
+                      </a:r>
+                    </a:p>
+                  </a:txBody>
+                  <a:tcPr anchor="ctr">
+                    <a:lnL>
+                      <a:noFill/>
+                    </a:lnL>
+                    <a:lnR>
+                      <a:noFill/>
+                    </a:lnR>
+                    <a:lnT>
+                      <a:noFill/>
+                    </a:lnT>
+                    <a:lnB>
+                      <a:noFill/>
+                    </a:lnB>
+                    <a:noFill/>
+                  </a:tcPr>
+                </a:tc>
+                <a:extLst>
+                  <a:ext uri="{0D108BD9-81ED-4DB2-BD59-A6C34878D82A}">
+                    <a16:rowId xmlns:a16="http://schemas.microsoft.com/office/drawing/2014/main" val="3228784753"/>
+                  </a:ext>
+                </a:extLst>
+              </a:tr>
+              <a:tr h="0">
+                <a:tc>
+                  <a:txBody>
+                    <a:bodyPr/>
+                    <a:lstStyle/>
+                    <a:p>
+                      <a:pPr>
+                        <a:buNone/>
+                      </a:pPr>
+                      <a:r>
+                        <a:rPr lang="de-DE"/>
+                        <a:t>Entwurf</a:t>
+                      </a:r>
+                    </a:p>
+                  </a:txBody>
+                  <a:tcPr anchor="ctr">
+                    <a:lnL>
+                      <a:noFill/>
+                    </a:lnL>
+                    <a:lnR>
+                      <a:noFill/>
+                    </a:lnR>
+                    <a:lnT>
+                      <a:noFill/>
+                    </a:lnT>
+                    <a:lnB>
+                      <a:noFill/>
+                    </a:lnB>
+                    <a:noFill/>
+                  </a:tcPr>
+                </a:tc>
+                <a:tc>
+                  <a:txBody>
+                    <a:bodyPr/>
+                    <a:lstStyle/>
+                    <a:p>
+                      <a:pPr>
+                        <a:buNone/>
+                      </a:pPr>
+                      <a:r>
+                        <a:rPr lang="de-DE"/>
+                        <a:t>ER-Diagramm und Tabellenstruktur erstellen</a:t>
+                      </a:r>
+                    </a:p>
+                  </a:txBody>
+                  <a:tcPr anchor="ctr">
+                    <a:lnL>
+                      <a:noFill/>
+                    </a:lnL>
+                    <a:lnR>
+                      <a:noFill/>
+                    </a:lnR>
+                    <a:lnT>
+                      <a:noFill/>
+                    </a:lnT>
+                    <a:lnB>
+                      <a:noFill/>
+                    </a:lnB>
+                    <a:noFill/>
+                  </a:tcPr>
+                </a:tc>
+                <a:extLst>
+                  <a:ext uri="{0D108BD9-81ED-4DB2-BD59-A6C34878D82A}">
+                    <a16:rowId xmlns:a16="http://schemas.microsoft.com/office/drawing/2014/main" val="153149983"/>
+                  </a:ext>
+                </a:extLst>
+              </a:tr>
+              <a:tr h="0">
+                <a:tc>
+                  <a:txBody>
+                    <a:bodyPr/>
+                    <a:lstStyle/>
+                    <a:p>
+                      <a:pPr>
+                        <a:buNone/>
+                      </a:pPr>
+                      <a:r>
+                        <a:rPr lang="de-DE"/>
+                        <a:t>Implementierung</a:t>
+                      </a:r>
+                    </a:p>
+                  </a:txBody>
+                  <a:tcPr anchor="ctr">
+                    <a:lnL>
+                      <a:noFill/>
+                    </a:lnL>
+                    <a:lnR>
+                      <a:noFill/>
+                    </a:lnR>
+                    <a:lnT>
+                      <a:noFill/>
+                    </a:lnT>
+                    <a:lnB>
+                      <a:noFill/>
+                    </a:lnB>
+                    <a:noFill/>
+                  </a:tcPr>
+                </a:tc>
+                <a:tc>
+                  <a:txBody>
+                    <a:bodyPr/>
+                    <a:lstStyle/>
+                    <a:p>
+                      <a:pPr>
+                        <a:buNone/>
+                      </a:pPr>
+                      <a:r>
+                        <a:rPr lang="de-DE"/>
+                        <a:t>Datenbank und Tabellen mit SQL erstellen</a:t>
+                      </a:r>
+                    </a:p>
+                  </a:txBody>
+                  <a:tcPr anchor="ctr">
+                    <a:lnL>
+                      <a:noFill/>
+                    </a:lnL>
+                    <a:lnR>
+                      <a:noFill/>
+                    </a:lnR>
+                    <a:lnT>
+                      <a:noFill/>
+                    </a:lnT>
+                    <a:lnB>
+                      <a:noFill/>
+                    </a:lnB>
+                    <a:noFill/>
+                  </a:tcPr>
+                </a:tc>
+                <a:extLst>
+                  <a:ext uri="{0D108BD9-81ED-4DB2-BD59-A6C34878D82A}">
+                    <a16:rowId xmlns:a16="http://schemas.microsoft.com/office/drawing/2014/main" val="3905859100"/>
+                  </a:ext>
+                </a:extLst>
+              </a:tr>
+              <a:tr h="0">
+                <a:tc>
+                  <a:txBody>
+                    <a:bodyPr/>
+                    <a:lstStyle/>
+                    <a:p>
+                      <a:pPr>
+                        <a:buNone/>
+                      </a:pPr>
+                      <a:r>
+                        <a:rPr lang="de-DE"/>
+                        <a:t>Test</a:t>
+                      </a:r>
+                    </a:p>
+                  </a:txBody>
+                  <a:tcPr anchor="ctr">
+                    <a:lnL>
+                      <a:noFill/>
+                    </a:lnL>
+                    <a:lnR>
+                      <a:noFill/>
+                    </a:lnR>
+                    <a:lnT>
+                      <a:noFill/>
+                    </a:lnT>
+                    <a:lnB>
+                      <a:noFill/>
+                    </a:lnB>
+                    <a:noFill/>
+                  </a:tcPr>
+                </a:tc>
+                <a:tc>
+                  <a:txBody>
+                    <a:bodyPr/>
+                    <a:lstStyle/>
+                    <a:p>
+                      <a:pPr>
+                        <a:buNone/>
+                      </a:pPr>
+                      <a:r>
+                        <a:rPr lang="de-DE"/>
+                        <a:t>Testdaten einfügen und SQL-Abfragen überprüfen</a:t>
+                      </a:r>
+                    </a:p>
+                  </a:txBody>
+                  <a:tcPr anchor="ctr">
+                    <a:lnL>
+                      <a:noFill/>
+                    </a:lnL>
+                    <a:lnR>
+                      <a:noFill/>
+                    </a:lnR>
+                    <a:lnT>
+                      <a:noFill/>
+                    </a:lnT>
+                    <a:lnB>
+                      <a:noFill/>
+                    </a:lnB>
+                    <a:noFill/>
+                  </a:tcPr>
+                </a:tc>
+                <a:extLst>
+                  <a:ext uri="{0D108BD9-81ED-4DB2-BD59-A6C34878D82A}">
+                    <a16:rowId xmlns:a16="http://schemas.microsoft.com/office/drawing/2014/main" val="3997438758"/>
+                  </a:ext>
+                </a:extLst>
+              </a:tr>
+              <a:tr h="0">
+                <a:tc>
+                  <a:txBody>
+                    <a:bodyPr/>
+                    <a:lstStyle/>
+                    <a:p>
+                      <a:pPr>
+                        <a:buNone/>
+                      </a:pPr>
+                      <a:r>
+                        <a:rPr lang="de-DE"/>
+                        <a:t>Dokumentation</a:t>
+                      </a:r>
+                    </a:p>
+                  </a:txBody>
+                  <a:tcPr anchor="ctr">
+                    <a:lnL>
+                      <a:noFill/>
+                    </a:lnL>
+                    <a:lnR>
+                      <a:noFill/>
+                    </a:lnR>
+                    <a:lnT>
+                      <a:noFill/>
+                    </a:lnT>
+                    <a:lnB>
+                      <a:noFill/>
+                    </a:lnB>
+                    <a:noFill/>
+                  </a:tcPr>
+                </a:tc>
+                <a:tc>
+                  <a:txBody>
+                    <a:bodyPr/>
+                    <a:lstStyle/>
+                    <a:p>
+                      <a:pPr>
+                        <a:buNone/>
+                      </a:pPr>
+                      <a:r>
+                        <a:rPr lang="de-DE" dirty="0"/>
+                        <a:t>Präsentation und Projektdokumentation erstellen</a:t>
+                      </a:r>
+                    </a:p>
+                  </a:txBody>
+                  <a:tcPr anchor="ctr">
+                    <a:lnL>
+                      <a:noFill/>
+                    </a:lnL>
+                    <a:lnR>
+                      <a:noFill/>
+                    </a:lnR>
+                    <a:lnT>
+                      <a:noFill/>
+                    </a:lnT>
+                    <a:lnB>
+                      <a:noFill/>
+                    </a:lnB>
+                    <a:noFill/>
+                  </a:tcPr>
+                </a:tc>
+                <a:extLst>
+                  <a:ext uri="{0D108BD9-81ED-4DB2-BD59-A6C34878D82A}">
+                    <a16:rowId xmlns:a16="http://schemas.microsoft.com/office/drawing/2014/main" val="3482686116"/>
+                  </a:ext>
+                </a:extLst>
+              </a:tr>
+            </a:tbl>
+          </a:graphicData>
+        </a:graphic>
+      </p:graphicFrame>
     </p:spTree>
     <p:extLst>
       <p:ext uri="{BB962C8B-B14F-4D97-AF65-F5344CB8AC3E}">
-        <p14:creationId xmlns:p14="http://schemas.microsoft.com/office/powerpoint/2010/main" val="2102390424"/>
+        <p14:creationId xmlns:p14="http://schemas.microsoft.com/office/powerpoint/2010/main" val="1297286328"/>
       </p:ext>
     </p:extLst>
   </p:cSld>
@@ -4125,10 +7563,10 @@
       </p:grpSpPr>
       <p:sp>
         <p:nvSpPr>
-          <p:cNvPr id="2" name="Titel 1">
+          <p:cNvPr id="3" name="Inhaltsplatzhalter 2">
             <a:extLst>
               <a:ext uri="{FF2B5EF4-FFF2-40B4-BE49-F238E27FC236}">
-                <a16:creationId xmlns:a16="http://schemas.microsoft.com/office/drawing/2014/main" id="{7894FEFE-59F5-DD80-43D0-A9B9C78D6D8A}"/>
+                <a16:creationId xmlns:a16="http://schemas.microsoft.com/office/drawing/2014/main" id="{65B47E23-89AA-C787-1763-B9FEADBE21C2}"/>
               </a:ext>
             </a:extLst>
           </p:cNvPr>
@@ -4136,50 +7574,60 @@
             <a:spLocks noGrp="1"/>
           </p:cNvSpPr>
           <p:nvPr>
-            <p:ph type="title"/>
-          </p:nvPr>
-        </p:nvSpPr>
-        <p:spPr/>
+            <p:ph idx="1"/>
+          </p:nvPr>
+        </p:nvSpPr>
+        <p:spPr>
+          <a:xfrm>
+            <a:off x="677334" y="719667"/>
+            <a:ext cx="8596668" cy="5321695"/>
+          </a:xfrm>
+        </p:spPr>
         <p:txBody>
           <a:bodyPr/>
           <a:lstStyle/>
           <a:p>
+            <a:pPr marL="0" indent="0">
+              <a:buNone/>
+            </a:pPr>
             <a:r>
               <a:rPr lang="de-DE" b="1" dirty="0"/>
-              <a:t>Relation-Model</a:t>
-            </a:r>
-          </a:p>
-        </p:txBody>
-      </p:sp>
-      <p:sp>
-        <p:nvSpPr>
-          <p:cNvPr id="3" name="Inhaltsplatzhalter 2">
-            <a:extLst>
-              <a:ext uri="{FF2B5EF4-FFF2-40B4-BE49-F238E27FC236}">
-                <a16:creationId xmlns:a16="http://schemas.microsoft.com/office/drawing/2014/main" id="{EAD6F8E8-667D-5CB0-F34C-CF98AABAB245}"/>
-              </a:ext>
-            </a:extLst>
-          </p:cNvPr>
-          <p:cNvSpPr>
-            <a:spLocks noGrp="1"/>
-          </p:cNvSpPr>
-          <p:nvPr>
-            <p:ph idx="1"/>
-          </p:nvPr>
-        </p:nvSpPr>
-        <p:spPr/>
-        <p:txBody>
-          <a:bodyPr/>
-          <a:lstStyle/>
-          <a:p>
-            <a:endParaRPr lang="de-DE"/>
+              <a:t>IST-Analyse</a:t>
+            </a:r>
+          </a:p>
+          <a:p>
+            <a:r>
+              <a:rPr lang="de-DE" dirty="0"/>
+              <a:t>Vor dem Projekt gab es keine strukturierte Datenbank zur Verwaltung der Finanzdaten. Einnahmen und Ausgaben wurden manuell oder in einfachen Tabellen erfasst. Dadurch war die Auswertung zeitaufwendig und fehleranfällig.</a:t>
+            </a:r>
+          </a:p>
+          <a:p>
+            <a:endParaRPr lang="de-DE" dirty="0"/>
+          </a:p>
+          <a:p>
+            <a:pPr marL="0" indent="0">
+              <a:buNone/>
+            </a:pPr>
+            <a:r>
+              <a:rPr lang="de-DE" b="1" dirty="0"/>
+              <a:t>SOLL-Konzept</a:t>
+            </a:r>
+          </a:p>
+          <a:p>
+            <a:r>
+              <a:rPr lang="de-DE" dirty="0"/>
+              <a:t>Es wird eine relationale Datenbank entwickelt, die Benutzer, Konten, Transaktionen, Kategorien und Transferarten miteinander verknüpft. Durch Primär- und Fremdschlüssel werden die Daten konsistent gespeichert. Das System ist übersichtlich aufgebaut und kann später um weitere Funktionen, wie Budgetplanung oder Berichte, erweitert werden.</a:t>
+            </a:r>
+          </a:p>
+          <a:p>
+            <a:endParaRPr lang="de-DE" dirty="0"/>
           </a:p>
         </p:txBody>
       </p:sp>
     </p:spTree>
     <p:extLst>
       <p:ext uri="{BB962C8B-B14F-4D97-AF65-F5344CB8AC3E}">
-        <p14:creationId xmlns:p14="http://schemas.microsoft.com/office/powerpoint/2010/main" val="708640751"/>
+        <p14:creationId xmlns:p14="http://schemas.microsoft.com/office/powerpoint/2010/main" val="1005524172"/>
       </p:ext>
     </p:extLst>
   </p:cSld>
@@ -4211,7 +7659,7 @@
           <p:cNvPr id="2" name="Titel 1">
             <a:extLst>
               <a:ext uri="{FF2B5EF4-FFF2-40B4-BE49-F238E27FC236}">
-                <a16:creationId xmlns:a16="http://schemas.microsoft.com/office/drawing/2014/main" id="{78FECC5E-069A-6771-42BA-044FEBBD8932}"/>
+                <a16:creationId xmlns:a16="http://schemas.microsoft.com/office/drawing/2014/main" id="{BE989C0A-1945-2090-7D94-42215BF21496}"/>
               </a:ext>
             </a:extLst>
           </p:cNvPr>
@@ -4228,49 +7676,159 @@
           <a:lstStyle/>
           <a:p>
             <a:r>
+              <a:rPr lang="de-DE" dirty="0"/>
+              <a:t>Entwurf der Datenbank</a:t>
+            </a:r>
+            <a:br>
               <a:rPr lang="de-DE" b="1" dirty="0"/>
-              <a:t>ER‑Modell</a:t>
-            </a:r>
-            <a:endParaRPr lang="de-DE" dirty="0"/>
-          </a:p>
-        </p:txBody>
-      </p:sp>
-      <p:pic>
-        <p:nvPicPr>
-          <p:cNvPr id="4" name="Inhaltsplatzhalter 3" descr="budget_relmodell.png">
+            </a:br>
+            <a:endParaRPr lang="de-DE" b="1" dirty="0"/>
+          </a:p>
+        </p:txBody>
+      </p:sp>
+      <p:sp>
+        <p:nvSpPr>
+          <p:cNvPr id="3" name="Inhaltsplatzhalter 2">
             <a:extLst>
               <a:ext uri="{FF2B5EF4-FFF2-40B4-BE49-F238E27FC236}">
-                <a16:creationId xmlns:a16="http://schemas.microsoft.com/office/drawing/2014/main" id="{F4474953-C720-7D09-99B8-E965AE0ABC57}"/>
+                <a16:creationId xmlns:a16="http://schemas.microsoft.com/office/drawing/2014/main" id="{FBF8C531-79F1-DF5A-B384-94A2967A2DD4}"/>
               </a:ext>
             </a:extLst>
           </p:cNvPr>
-          <p:cNvPicPr>
-            <a:picLocks noGrp="1" noChangeAspect="1"/>
-          </p:cNvPicPr>
+          <p:cNvSpPr>
+            <a:spLocks noGrp="1"/>
+          </p:cNvSpPr>
           <p:nvPr>
             <p:ph idx="1"/>
           </p:nvPr>
-        </p:nvPicPr>
-        <p:blipFill>
-          <a:blip r:embed="rId2"/>
-          <a:stretch>
-            <a:fillRect/>
-          </a:stretch>
-        </p:blipFill>
-        <p:spPr>
-          <a:xfrm>
-            <a:off x="2545977" y="1798265"/>
-            <a:ext cx="5806610" cy="4351338"/>
-          </a:xfrm>
-          <a:prstGeom prst="rect">
-            <a:avLst/>
-          </a:prstGeom>
-        </p:spPr>
-      </p:pic>
+        </p:nvSpPr>
+        <p:spPr/>
+        <p:txBody>
+          <a:bodyPr>
+            <a:normAutofit/>
+          </a:bodyPr>
+          <a:lstStyle/>
+          <a:p>
+            <a:r>
+              <a:rPr lang="de-DE" b="1" dirty="0"/>
+              <a:t>ER‑Modell</a:t>
+            </a:r>
+          </a:p>
+          <a:p>
+            <a:r>
+              <a:rPr lang="de-DE" b="1" dirty="0"/>
+              <a:t>Relation-Model</a:t>
+            </a:r>
+            <a:endParaRPr lang="de-DE" dirty="0"/>
+          </a:p>
+          <a:p>
+            <a:pPr marL="0" indent="0">
+              <a:buNone/>
+            </a:pPr>
+            <a:r>
+              <a:rPr lang="de-DE" dirty="0"/>
+              <a:t>Entitäten:</a:t>
+            </a:r>
+          </a:p>
+          <a:p>
+            <a:r>
+              <a:rPr lang="de-DE" b="1" dirty="0">
+                <a:effectLst/>
+              </a:rPr>
+              <a:t>Benutzer</a:t>
+            </a:r>
+            <a:r>
+              <a:rPr lang="de-DE" dirty="0">
+                <a:effectLst/>
+              </a:rPr>
+              <a:t> – Personen</a:t>
+            </a:r>
+            <a:endParaRPr lang="de-DE" dirty="0"/>
+          </a:p>
+          <a:p>
+            <a:r>
+              <a:rPr lang="de-DE" b="1" dirty="0">
+                <a:effectLst/>
+              </a:rPr>
+              <a:t>Konto</a:t>
+            </a:r>
+            <a:r>
+              <a:rPr lang="de-DE" dirty="0">
+                <a:effectLst/>
+              </a:rPr>
+              <a:t> – Finanzkonten</a:t>
+            </a:r>
+            <a:endParaRPr lang="de-DE" dirty="0"/>
+          </a:p>
+          <a:p>
+            <a:r>
+              <a:rPr lang="de-DE" b="1" dirty="0" err="1">
+                <a:effectLst/>
+              </a:rPr>
+              <a:t>Ben_Konto</a:t>
+            </a:r>
+            <a:r>
+              <a:rPr lang="de-DE" dirty="0">
+                <a:effectLst/>
+              </a:rPr>
+              <a:t> – Zuordnung Benutzer ↔ Konto</a:t>
+            </a:r>
+            <a:endParaRPr lang="de-DE" dirty="0"/>
+          </a:p>
+          <a:p>
+            <a:r>
+              <a:rPr lang="de-DE" b="1" dirty="0">
+                <a:effectLst/>
+              </a:rPr>
+              <a:t>Transaktion</a:t>
+            </a:r>
+            <a:r>
+              <a:rPr lang="de-DE" dirty="0">
+                <a:effectLst/>
+              </a:rPr>
+              <a:t> – Buchungen</a:t>
+            </a:r>
+            <a:endParaRPr lang="de-DE" dirty="0"/>
+          </a:p>
+          <a:p>
+            <a:r>
+              <a:rPr lang="de-DE" b="1" dirty="0" err="1">
+                <a:effectLst/>
+              </a:rPr>
+              <a:t>Art_transf</a:t>
+            </a:r>
+            <a:r>
+              <a:rPr lang="de-DE" dirty="0">
+                <a:effectLst/>
+              </a:rPr>
+              <a:t> – Art der Transaktion</a:t>
+            </a:r>
+            <a:endParaRPr lang="de-DE" dirty="0"/>
+          </a:p>
+          <a:p>
+            <a:r>
+              <a:rPr lang="de-DE" b="1" dirty="0">
+                <a:effectLst/>
+              </a:rPr>
+              <a:t>Kategorie</a:t>
+            </a:r>
+            <a:r>
+              <a:rPr lang="de-DE" dirty="0">
+                <a:effectLst/>
+              </a:rPr>
+              <a:t> – Klassifizierung</a:t>
+            </a:r>
+            <a:endParaRPr lang="de-DE" dirty="0"/>
+          </a:p>
+          <a:p>
+            <a:endParaRPr lang="de-DE" dirty="0"/>
+          </a:p>
+        </p:txBody>
+      </p:sp>
     </p:spTree>
     <p:extLst>
       <p:ext uri="{BB962C8B-B14F-4D97-AF65-F5344CB8AC3E}">
-        <p14:creationId xmlns:p14="http://schemas.microsoft.com/office/powerpoint/2010/main" val="2449178151"/>
+        <p14:creationId xmlns:p14="http://schemas.microsoft.com/office/powerpoint/2010/main" val="2816887371"/>
       </p:ext>
     </p:extLst>
   </p:cSld>
@@ -4302,7 +7860,7 @@
           <p:cNvPr id="2" name="Titel 1">
             <a:extLst>
               <a:ext uri="{FF2B5EF4-FFF2-40B4-BE49-F238E27FC236}">
-                <a16:creationId xmlns:a16="http://schemas.microsoft.com/office/drawing/2014/main" id="{B2D26E3D-40C8-FE98-74EB-B2676785691A}"/>
+                <a16:creationId xmlns:a16="http://schemas.microsoft.com/office/drawing/2014/main" id="{13AC4C25-FC74-FE40-57A0-4724C5E3B74D}"/>
               </a:ext>
             </a:extLst>
           </p:cNvPr>
@@ -4320,7 +7878,15 @@
           <a:p>
             <a:r>
               <a:rPr lang="de-DE" b="1" dirty="0"/>
-              <a:t>Abschluss</a:t>
+              <a:t>Durchführung: </a:t>
+            </a:r>
+            <a:r>
+              <a:rPr lang="de-DE" b="1" dirty="0">
+                <a:highlight>
+                  <a:srgbClr val="FF0000"/>
+                </a:highlight>
+              </a:rPr>
+              <a:t>ich glaube braucht nicht</a:t>
             </a:r>
           </a:p>
         </p:txBody>
@@ -4330,7 +7896,7 @@
           <p:cNvPr id="3" name="Inhaltsplatzhalter 2">
             <a:extLst>
               <a:ext uri="{FF2B5EF4-FFF2-40B4-BE49-F238E27FC236}">
-                <a16:creationId xmlns:a16="http://schemas.microsoft.com/office/drawing/2014/main" id="{B750BB43-3080-C3B9-A427-C9711C4A4633}"/>
+                <a16:creationId xmlns:a16="http://schemas.microsoft.com/office/drawing/2014/main" id="{51573440-ACF1-3751-ED6A-FCD5D159FFDA}"/>
               </a:ext>
             </a:extLst>
           </p:cNvPr>
@@ -4350,13 +7916,13 @@
               <a:rPr lang="de-DE" b="1" dirty="0">
                 <a:effectLst/>
               </a:rPr>
-              <a:t>Zeitvergleich:</a:t>
+              <a:t>Entwurf:</a:t>
             </a:r>
             <a:r>
               <a:rPr lang="de-DE" dirty="0">
                 <a:effectLst/>
               </a:rPr>
-              <a:t> Planung weitgehend eingehalten</a:t>
+              <a:t> Erstellung des ER‑Modells</a:t>
             </a:r>
           </a:p>
           <a:p>
@@ -4367,13 +7933,13 @@
               <a:rPr lang="de-DE" b="1" dirty="0">
                 <a:effectLst/>
               </a:rPr>
-              <a:t>Fazit:</a:t>
+              <a:t>Implementierung:</a:t>
             </a:r>
             <a:r>
               <a:rPr lang="de-DE" dirty="0">
                 <a:effectLst/>
               </a:rPr>
-              <a:t> Funktionales, erweiterbares Datenbankmodell</a:t>
+              <a:t> SQL‑Tabellen, Fremdschlüssel, Datentypen</a:t>
             </a:r>
           </a:p>
           <a:p>
@@ -4384,13 +7950,30 @@
               <a:rPr lang="de-DE" b="1" dirty="0">
                 <a:effectLst/>
               </a:rPr>
-              <a:t>Ausblick:</a:t>
+              <a:t>Tests:</a:t>
             </a:r>
             <a:r>
               <a:rPr lang="de-DE" dirty="0">
                 <a:effectLst/>
               </a:rPr>
-              <a:t> Budgetplanung, Statistiken, Web‑Frontend möglich</a:t>
+              <a:t> Einfügen von Testdaten, Prüfung der Beziehungen</a:t>
+            </a:r>
+          </a:p>
+          <a:p>
+            <a:endParaRPr lang="de-DE" dirty="0"/>
+          </a:p>
+          <a:p>
+            <a:r>
+              <a:rPr lang="de-DE" b="1" dirty="0">
+                <a:effectLst/>
+              </a:rPr>
+              <a:t>Probleme &amp; Lösungen:</a:t>
+            </a:r>
+            <a:r>
+              <a:rPr lang="de-DE" dirty="0">
+                <a:effectLst/>
+              </a:rPr>
+              <a:t> n:m‑Beziehungen, Kategorisierung, Transaktionsarten</a:t>
             </a:r>
             <a:endParaRPr lang="de-DE" dirty="0"/>
           </a:p>
@@ -4402,7 +7985,7 @@
     </p:spTree>
     <p:extLst>
       <p:ext uri="{BB962C8B-B14F-4D97-AF65-F5344CB8AC3E}">
-        <p14:creationId xmlns:p14="http://schemas.microsoft.com/office/powerpoint/2010/main" val="890010665"/>
+        <p14:creationId xmlns:p14="http://schemas.microsoft.com/office/powerpoint/2010/main" val="2102390424"/>
       </p:ext>
     </p:extLst>
   </p:cSld>
@@ -4434,7 +8017,7 @@
           <p:cNvPr id="2" name="Titel 1">
             <a:extLst>
               <a:ext uri="{FF2B5EF4-FFF2-40B4-BE49-F238E27FC236}">
-                <a16:creationId xmlns:a16="http://schemas.microsoft.com/office/drawing/2014/main" id="{E19FBAA6-92B9-0023-B7D7-7C8C65DE0BD5}"/>
+                <a16:creationId xmlns:a16="http://schemas.microsoft.com/office/drawing/2014/main" id="{7894FEFE-59F5-DD80-43D0-A9B9C78D6D8A}"/>
               </a:ext>
             </a:extLst>
           </p:cNvPr>
@@ -4450,39 +8033,49 @@
           <a:bodyPr/>
           <a:lstStyle/>
           <a:p>
-            <a:endParaRPr lang="de-DE"/>
-          </a:p>
-        </p:txBody>
-      </p:sp>
-      <p:sp>
-        <p:nvSpPr>
-          <p:cNvPr id="3" name="Inhaltsplatzhalter 2">
+            <a:r>
+              <a:rPr lang="de-DE" b="1" dirty="0"/>
+              <a:t>Relation-Model</a:t>
+            </a:r>
+          </a:p>
+        </p:txBody>
+      </p:sp>
+      <p:pic>
+        <p:nvPicPr>
+          <p:cNvPr id="5" name="Inhaltsplatzhalter 4">
             <a:extLst>
               <a:ext uri="{FF2B5EF4-FFF2-40B4-BE49-F238E27FC236}">
-                <a16:creationId xmlns:a16="http://schemas.microsoft.com/office/drawing/2014/main" id="{43C5B058-8746-DEA7-5160-784453CF3890}"/>
+                <a16:creationId xmlns:a16="http://schemas.microsoft.com/office/drawing/2014/main" id="{227C916E-E282-87B5-33E9-15CAE200FA16}"/>
               </a:ext>
             </a:extLst>
           </p:cNvPr>
-          <p:cNvSpPr>
-            <a:spLocks noGrp="1"/>
-          </p:cNvSpPr>
+          <p:cNvPicPr>
+            <a:picLocks noGrp="1" noChangeAspect="1"/>
+          </p:cNvPicPr>
           <p:nvPr>
             <p:ph idx="1"/>
           </p:nvPr>
-        </p:nvSpPr>
-        <p:spPr/>
-        <p:txBody>
-          <a:bodyPr/>
-          <a:lstStyle/>
-          <a:p>
-            <a:endParaRPr lang="de-DE"/>
-          </a:p>
-        </p:txBody>
-      </p:sp>
+        </p:nvPicPr>
+        <p:blipFill>
+          <a:blip r:embed="rId2"/>
+          <a:stretch>
+            <a:fillRect/>
+          </a:stretch>
+        </p:blipFill>
+        <p:spPr>
+          <a:xfrm>
+            <a:off x="2991264" y="2160588"/>
+            <a:ext cx="3969509" cy="3881437"/>
+          </a:xfrm>
+          <a:prstGeom prst="rect">
+            <a:avLst/>
+          </a:prstGeom>
+        </p:spPr>
+      </p:pic>
     </p:spTree>
     <p:extLst>
       <p:ext uri="{BB962C8B-B14F-4D97-AF65-F5344CB8AC3E}">
-        <p14:creationId xmlns:p14="http://schemas.microsoft.com/office/powerpoint/2010/main" val="2486593255"/>
+        <p14:creationId xmlns:p14="http://schemas.microsoft.com/office/powerpoint/2010/main" val="708640751"/>
       </p:ext>
     </p:extLst>
   </p:cSld>
@@ -4493,9 +8086,9 @@
 </file>
 
 <file path=ppt/theme/theme1.xml><?xml version="1.0" encoding="utf-8"?>
-<a:theme xmlns:a="http://schemas.openxmlformats.org/drawingml/2006/main" name="Office">
+<a:theme xmlns:a="http://schemas.openxmlformats.org/drawingml/2006/main" name="Facette">
   <a:themeElements>
-    <a:clrScheme name="Office">
+    <a:clrScheme name="Facette">
       <a:dk1>
         <a:sysClr val="windowText" lastClr="000000"/>
       </a:dk1>
@@ -4503,52 +8096,52 @@
         <a:sysClr val="window" lastClr="FFFFFF"/>
       </a:lt1>
       <a:dk2>
-        <a:srgbClr val="0E2841"/>
+        <a:srgbClr val="2C3C43"/>
       </a:dk2>
       <a:lt2>
-        <a:srgbClr val="E8E8E8"/>
+        <a:srgbClr val="EBEBEB"/>
       </a:lt2>
       <a:accent1>
-        <a:srgbClr val="156082"/>
+        <a:srgbClr val="5FCBEF"/>
       </a:accent1>
       <a:accent2>
-        <a:srgbClr val="E97132"/>
+        <a:srgbClr val="2E83C3"/>
       </a:accent2>
       <a:accent3>
-        <a:srgbClr val="196B24"/>
+        <a:srgbClr val="42D0A2"/>
       </a:accent3>
       <a:accent4>
-        <a:srgbClr val="0F9ED5"/>
+        <a:srgbClr val="2E946B"/>
       </a:accent4>
       <a:accent5>
-        <a:srgbClr val="A02B93"/>
+        <a:srgbClr val="42B051"/>
       </a:accent5>
       <a:accent6>
-        <a:srgbClr val="4EA72E"/>
+        <a:srgbClr val="96D141"/>
       </a:accent6>
       <a:hlink>
-        <a:srgbClr val="467886"/>
+        <a:srgbClr val="3FCDE7"/>
       </a:hlink>
       <a:folHlink>
-        <a:srgbClr val="96607D"/>
+        <a:srgbClr val="A9D3E1"/>
       </a:folHlink>
     </a:clrScheme>
-    <a:fontScheme name="Office">
+    <a:fontScheme name="Facette">
       <a:majorFont>
-        <a:latin typeface="Aptos Display" panose="02110004020202020204"/>
+        <a:latin typeface="Trebuchet MS" panose="020B0603020202020204"/>
         <a:ea typeface=""/>
         <a:cs typeface=""/>
-        <a:font script="Jpan" typeface="游ゴシック Light"/>
+        <a:font script="Jpan" typeface="メイリオ"/>
         <a:font script="Hang" typeface="맑은 고딕"/>
-        <a:font script="Hans" typeface="等线 Light"/>
-        <a:font script="Hant" typeface="新細明體"/>
-        <a:font script="Arab" typeface="Times New Roman"/>
-        <a:font script="Hebr" typeface="Times New Roman"/>
-        <a:font script="Thai" typeface="Angsana New"/>
+        <a:font script="Hans" typeface="方正姚体"/>
+        <a:font script="Hant" typeface="微軟正黑體"/>
+        <a:font script="Arab" typeface="Tahoma"/>
+        <a:font script="Hebr" typeface="Arial"/>
+        <a:font script="Thai" typeface="Cordia New"/>
         <a:font script="Ethi" typeface="Nyala"/>
         <a:font script="Beng" typeface="Vrinda"/>
         <a:font script="Gujr" typeface="Shruti"/>
-        <a:font script="Khmr" typeface="MoolBoran"/>
+        <a:font script="Khmr" typeface="DaunPenh"/>
         <a:font script="Knda" typeface="Tunga"/>
         <a:font script="Guru" typeface="Raavi"/>
         <a:font script="Cans" typeface="Euphemia"/>
@@ -4565,38 +8158,21 @@
         <a:font script="Laoo" typeface="DokChampa"/>
         <a:font script="Sinh" typeface="Iskoola Pota"/>
         <a:font script="Mong" typeface="Mongolian Baiti"/>
-        <a:font script="Viet" typeface="Times New Roman"/>
+        <a:font script="Viet" typeface="Tahoma"/>
         <a:font script="Uigh" typeface="Microsoft Uighur"/>
         <a:font script="Geor" typeface="Sylfaen"/>
-        <a:font script="Armn" typeface="Arial"/>
-        <a:font script="Bugi" typeface="Leelawadee UI"/>
-        <a:font script="Bopo" typeface="Microsoft JhengHei"/>
-        <a:font script="Java" typeface="Javanese Text"/>
-        <a:font script="Lisu" typeface="Segoe UI"/>
-        <a:font script="Mymr" typeface="Myanmar Text"/>
-        <a:font script="Nkoo" typeface="Ebrima"/>
-        <a:font script="Olck" typeface="Nirmala UI"/>
-        <a:font script="Osma" typeface="Ebrima"/>
-        <a:font script="Phag" typeface="Phagspa"/>
-        <a:font script="Syrn" typeface="Estrangelo Edessa"/>
-        <a:font script="Syrj" typeface="Estrangelo Edessa"/>
-        <a:font script="Syre" typeface="Estrangelo Edessa"/>
-        <a:font script="Sora" typeface="Nirmala UI"/>
-        <a:font script="Tale" typeface="Microsoft Tai Le"/>
-        <a:font script="Talu" typeface="Microsoft New Tai Lue"/>
-        <a:font script="Tfng" typeface="Ebrima"/>
       </a:majorFont>
       <a:minorFont>
-        <a:latin typeface="Aptos" panose="02110004020202020204"/>
+        <a:latin typeface="Trebuchet MS" panose="020B0603020202020204"/>
         <a:ea typeface=""/>
         <a:cs typeface=""/>
-        <a:font script="Jpan" typeface="游ゴシック"/>
-        <a:font script="Hang" typeface="맑은 고딕"/>
-        <a:font script="Hans" typeface="等线"/>
-        <a:font script="Hant" typeface="新細明體"/>
-        <a:font script="Arab" typeface="Arial"/>
-        <a:font script="Hebr" typeface="Arial"/>
-        <a:font script="Thai" typeface="Cordia New"/>
+        <a:font script="Jpan" typeface="メイリオ"/>
+        <a:font script="Hang" typeface="HY그래픽M"/>
+        <a:font script="Hans" typeface="华文新魏"/>
+        <a:font script="Hant" typeface="微軟正黑體"/>
+        <a:font script="Arab" typeface="Tahoma"/>
+        <a:font script="Hebr" typeface="Gisha"/>
+        <a:font script="Thai" typeface="IrisUPC"/>
         <a:font script="Ethi" typeface="Nyala"/>
         <a:font script="Beng" typeface="Vrinda"/>
         <a:font script="Gujr" typeface="Shruti"/>
@@ -4620,26 +8196,9 @@
         <a:font script="Viet" typeface="Arial"/>
         <a:font script="Uigh" typeface="Microsoft Uighur"/>
         <a:font script="Geor" typeface="Sylfaen"/>
-        <a:font script="Armn" typeface="Arial"/>
-        <a:font script="Bugi" typeface="Leelawadee UI"/>
-        <a:font script="Bopo" typeface="Microsoft JhengHei"/>
-        <a:font script="Java" typeface="Javanese Text"/>
-        <a:font script="Lisu" typeface="Segoe UI"/>
-        <a:font script="Mymr" typeface="Myanmar Text"/>
-        <a:font script="Nkoo" typeface="Ebrima"/>
-        <a:font script="Olck" typeface="Nirmala UI"/>
-        <a:font script="Osma" typeface="Ebrima"/>
-        <a:font script="Phag" typeface="Phagspa"/>
-        <a:font script="Syrn" typeface="Estrangelo Edessa"/>
-        <a:font script="Syrj" typeface="Estrangelo Edessa"/>
-        <a:font script="Syre" typeface="Estrangelo Edessa"/>
-        <a:font script="Sora" typeface="Nirmala UI"/>
-        <a:font script="Tale" typeface="Microsoft Tai Le"/>
-        <a:font script="Talu" typeface="Microsoft New Tai Lue"/>
-        <a:font script="Tfng" typeface="Ebrima"/>
       </a:minorFont>
     </a:fontScheme>
-    <a:fmtScheme name="Office">
+    <a:fmtScheme name="Facette">
       <a:fillStyleLst>
         <a:solidFill>
           <a:schemeClr val="phClr"/>
@@ -4648,23 +8207,13 @@
           <a:gsLst>
             <a:gs pos="0">
               <a:schemeClr val="phClr">
+                <a:tint val="65000"/>
                 <a:lumMod val="110000"/>
-                <a:satMod val="105000"/>
-                <a:tint val="67000"/>
               </a:schemeClr>
             </a:gs>
-            <a:gs pos="50000">
+            <a:gs pos="88000">
               <a:schemeClr val="phClr">
-                <a:lumMod val="105000"/>
-                <a:satMod val="103000"/>
-                <a:tint val="73000"/>
-              </a:schemeClr>
-            </a:gs>
-            <a:gs pos="100000">
-              <a:schemeClr val="phClr">
-                <a:lumMod val="105000"/>
-                <a:satMod val="109000"/>
-                <a:tint val="81000"/>
+                <a:tint val="90000"/>
               </a:schemeClr>
             </a:gs>
           </a:gsLst>
@@ -4674,23 +8223,14 @@
           <a:gsLst>
             <a:gs pos="0">
               <a:schemeClr val="phClr">
-                <a:satMod val="103000"/>
-                <a:lumMod val="102000"/>
-                <a:tint val="94000"/>
+                <a:tint val="96000"/>
+                <a:lumMod val="100000"/>
               </a:schemeClr>
             </a:gs>
-            <a:gs pos="50000">
+            <a:gs pos="78000">
               <a:schemeClr val="phClr">
-                <a:satMod val="110000"/>
-                <a:lumMod val="100000"/>
-                <a:shade val="100000"/>
-              </a:schemeClr>
-            </a:gs>
-            <a:gs pos="100000">
-              <a:schemeClr val="phClr">
-                <a:lumMod val="99000"/>
-                <a:satMod val="120000"/>
-                <a:shade val="78000"/>
+                <a:shade val="94000"/>
+                <a:lumMod val="94000"/>
               </a:schemeClr>
             </a:gs>
           </a:gsLst>
@@ -4698,26 +8238,23 @@
         </a:gradFill>
       </a:fillStyleLst>
       <a:lnStyleLst>
-        <a:ln w="12700" cap="flat" cmpd="sng" algn="ctr">
+        <a:ln w="12700" cap="rnd" cmpd="sng" algn="ctr">
           <a:solidFill>
             <a:schemeClr val="phClr"/>
           </a:solidFill>
           <a:prstDash val="solid"/>
-          <a:miter lim="800000"/>
         </a:ln>
-        <a:ln w="19050" cap="flat" cmpd="sng" algn="ctr">
+        <a:ln w="19050" cap="rnd" cmpd="sng" algn="ctr">
           <a:solidFill>
             <a:schemeClr val="phClr"/>
           </a:solidFill>
           <a:prstDash val="solid"/>
-          <a:miter lim="800000"/>
         </a:ln>
-        <a:ln w="25400" cap="flat" cmpd="sng" algn="ctr">
+        <a:ln w="25400" cap="rnd" cmpd="sng" algn="ctr">
           <a:solidFill>
             <a:schemeClr val="phClr"/>
           </a:solidFill>
           <a:prstDash val="solid"/>
-          <a:miter lim="800000"/>
         </a:ln>
       </a:lnStyleLst>
       <a:effectStyleLst>
@@ -4725,83 +8262,81 @@
           <a:effectLst/>
         </a:effectStyle>
         <a:effectStyle>
-          <a:effectLst/>
+          <a:effectLst>
+            <a:outerShdw blurRad="38100" dist="25400" dir="5400000" rotWithShape="0">
+              <a:srgbClr val="000000">
+                <a:alpha val="35000"/>
+              </a:srgbClr>
+            </a:outerShdw>
+          </a:effectLst>
         </a:effectStyle>
         <a:effectStyle>
           <a:effectLst>
-            <a:outerShdw blurRad="57150" dist="19050" dir="5400000" algn="ctr" rotWithShape="0">
+            <a:outerShdw blurRad="50800" dist="38100" dir="5400000" rotWithShape="0">
               <a:srgbClr val="000000">
-                <a:alpha val="63000"/>
+                <a:alpha val="35000"/>
               </a:srgbClr>
             </a:outerShdw>
           </a:effectLst>
+          <a:scene3d>
+            <a:camera prst="orthographicFront">
+              <a:rot lat="0" lon="0" rev="0"/>
+            </a:camera>
+            <a:lightRig rig="threePt" dir="tl"/>
+          </a:scene3d>
+          <a:sp3d prstMaterial="plastic">
+            <a:bevelT w="0" h="0"/>
+          </a:sp3d>
         </a:effectStyle>
       </a:effectStyleLst>
       <a:bgFillStyleLst>
         <a:solidFill>
           <a:schemeClr val="phClr"/>
         </a:solidFill>
-        <a:solidFill>
-          <a:schemeClr val="phClr">
-            <a:tint val="95000"/>
-            <a:satMod val="170000"/>
-          </a:schemeClr>
-        </a:solidFill>
         <a:gradFill rotWithShape="1">
           <a:gsLst>
             <a:gs pos="0">
               <a:schemeClr val="phClr">
-                <a:tint val="93000"/>
-                <a:satMod val="150000"/>
-                <a:shade val="98000"/>
-                <a:lumMod val="102000"/>
+                <a:tint val="90000"/>
+                <a:lumMod val="104000"/>
               </a:schemeClr>
             </a:gs>
-            <a:gs pos="50000">
+            <a:gs pos="94000">
               <a:schemeClr val="phClr">
-                <a:tint val="98000"/>
-                <a:satMod val="130000"/>
-                <a:shade val="90000"/>
-                <a:lumMod val="103000"/>
-              </a:schemeClr>
-            </a:gs>
-            <a:gs pos="100000">
-              <a:schemeClr val="phClr">
-                <a:shade val="63000"/>
-                <a:satMod val="120000"/>
+                <a:shade val="96000"/>
+                <a:lumMod val="82000"/>
               </a:schemeClr>
             </a:gs>
           </a:gsLst>
           <a:lin ang="5400000" scaled="0"/>
         </a:gradFill>
+        <a:gradFill rotWithShape="1">
+          <a:gsLst>
+            <a:gs pos="0">
+              <a:schemeClr val="phClr">
+                <a:tint val="90000"/>
+                <a:lumMod val="110000"/>
+              </a:schemeClr>
+            </a:gs>
+            <a:gs pos="100000">
+              <a:schemeClr val="phClr">
+                <a:shade val="94000"/>
+                <a:lumMod val="96000"/>
+              </a:schemeClr>
+            </a:gs>
+          </a:gsLst>
+          <a:path path="circle">
+            <a:fillToRect l="50000" t="50000" r="100000" b="100000"/>
+          </a:path>
+        </a:gradFill>
       </a:bgFillStyleLst>
     </a:fmtScheme>
   </a:themeElements>
-  <a:objectDefaults>
-    <a:lnDef>
-      <a:spPr/>
-      <a:bodyPr/>
-      <a:lstStyle/>
-      <a:style>
-        <a:lnRef idx="2">
-          <a:schemeClr val="accent1"/>
-        </a:lnRef>
-        <a:fillRef idx="0">
-          <a:schemeClr val="accent1"/>
-        </a:fillRef>
-        <a:effectRef idx="1">
-          <a:schemeClr val="accent1"/>
-        </a:effectRef>
-        <a:fontRef idx="minor">
-          <a:schemeClr val="tx1"/>
-        </a:fontRef>
-      </a:style>
-    </a:lnDef>
-  </a:objectDefaults>
+  <a:objectDefaults/>
   <a:extraClrSchemeLst/>
   <a:extLst>
     <a:ext uri="{05A4C25C-085E-4340-85A3-A5531E510DB2}">
-      <thm15:themeFamily xmlns:thm15="http://schemas.microsoft.com/office/thememl/2012/main" name="Office Theme" id="{2E142A2C-CD16-42D6-873A-C26D2A0506FA}" vid="{1BDDFF52-6CD6-40A5-AB3C-68EB2F1E4D0A}"/>
+      <thm15:themeFamily xmlns:thm15="http://schemas.microsoft.com/office/thememl/2012/main" name="Facet" id="{C0C680CD-088A-49FC-A102-D699147F32B2}" vid="{0B5AB586-D108-4FC1-8368-649FE654B894}"/>
     </a:ext>
   </a:extLst>
 </a:theme>
